--- a/PPTs/Lecture 5 Exercises.pptx
+++ b/PPTs/Lecture 5 Exercises.pptx
@@ -5,7 +5,7 @@
     <p:sldMasterId id="2147483663" r:id="rId1"/>
   </p:sldMasterIdLst>
   <p:notesMasterIdLst>
-    <p:notesMasterId r:id="rId9"/>
+    <p:notesMasterId r:id="rId10"/>
   </p:notesMasterIdLst>
   <p:sldIdLst>
     <p:sldId id="478" r:id="rId2"/>
@@ -13,30 +13,31 @@
     <p:sldId id="445" r:id="rId4"/>
     <p:sldId id="471" r:id="rId5"/>
     <p:sldId id="448" r:id="rId6"/>
-    <p:sldId id="472" r:id="rId7"/>
-    <p:sldId id="473" r:id="rId8"/>
+    <p:sldId id="479" r:id="rId7"/>
+    <p:sldId id="480" r:id="rId8"/>
+    <p:sldId id="484" r:id="rId9"/>
   </p:sldIdLst>
   <p:sldSz cx="12192000" cy="6858000"/>
   <p:notesSz cx="6858000" cy="9144000"/>
   <p:embeddedFontLst>
     <p:embeddedFont>
       <p:font typeface="Consolas" panose="020B0609020204030204" pitchFamily="49" charset="0"/>
-      <p:regular r:id="rId10"/>
-      <p:bold r:id="rId11"/>
-      <p:italic r:id="rId12"/>
-      <p:boldItalic r:id="rId13"/>
+      <p:regular r:id="rId11"/>
+      <p:bold r:id="rId12"/>
+      <p:italic r:id="rId13"/>
+      <p:boldItalic r:id="rId14"/>
     </p:embeddedFont>
     <p:embeddedFont>
       <p:font typeface="Quattrocento Sans" panose="020B0502050000020003" pitchFamily="34" charset="0"/>
-      <p:regular r:id="rId14"/>
-      <p:bold r:id="rId15"/>
-      <p:italic r:id="rId16"/>
-      <p:boldItalic r:id="rId17"/>
+      <p:regular r:id="rId15"/>
+      <p:bold r:id="rId16"/>
+      <p:italic r:id="rId17"/>
+      <p:boldItalic r:id="rId18"/>
     </p:embeddedFont>
     <p:embeddedFont>
       <p:font typeface="Roboto Light" panose="02000000000000000000" pitchFamily="2" charset="0"/>
-      <p:regular r:id="rId18"/>
-      <p:italic r:id="rId19"/>
+      <p:regular r:id="rId19"/>
+      <p:italic r:id="rId20"/>
     </p:embeddedFont>
   </p:embeddedFontLst>
   <p:defaultTextStyle>
@@ -279,7 +280,7 @@
 <file path=ppt/revisionInfo.xml><?xml version="1.0" encoding="utf-8"?>
 <p1510:revInfo xmlns:a="http://schemas.openxmlformats.org/drawingml/2006/main" xmlns:r="http://schemas.openxmlformats.org/officeDocument/2006/relationships" xmlns:p1510="http://schemas.microsoft.com/office/powerpoint/2015/10/main">
   <p1510:revLst>
-    <p1510:client id="{FF133EAE-9452-4A4F-AA2F-8C1BA018900D}" v="1" dt="2026-01-30T04:37:44.338"/>
+    <p1510:client id="{FF133EAE-9452-4A4F-AA2F-8C1BA018900D}" v="14" dt="2026-01-31T23:29:29.570"/>
   </p1510:revLst>
 </p1510:revInfo>
 </file>
@@ -288,8 +289,8 @@
 <pc:chgInfo xmlns:a="http://schemas.openxmlformats.org/drawingml/2006/main" xmlns:r="http://schemas.openxmlformats.org/officeDocument/2006/relationships" xmlns:ac="http://schemas.microsoft.com/office/drawing/2013/main/command" xmlns:pc="http://schemas.microsoft.com/office/powerpoint/2013/main/command">
   <pc:docChgLst>
     <pc:chgData name="Zonghua Gu" userId="9a7e1853e1951ef5" providerId="LiveId" clId="{CF1FAA12-072C-4ED5-BA76-0FFFAEFDB88A}"/>
-    <pc:docChg chg="addSld delSld modSld">
-      <pc:chgData name="Zonghua Gu" userId="9a7e1853e1951ef5" providerId="LiveId" clId="{CF1FAA12-072C-4ED5-BA76-0FFFAEFDB88A}" dt="2026-01-30T04:41:56.937" v="5" actId="20577"/>
+    <pc:docChg chg="undo custSel addSld delSld modSld">
+      <pc:chgData name="Zonghua Gu" userId="9a7e1853e1951ef5" providerId="LiveId" clId="{CF1FAA12-072C-4ED5-BA76-0FFFAEFDB88A}" dt="2026-01-31T23:30:05.996" v="207" actId="1076"/>
       <pc:docMkLst>
         <pc:docMk/>
       </pc:docMkLst>
@@ -298,6 +299,20 @@
         <pc:sldMkLst>
           <pc:docMk/>
           <pc:sldMk cId="0" sldId="296"/>
+        </pc:sldMkLst>
+      </pc:sldChg>
+      <pc:sldChg chg="del">
+        <pc:chgData name="Zonghua Gu" userId="9a7e1853e1951ef5" providerId="LiveId" clId="{CF1FAA12-072C-4ED5-BA76-0FFFAEFDB88A}" dt="2026-01-31T20:43:14.115" v="6" actId="47"/>
+        <pc:sldMkLst>
+          <pc:docMk/>
+          <pc:sldMk cId="849030039" sldId="472"/>
+        </pc:sldMkLst>
+      </pc:sldChg>
+      <pc:sldChg chg="del">
+        <pc:chgData name="Zonghua Gu" userId="9a7e1853e1951ef5" providerId="LiveId" clId="{CF1FAA12-072C-4ED5-BA76-0FFFAEFDB88A}" dt="2026-01-31T20:43:14.115" v="6" actId="47"/>
+        <pc:sldMkLst>
+          <pc:docMk/>
+          <pc:sldMk cId="269776279" sldId="473"/>
         </pc:sldMkLst>
       </pc:sldChg>
       <pc:sldChg chg="modSp add mod">
@@ -312,6 +327,191 @@
             <pc:docMk/>
             <pc:sldMk cId="0" sldId="478"/>
             <ac:spMk id="160" creationId="{00000000-0000-0000-0000-000000000000}"/>
+          </ac:spMkLst>
+        </pc:spChg>
+      </pc:sldChg>
+      <pc:sldChg chg="modSp add mod">
+        <pc:chgData name="Zonghua Gu" userId="9a7e1853e1951ef5" providerId="LiveId" clId="{CF1FAA12-072C-4ED5-BA76-0FFFAEFDB88A}" dt="2026-01-31T23:30:05.996" v="207" actId="1076"/>
+        <pc:sldMkLst>
+          <pc:docMk/>
+          <pc:sldMk cId="605038739" sldId="479"/>
+        </pc:sldMkLst>
+        <pc:picChg chg="mod">
+          <ac:chgData name="Zonghua Gu" userId="9a7e1853e1951ef5" providerId="LiveId" clId="{CF1FAA12-072C-4ED5-BA76-0FFFAEFDB88A}" dt="2026-01-31T23:30:02.249" v="204" actId="14100"/>
+          <ac:picMkLst>
+            <pc:docMk/>
+            <pc:sldMk cId="605038739" sldId="479"/>
+            <ac:picMk id="26" creationId="{283422A4-BC01-28E5-623C-C101D271B557}"/>
+          </ac:picMkLst>
+        </pc:picChg>
+        <pc:picChg chg="mod">
+          <ac:chgData name="Zonghua Gu" userId="9a7e1853e1951ef5" providerId="LiveId" clId="{CF1FAA12-072C-4ED5-BA76-0FFFAEFDB88A}" dt="2026-01-31T23:30:05.996" v="207" actId="1076"/>
+          <ac:picMkLst>
+            <pc:docMk/>
+            <pc:sldMk cId="605038739" sldId="479"/>
+            <ac:picMk id="44" creationId="{5B5F5F05-4A14-D8D3-DC89-06AE26FA4C9D}"/>
+          </ac:picMkLst>
+        </pc:picChg>
+      </pc:sldChg>
+      <pc:sldChg chg="addSp modSp new mod">
+        <pc:chgData name="Zonghua Gu" userId="9a7e1853e1951ef5" providerId="LiveId" clId="{CF1FAA12-072C-4ED5-BA76-0FFFAEFDB88A}" dt="2026-01-31T23:29:20.682" v="192" actId="20577"/>
+        <pc:sldMkLst>
+          <pc:docMk/>
+          <pc:sldMk cId="440691786" sldId="480"/>
+        </pc:sldMkLst>
+        <pc:spChg chg="mod">
+          <ac:chgData name="Zonghua Gu" userId="9a7e1853e1951ef5" providerId="LiveId" clId="{CF1FAA12-072C-4ED5-BA76-0FFFAEFDB88A}" dt="2026-01-31T22:01:03.206" v="12"/>
+          <ac:spMkLst>
+            <pc:docMk/>
+            <pc:sldMk cId="440691786" sldId="480"/>
+            <ac:spMk id="2" creationId="{8D388046-0321-C196-0816-2AE53FE69E53}"/>
+          </ac:spMkLst>
+        </pc:spChg>
+        <pc:spChg chg="mod">
+          <ac:chgData name="Zonghua Gu" userId="9a7e1853e1951ef5" providerId="LiveId" clId="{CF1FAA12-072C-4ED5-BA76-0FFFAEFDB88A}" dt="2026-01-31T23:29:20.682" v="192" actId="20577"/>
+          <ac:spMkLst>
+            <pc:docMk/>
+            <pc:sldMk cId="440691786" sldId="480"/>
+            <ac:spMk id="3" creationId="{2BC8C81A-96B7-027C-4E6E-48DE3E1042D0}"/>
+          </ac:spMkLst>
+        </pc:spChg>
+        <pc:picChg chg="add mod">
+          <ac:chgData name="Zonghua Gu" userId="9a7e1853e1951ef5" providerId="LiveId" clId="{CF1FAA12-072C-4ED5-BA76-0FFFAEFDB88A}" dt="2026-01-31T23:29:10.877" v="158" actId="1076"/>
+          <ac:picMkLst>
+            <pc:docMk/>
+            <pc:sldMk cId="440691786" sldId="480"/>
+            <ac:picMk id="5" creationId="{3DEF34D5-E3F6-515C-F3F8-FAC7AB1D5057}"/>
+          </ac:picMkLst>
+        </pc:picChg>
+      </pc:sldChg>
+      <pc:sldChg chg="addSp modSp new del mod">
+        <pc:chgData name="Zonghua Gu" userId="9a7e1853e1951ef5" providerId="LiveId" clId="{CF1FAA12-072C-4ED5-BA76-0FFFAEFDB88A}" dt="2026-01-31T23:28:30.093" v="153" actId="2696"/>
+        <pc:sldMkLst>
+          <pc:docMk/>
+          <pc:sldMk cId="4249766174" sldId="481"/>
+        </pc:sldMkLst>
+        <pc:spChg chg="mod">
+          <ac:chgData name="Zonghua Gu" userId="9a7e1853e1951ef5" providerId="LiveId" clId="{CF1FAA12-072C-4ED5-BA76-0FFFAEFDB88A}" dt="2026-01-31T22:08:05.115" v="142" actId="20577"/>
+          <ac:spMkLst>
+            <pc:docMk/>
+            <pc:sldMk cId="4249766174" sldId="481"/>
+            <ac:spMk id="2" creationId="{B74830B7-A807-332F-F40E-81D85422D6F8}"/>
+          </ac:spMkLst>
+        </pc:spChg>
+        <pc:spChg chg="mod">
+          <ac:chgData name="Zonghua Gu" userId="9a7e1853e1951ef5" providerId="LiveId" clId="{CF1FAA12-072C-4ED5-BA76-0FFFAEFDB88A}" dt="2026-01-31T22:04:49.885" v="66" actId="20577"/>
+          <ac:spMkLst>
+            <pc:docMk/>
+            <pc:sldMk cId="4249766174" sldId="481"/>
+            <ac:spMk id="3" creationId="{D21B8DC3-AB3D-C99A-48EF-04207C68AC9D}"/>
+          </ac:spMkLst>
+        </pc:spChg>
+        <pc:spChg chg="add mod">
+          <ac:chgData name="Zonghua Gu" userId="9a7e1853e1951ef5" providerId="LiveId" clId="{CF1FAA12-072C-4ED5-BA76-0FFFAEFDB88A}" dt="2026-01-31T22:05:28.634" v="79" actId="1036"/>
+          <ac:spMkLst>
+            <pc:docMk/>
+            <pc:sldMk cId="4249766174" sldId="481"/>
+            <ac:spMk id="5" creationId="{C81DC15B-FC73-3CBE-0F98-37D05B030825}"/>
+          </ac:spMkLst>
+        </pc:spChg>
+        <pc:picChg chg="add mod">
+          <ac:chgData name="Zonghua Gu" userId="9a7e1853e1951ef5" providerId="LiveId" clId="{CF1FAA12-072C-4ED5-BA76-0FFFAEFDB88A}" dt="2026-01-31T22:03:01.340" v="32" actId="14100"/>
+          <ac:picMkLst>
+            <pc:docMk/>
+            <pc:sldMk cId="4249766174" sldId="481"/>
+            <ac:picMk id="4" creationId="{E299BF82-B920-E30E-ABFC-D5EE89455D18}"/>
+          </ac:picMkLst>
+        </pc:picChg>
+      </pc:sldChg>
+      <pc:sldChg chg="new del">
+        <pc:chgData name="Zonghua Gu" userId="9a7e1853e1951ef5" providerId="LiveId" clId="{CF1FAA12-072C-4ED5-BA76-0FFFAEFDB88A}" dt="2026-01-31T23:27:54.091" v="152" actId="47"/>
+        <pc:sldMkLst>
+          <pc:docMk/>
+          <pc:sldMk cId="3223690338" sldId="482"/>
+        </pc:sldMkLst>
+      </pc:sldChg>
+      <pc:sldChg chg="addSp modSp add del mod">
+        <pc:chgData name="Zonghua Gu" userId="9a7e1853e1951ef5" providerId="LiveId" clId="{CF1FAA12-072C-4ED5-BA76-0FFFAEFDB88A}" dt="2026-01-31T23:28:30.093" v="153" actId="2696"/>
+        <pc:sldMkLst>
+          <pc:docMk/>
+          <pc:sldMk cId="3717419321" sldId="483"/>
+        </pc:sldMkLst>
+        <pc:spChg chg="mod">
+          <ac:chgData name="Zonghua Gu" userId="9a7e1853e1951ef5" providerId="LiveId" clId="{CF1FAA12-072C-4ED5-BA76-0FFFAEFDB88A}" dt="2026-01-31T22:08:09.126" v="143"/>
+          <ac:spMkLst>
+            <pc:docMk/>
+            <pc:sldMk cId="3717419321" sldId="483"/>
+            <ac:spMk id="2" creationId="{E38CE5F9-3115-B831-A7A6-42678D842ECD}"/>
+          </ac:spMkLst>
+        </pc:spChg>
+        <pc:spChg chg="mod">
+          <ac:chgData name="Zonghua Gu" userId="9a7e1853e1951ef5" providerId="LiveId" clId="{CF1FAA12-072C-4ED5-BA76-0FFFAEFDB88A}" dt="2026-01-31T22:07:46.384" v="137" actId="20577"/>
+          <ac:spMkLst>
+            <pc:docMk/>
+            <pc:sldMk cId="3717419321" sldId="483"/>
+            <ac:spMk id="3" creationId="{685A4113-6553-7A32-25E4-E8BBD4374366}"/>
+          </ac:spMkLst>
+        </pc:spChg>
+        <pc:spChg chg="add mod">
+          <ac:chgData name="Zonghua Gu" userId="9a7e1853e1951ef5" providerId="LiveId" clId="{CF1FAA12-072C-4ED5-BA76-0FFFAEFDB88A}" dt="2026-01-31T22:06:38.422" v="114" actId="1037"/>
+          <ac:spMkLst>
+            <pc:docMk/>
+            <pc:sldMk cId="3717419321" sldId="483"/>
+            <ac:spMk id="6" creationId="{6D335CA4-6DAB-93FB-4D6F-C39CEEC76A0C}"/>
+          </ac:spMkLst>
+        </pc:spChg>
+      </pc:sldChg>
+      <pc:sldChg chg="addSp delSp modSp new mod">
+        <pc:chgData name="Zonghua Gu" userId="9a7e1853e1951ef5" providerId="LiveId" clId="{CF1FAA12-072C-4ED5-BA76-0FFFAEFDB88A}" dt="2026-01-31T23:29:37.158" v="199" actId="1076"/>
+        <pc:sldMkLst>
+          <pc:docMk/>
+          <pc:sldMk cId="2672158686" sldId="484"/>
+        </pc:sldMkLst>
+        <pc:spChg chg="mod">
+          <ac:chgData name="Zonghua Gu" userId="9a7e1853e1951ef5" providerId="LiveId" clId="{CF1FAA12-072C-4ED5-BA76-0FFFAEFDB88A}" dt="2026-01-31T22:08:25.845" v="148" actId="20577"/>
+          <ac:spMkLst>
+            <pc:docMk/>
+            <pc:sldMk cId="2672158686" sldId="484"/>
+            <ac:spMk id="2" creationId="{CB838235-6715-0DD1-C6BA-0CF3305B374B}"/>
+          </ac:spMkLst>
+        </pc:spChg>
+        <pc:spChg chg="del">
+          <ac:chgData name="Zonghua Gu" userId="9a7e1853e1951ef5" providerId="LiveId" clId="{CF1FAA12-072C-4ED5-BA76-0FFFAEFDB88A}" dt="2026-01-31T23:29:29.217" v="194" actId="478"/>
+          <ac:spMkLst>
+            <pc:docMk/>
+            <pc:sldMk cId="2672158686" sldId="484"/>
+            <ac:spMk id="3" creationId="{B322F993-8B2A-AB27-2312-029BF6AF0A23}"/>
+          </ac:spMkLst>
+        </pc:spChg>
+        <pc:spChg chg="add mod">
+          <ac:chgData name="Zonghua Gu" userId="9a7e1853e1951ef5" providerId="LiveId" clId="{CF1FAA12-072C-4ED5-BA76-0FFFAEFDB88A}" dt="2026-01-31T23:29:29.570" v="195"/>
+          <ac:spMkLst>
+            <pc:docMk/>
+            <pc:sldMk cId="2672158686" sldId="484"/>
+            <ac:spMk id="6" creationId="{21D0BAF4-E08C-F3A2-7BD1-2E823A751FCF}"/>
+          </ac:spMkLst>
+        </pc:spChg>
+        <pc:picChg chg="add mod">
+          <ac:chgData name="Zonghua Gu" userId="9a7e1853e1951ef5" providerId="LiveId" clId="{CF1FAA12-072C-4ED5-BA76-0FFFAEFDB88A}" dt="2026-01-31T23:29:37.158" v="199" actId="1076"/>
+          <ac:picMkLst>
+            <pc:docMk/>
+            <pc:sldMk cId="2672158686" sldId="484"/>
+            <ac:picMk id="5" creationId="{F63452E6-D673-5F27-D87F-132EF3EE7C06}"/>
+          </ac:picMkLst>
+        </pc:picChg>
+      </pc:sldChg>
+      <pc:sldChg chg="modSp new del">
+        <pc:chgData name="Zonghua Gu" userId="9a7e1853e1951ef5" providerId="LiveId" clId="{CF1FAA12-072C-4ED5-BA76-0FFFAEFDB88A}" dt="2026-01-31T23:27:54.091" v="152" actId="47"/>
+        <pc:sldMkLst>
+          <pc:docMk/>
+          <pc:sldMk cId="35051916" sldId="485"/>
+        </pc:sldMkLst>
+        <pc:spChg chg="mod">
+          <ac:chgData name="Zonghua Gu" userId="9a7e1853e1951ef5" providerId="LiveId" clId="{CF1FAA12-072C-4ED5-BA76-0FFFAEFDB88A}" dt="2026-01-31T22:09:17.279" v="151"/>
+          <ac:spMkLst>
+            <pc:docMk/>
+            <pc:sldMk cId="35051916" sldId="485"/>
+            <ac:spMk id="3" creationId="{F3D8B28A-FEBC-1188-3A9C-52E8BA438E21}"/>
           </ac:spMkLst>
         </pc:spChg>
       </pc:sldChg>
@@ -2420,125 +2620,6 @@
 </p:notes>
 </file>
 
-<file path=ppt/notesSlides/notesSlide6.xml><?xml version="1.0" encoding="utf-8"?>
-<p:notes xmlns:a="http://schemas.openxmlformats.org/drawingml/2006/main" xmlns:r="http://schemas.openxmlformats.org/officeDocument/2006/relationships" xmlns:p="http://schemas.openxmlformats.org/presentationml/2006/main">
-  <p:cSld>
-    <p:spTree>
-      <p:nvGrpSpPr>
-        <p:cNvPr id="1" name=""/>
-        <p:cNvGrpSpPr/>
-        <p:nvPr/>
-      </p:nvGrpSpPr>
-      <p:grpSpPr>
-        <a:xfrm>
-          <a:off x="0" y="0"/>
-          <a:ext cx="0" cy="0"/>
-          <a:chOff x="0" y="0"/>
-          <a:chExt cx="0" cy="0"/>
-        </a:xfrm>
-      </p:grpSpPr>
-      <p:sp>
-        <p:nvSpPr>
-          <p:cNvPr id="2" name="Slide Image Placeholder 1"/>
-          <p:cNvSpPr>
-            <a:spLocks noGrp="1" noRot="1" noChangeAspect="1"/>
-          </p:cNvSpPr>
-          <p:nvPr>
-            <p:ph type="sldImg"/>
-          </p:nvPr>
-        </p:nvSpPr>
-        <p:spPr/>
-      </p:sp>
-      <p:sp>
-        <p:nvSpPr>
-          <p:cNvPr id="3" name="Notes Placeholder 2"/>
-          <p:cNvSpPr>
-            <a:spLocks noGrp="1"/>
-          </p:cNvSpPr>
-          <p:nvPr>
-            <p:ph type="body" idx="1"/>
-          </p:nvPr>
-        </p:nvSpPr>
-        <p:spPr/>
-        <p:txBody>
-          <a:bodyPr/>
-          <a:lstStyle/>
-          <a:p>
-            <a:endParaRPr lang="en-GB" dirty="0"/>
-          </a:p>
-          <a:p>
-            <a:r>
-              <a:rPr lang="en-GB" dirty="0"/>
-              <a:t>Consider this DAG, use Topological Sort to find Shortest Paths in DAG start, considering all possible topological orders</a:t>
-            </a:r>
-            <a:endParaRPr lang="en-SE" dirty="0"/>
-          </a:p>
-          <a:p>
-            <a:endParaRPr lang="en-SE" dirty="0"/>
-          </a:p>
-        </p:txBody>
-      </p:sp>
-      <p:sp>
-        <p:nvSpPr>
-          <p:cNvPr id="4" name="Slide Number Placeholder 3"/>
-          <p:cNvSpPr>
-            <a:spLocks noGrp="1"/>
-          </p:cNvSpPr>
-          <p:nvPr>
-            <p:ph type="sldNum" idx="12"/>
-          </p:nvPr>
-        </p:nvSpPr>
-        <p:spPr/>
-        <p:txBody>
-          <a:bodyPr/>
-          <a:lstStyle/>
-          <a:p>
-            <a:pPr marL="0" marR="0" lvl="0" indent="0" algn="r" rtl="0">
-              <a:spcBef>
-                <a:spcPts val="0"/>
-              </a:spcBef>
-              <a:spcAft>
-                <a:spcPts val="0"/>
-              </a:spcAft>
-              <a:buNone/>
-            </a:pPr>
-            <a:fld id="{00000000-1234-1234-1234-123412341234}" type="slidenum">
-              <a:rPr lang="en-US" sz="1200" b="0" i="0" u="none" strike="noStrike" cap="none" smtClean="0">
-                <a:solidFill>
-                  <a:schemeClr val="dk1"/>
-                </a:solidFill>
-                <a:latin typeface="Calibri"/>
-                <a:ea typeface="Calibri"/>
-                <a:cs typeface="Calibri"/>
-                <a:sym typeface="Calibri"/>
-              </a:rPr>
-              <a:t>6</a:t>
-            </a:fld>
-            <a:endParaRPr lang="en-US" sz="1200" b="0" i="0" u="none" strike="noStrike" cap="none">
-              <a:solidFill>
-                <a:schemeClr val="dk1"/>
-              </a:solidFill>
-              <a:latin typeface="Calibri"/>
-              <a:ea typeface="Calibri"/>
-              <a:cs typeface="Calibri"/>
-              <a:sym typeface="Calibri"/>
-            </a:endParaRPr>
-          </a:p>
-        </p:txBody>
-      </p:sp>
-    </p:spTree>
-    <p:extLst>
-      <p:ext uri="{BB962C8B-B14F-4D97-AF65-F5344CB8AC3E}">
-        <p14:creationId xmlns:p14="http://schemas.microsoft.com/office/powerpoint/2010/main" val="1758041673"/>
-      </p:ext>
-    </p:extLst>
-  </p:cSld>
-  <p:clrMapOvr>
-    <a:masterClrMapping/>
-  </p:clrMapOvr>
-</p:notes>
-</file>
-
 <file path=ppt/slideLayouts/slideLayout1.xml><?xml version="1.0" encoding="utf-8"?>
 <p:sldLayout xmlns:a="http://schemas.openxmlformats.org/drawingml/2006/main" xmlns:r="http://schemas.openxmlformats.org/officeDocument/2006/relationships" xmlns:p="http://schemas.openxmlformats.org/presentationml/2006/main" matchingName="1_Custom Layout" userDrawn="1">
   <p:cSld name="1_Custom Layout">
@@ -3593,7 +3674,7 @@
           <a:p>
             <a:fld id="{FB221443-D73C-634A-A910-7320408C156D}" type="datetimeFigureOut">
               <a:rPr lang="en-US" smtClean="0"/>
-              <a:t>1/29/2026</a:t>
+              <a:t>1/31/2026</a:t>
             </a:fld>
             <a:endParaRPr lang="en-US"/>
           </a:p>
@@ -35388,13 +35469,7 @@
   <p:cSld>
     <p:spTree>
       <p:nvGrpSpPr>
-        <p:cNvPr id="1" name="">
-          <a:extLst>
-            <a:ext uri="{FF2B5EF4-FFF2-40B4-BE49-F238E27FC236}">
-              <a16:creationId xmlns:a16="http://schemas.microsoft.com/office/drawing/2014/main" id="{CAD58037-337A-A42C-486D-428810D3B8B3}"/>
-            </a:ext>
-          </a:extLst>
-        </p:cNvPr>
+        <p:cNvPr id="1" name=""/>
         <p:cNvGrpSpPr/>
         <p:nvPr/>
       </p:nvGrpSpPr>
@@ -35408,10 +35483,38 @@
       </p:grpSpPr>
       <p:sp>
         <p:nvSpPr>
+          <p:cNvPr id="2" name="Title 1">
+            <a:extLst>
+              <a:ext uri="{FF2B5EF4-FFF2-40B4-BE49-F238E27FC236}">
+                <a16:creationId xmlns:a16="http://schemas.microsoft.com/office/drawing/2014/main" id="{56426095-2CF4-A6EA-7E4A-CFDB1E124FCB}"/>
+              </a:ext>
+            </a:extLst>
+          </p:cNvPr>
+          <p:cNvSpPr>
+            <a:spLocks noGrp="1"/>
+          </p:cNvSpPr>
+          <p:nvPr>
+            <p:ph type="title"/>
+          </p:nvPr>
+        </p:nvSpPr>
+        <p:spPr/>
+        <p:txBody>
+          <a:bodyPr/>
+          <a:lstStyle/>
+          <a:p>
+            <a:r>
+              <a:rPr lang="en-US" dirty="0"/>
+              <a:t>Q. Distance-Vector</a:t>
+            </a:r>
+          </a:p>
+        </p:txBody>
+      </p:sp>
+      <p:sp>
+        <p:nvSpPr>
           <p:cNvPr id="3" name="Content Placeholder 2">
             <a:extLst>
               <a:ext uri="{FF2B5EF4-FFF2-40B4-BE49-F238E27FC236}">
-                <a16:creationId xmlns:a16="http://schemas.microsoft.com/office/drawing/2014/main" id="{405264A7-FFC5-5817-BB3F-BE1D556706D1}"/>
+                <a16:creationId xmlns:a16="http://schemas.microsoft.com/office/drawing/2014/main" id="{11BFAD36-4A32-7306-2153-56ABCC7192CF}"/>
               </a:ext>
             </a:extLst>
           </p:cNvPr>
@@ -35424,2571 +35527,130 @@
         </p:nvSpPr>
         <p:spPr>
           <a:xfrm>
-            <a:off x="153631" y="1365196"/>
-            <a:ext cx="8116216" cy="1421126"/>
-          </a:xfrm>
-        </p:spPr>
-        <p:txBody>
-          <a:bodyPr>
-            <a:normAutofit fontScale="77500" lnSpcReduction="20000"/>
-          </a:bodyPr>
-          <a:lstStyle/>
-          <a:p>
-            <a:r>
-              <a:rPr lang="en-GB" sz="2800" dirty="0">
-                <a:latin typeface="Quattrocento Sans" panose="020B0502050000020003" pitchFamily="34" charset="0"/>
-              </a:rPr>
-              <a:t>Given this directed graph, run </a:t>
-            </a:r>
-            <a:r>
-              <a:rPr lang="en-GB" sz="2800" dirty="0"/>
-              <a:t>Topological Sort </a:t>
-            </a:r>
-            <a:r>
-              <a:rPr lang="en-GB" sz="2800" dirty="0">
-                <a:latin typeface="Quattrocento Sans" panose="020B0502050000020003" pitchFamily="34" charset="0"/>
-              </a:rPr>
-              <a:t>to find shortest paths starting from </a:t>
-            </a:r>
-            <a:r>
-              <a:rPr lang="en-GB" sz="2800" dirty="0">
-                <a:solidFill>
-                  <a:srgbClr val="FF0000"/>
-                </a:solidFill>
-                <a:latin typeface="Quattrocento Sans" panose="020B0502050000020003" pitchFamily="34" charset="0"/>
-              </a:rPr>
-              <a:t>source node A</a:t>
-            </a:r>
-            <a:r>
-              <a:rPr lang="en-GB" sz="2800" dirty="0">
-                <a:latin typeface="Quattrocento Sans" panose="020B0502050000020003" pitchFamily="34" charset="0"/>
-              </a:rPr>
-              <a:t>. Give the node visit order, and fill in this table of SN (Shortest Distance) and PN (Previous Node), crossing out old SD and PN as you find a shortcut path with smaller SD. Considering </a:t>
-            </a:r>
-            <a:r>
-              <a:rPr lang="en-GB" sz="2800" dirty="0">
-                <a:solidFill>
-                  <a:srgbClr val="FF0000"/>
-                </a:solidFill>
-                <a:latin typeface="Quattrocento Sans" panose="020B0502050000020003" pitchFamily="34" charset="0"/>
-              </a:rPr>
-              <a:t>all possible </a:t>
-            </a:r>
-            <a:r>
-              <a:rPr lang="en-GB" sz="2800" dirty="0">
-                <a:latin typeface="Quattrocento Sans" panose="020B0502050000020003" pitchFamily="34" charset="0"/>
-              </a:rPr>
-              <a:t>topological orders.</a:t>
-            </a:r>
-          </a:p>
-        </p:txBody>
-      </p:sp>
-      <p:sp>
-        <p:nvSpPr>
-          <p:cNvPr id="74" name="Title 1">
-            <a:extLst>
-              <a:ext uri="{FF2B5EF4-FFF2-40B4-BE49-F238E27FC236}">
-                <a16:creationId xmlns:a16="http://schemas.microsoft.com/office/drawing/2014/main" id="{9532A599-2993-5B42-8C77-4772585ADE19}"/>
-              </a:ext>
-            </a:extLst>
-          </p:cNvPr>
-          <p:cNvSpPr>
-            <a:spLocks noGrp="1"/>
-          </p:cNvSpPr>
-          <p:nvPr>
-            <p:ph type="title"/>
-          </p:nvPr>
-        </p:nvSpPr>
-        <p:spPr>
-          <a:xfrm>
-            <a:off x="609600" y="274638"/>
-            <a:ext cx="10972800" cy="1143000"/>
+            <a:off x="575238" y="965094"/>
+            <a:ext cx="11187000" cy="5435292"/>
           </a:xfrm>
         </p:spPr>
         <p:txBody>
           <a:bodyPr/>
           <a:lstStyle/>
           <a:p>
+            <a:pPr marL="63500" indent="0">
+              <a:buNone/>
+            </a:pPr>
             <a:r>
-              <a:rPr lang="en-US" altLang="zh-CN" sz="4300" dirty="0">
-                <a:solidFill>
-                  <a:srgbClr val="0C0C0C"/>
-                </a:solidFill>
-                <a:latin typeface="Quattrocento Sans"/>
-                <a:sym typeface="Quattrocento Sans"/>
-              </a:rPr>
-              <a:t>Q. Topological Sort</a:t>
+              <a:rPr lang="en-US" dirty="0"/>
+              <a:t>Consider running the distance-vector protocol on the topology below. Unlabeled links have cost 1. Fill in the routing tables based on Distance-Vector algorithm. (refer to the handout for details.)</a:t>
             </a:r>
-            <a:endParaRPr lang="en-SE" sz="4300" dirty="0">
-              <a:solidFill>
-                <a:srgbClr val="0C0C0C"/>
-              </a:solidFill>
-              <a:latin typeface="Quattrocento Sans"/>
-              <a:sym typeface="Quattrocento Sans"/>
-            </a:endParaRPr>
+          </a:p>
+          <a:p>
+            <a:pPr marL="63500" indent="0">
+              <a:buNone/>
+            </a:pPr>
+            <a:endParaRPr lang="en-US" dirty="0"/>
+          </a:p>
+          <a:p>
+            <a:pPr marL="63500" indent="0">
+              <a:buNone/>
+            </a:pPr>
+            <a:endParaRPr lang="en-US" dirty="0"/>
+          </a:p>
+          <a:p>
+            <a:pPr marL="63500" indent="0">
+              <a:buNone/>
+            </a:pPr>
+            <a:endParaRPr lang="en-US" dirty="0"/>
+          </a:p>
+          <a:p>
+            <a:pPr marL="63500" indent="0">
+              <a:buNone/>
+            </a:pPr>
+            <a:endParaRPr lang="en-US" dirty="0"/>
+          </a:p>
+          <a:p>
+            <a:pPr marL="63500" indent="0">
+              <a:buNone/>
+            </a:pPr>
+            <a:endParaRPr lang="en-US" dirty="0"/>
+          </a:p>
+          <a:p>
+            <a:pPr marL="63500" indent="0">
+              <a:buNone/>
+            </a:pPr>
+            <a:endParaRPr lang="en-US" dirty="0"/>
+          </a:p>
+          <a:p>
+            <a:endParaRPr lang="en-US" dirty="0"/>
+          </a:p>
+          <a:p>
+            <a:endParaRPr lang="en-US" dirty="0"/>
           </a:p>
         </p:txBody>
       </p:sp>
-      <p:grpSp>
-        <p:nvGrpSpPr>
-          <p:cNvPr id="76" name="Group 75">
+      <p:pic>
+        <p:nvPicPr>
+          <p:cNvPr id="26" name="Picture 25">
             <a:extLst>
               <a:ext uri="{FF2B5EF4-FFF2-40B4-BE49-F238E27FC236}">
-                <a16:creationId xmlns:a16="http://schemas.microsoft.com/office/drawing/2014/main" id="{7FB4CE10-9B58-9DF4-A4B3-C64E52B73EF3}"/>
+                <a16:creationId xmlns:a16="http://schemas.microsoft.com/office/drawing/2014/main" id="{283422A4-BC01-28E5-623C-C101D271B557}"/>
               </a:ext>
             </a:extLst>
           </p:cNvPr>
-          <p:cNvGrpSpPr/>
+          <p:cNvPicPr>
+            <a:picLocks noChangeAspect="1"/>
+          </p:cNvPicPr>
           <p:nvPr/>
-        </p:nvGrpSpPr>
-        <p:grpSpPr>
+        </p:nvPicPr>
+        <p:blipFill>
+          <a:blip r:embed="rId2"/>
+          <a:stretch>
+            <a:fillRect/>
+          </a:stretch>
+        </p:blipFill>
+        <p:spPr>
           <a:xfrm>
-            <a:off x="8716485" y="1744394"/>
-            <a:ext cx="3092700" cy="3321807"/>
-            <a:chOff x="8841391" y="1894638"/>
-            <a:chExt cx="3092700" cy="3321807"/>
-          </a:xfrm>
-        </p:grpSpPr>
-        <p:graphicFrame>
-          <p:nvGraphicFramePr>
-            <p:cNvPr id="89" name="Google Shape;519;p34">
-              <a:extLst>
-                <a:ext uri="{FF2B5EF4-FFF2-40B4-BE49-F238E27FC236}">
-                  <a16:creationId xmlns:a16="http://schemas.microsoft.com/office/drawing/2014/main" id="{115B324E-BE77-5900-E4AF-F3C8A2C8DBA8}"/>
-                </a:ext>
-              </a:extLst>
-            </p:cNvPr>
-            <p:cNvGraphicFramePr/>
-            <p:nvPr/>
-          </p:nvGraphicFramePr>
-          <p:xfrm>
-            <a:off x="8841391" y="2976235"/>
-            <a:ext cx="3092700" cy="2240210"/>
-          </p:xfrm>
-          <a:graphic>
-            <a:graphicData uri="http://schemas.openxmlformats.org/drawingml/2006/table">
-              <a:tbl>
-                <a:tblPr firstRow="1" bandRow="1">
-                  <a:noFill/>
-                </a:tblPr>
-                <a:tblGrid>
-                  <a:gridCol w="1030900">
-                    <a:extLst>
-                      <a:ext uri="{9D8B030D-6E8A-4147-A177-3AD203B41FA5}">
-                        <a16:colId xmlns:a16="http://schemas.microsoft.com/office/drawing/2014/main" val="20000"/>
-                      </a:ext>
-                    </a:extLst>
-                  </a:gridCol>
-                  <a:gridCol w="1030900">
-                    <a:extLst>
-                      <a:ext uri="{9D8B030D-6E8A-4147-A177-3AD203B41FA5}">
-                        <a16:colId xmlns:a16="http://schemas.microsoft.com/office/drawing/2014/main" val="20002"/>
-                      </a:ext>
-                    </a:extLst>
-                  </a:gridCol>
-                  <a:gridCol w="1030900">
-                    <a:extLst>
-                      <a:ext uri="{9D8B030D-6E8A-4147-A177-3AD203B41FA5}">
-                        <a16:colId xmlns:a16="http://schemas.microsoft.com/office/drawing/2014/main" val="20003"/>
-                      </a:ext>
-                    </a:extLst>
-                  </a:gridCol>
-                </a:tblGrid>
-                <a:tr h="406400">
-                  <a:tc>
-                    <a:txBody>
-                      <a:bodyPr/>
-                      <a:lstStyle/>
-                      <a:p>
-                        <a:pPr marL="0" lvl="0" indent="0" algn="ctr" rtl="0">
-                          <a:spcBef>
-                            <a:spcPts val="0"/>
-                          </a:spcBef>
-                          <a:spcAft>
-                            <a:spcPts val="0"/>
-                          </a:spcAft>
-                          <a:buClr>
-                            <a:schemeClr val="dk1"/>
-                          </a:buClr>
-                          <a:buFont typeface="Arial"/>
-                          <a:buNone/>
-                        </a:pPr>
-                        <a:r>
-                          <a:rPr lang="en-US" sz="1900" dirty="0">
-                            <a:solidFill>
-                              <a:schemeClr val="lt1"/>
-                            </a:solidFill>
-                            <a:latin typeface="Quattrocento Sans"/>
-                            <a:ea typeface="Quattrocento Sans"/>
-                            <a:cs typeface="Quattrocento Sans"/>
-                            <a:sym typeface="Quattrocento Sans"/>
-                          </a:rPr>
-                          <a:t>Node</a:t>
-                        </a:r>
-                        <a:endParaRPr dirty="0">
-                          <a:solidFill>
-                            <a:schemeClr val="lt1"/>
-                          </a:solidFill>
-                          <a:latin typeface="Quattrocento Sans"/>
-                          <a:ea typeface="Quattrocento Sans"/>
-                          <a:cs typeface="Quattrocento Sans"/>
-                          <a:sym typeface="Quattrocento Sans"/>
-                        </a:endParaRPr>
-                      </a:p>
-                    </a:txBody>
-                    <a:tcPr marL="60950" marR="60950" marT="60950" marB="60950" anchor="ctr">
-                      <a:lnL w="9525" cap="flat" cmpd="sng">
-                        <a:solidFill>
-                          <a:schemeClr val="dk1"/>
-                        </a:solidFill>
-                        <a:prstDash val="solid"/>
-                        <a:round/>
-                        <a:headEnd type="none" w="sm" len="sm"/>
-                        <a:tailEnd type="none" w="sm" len="sm"/>
-                      </a:lnL>
-                      <a:lnR w="9525" cap="flat" cmpd="sng">
-                        <a:solidFill>
-                          <a:schemeClr val="dk1"/>
-                        </a:solidFill>
-                        <a:prstDash val="solid"/>
-                        <a:round/>
-                        <a:headEnd type="none" w="sm" len="sm"/>
-                        <a:tailEnd type="none" w="sm" len="sm"/>
-                      </a:lnR>
-                      <a:lnT w="9525" cap="flat" cmpd="sng">
-                        <a:solidFill>
-                          <a:schemeClr val="dk1"/>
-                        </a:solidFill>
-                        <a:prstDash val="solid"/>
-                        <a:round/>
-                        <a:headEnd type="none" w="sm" len="sm"/>
-                        <a:tailEnd type="none" w="sm" len="sm"/>
-                      </a:lnT>
-                      <a:lnB w="9525" cap="flat" cmpd="sng" algn="ctr">
-                        <a:solidFill>
-                          <a:schemeClr val="dk1"/>
-                        </a:solidFill>
-                        <a:prstDash val="solid"/>
-                        <a:round/>
-                        <a:headEnd type="none" w="sm" len="sm"/>
-                        <a:tailEnd type="none" w="sm" len="sm"/>
-                      </a:lnB>
-                      <a:solidFill>
-                        <a:srgbClr val="A48DD3"/>
-                      </a:solidFill>
-                    </a:tcPr>
-                  </a:tc>
-                  <a:tc>
-                    <a:txBody>
-                      <a:bodyPr/>
-                      <a:lstStyle/>
-                      <a:p>
-                        <a:pPr marL="0" marR="0" lvl="0" indent="0" algn="ctr" rtl="0">
-                          <a:spcBef>
-                            <a:spcPts val="0"/>
-                          </a:spcBef>
-                          <a:spcAft>
-                            <a:spcPts val="0"/>
-                          </a:spcAft>
-                          <a:buNone/>
-                        </a:pPr>
-                        <a:r>
-                          <a:rPr lang="en-US" sz="1900" strike="noStrike" dirty="0">
-                            <a:solidFill>
-                              <a:schemeClr val="lt1"/>
-                            </a:solidFill>
-                            <a:latin typeface="Quattrocento Sans"/>
-                            <a:ea typeface="Quattrocento Sans"/>
-                            <a:cs typeface="Quattrocento Sans"/>
-                            <a:sym typeface="Quattrocento Sans"/>
-                          </a:rPr>
-                          <a:t>SD</a:t>
-                        </a:r>
-                        <a:endParaRPr sz="1900" strike="noStrike" dirty="0">
-                          <a:solidFill>
-                            <a:schemeClr val="lt1"/>
-                          </a:solidFill>
-                          <a:latin typeface="Quattrocento Sans"/>
-                          <a:ea typeface="Quattrocento Sans"/>
-                          <a:cs typeface="Quattrocento Sans"/>
-                          <a:sym typeface="Quattrocento Sans"/>
-                        </a:endParaRPr>
-                      </a:p>
-                    </a:txBody>
-                    <a:tcPr marL="60950" marR="60950" marT="60950" marB="60950" anchor="ctr">
-                      <a:lnL w="9525" cap="flat" cmpd="sng" algn="ctr">
-                        <a:solidFill>
-                          <a:schemeClr val="dk1"/>
-                        </a:solidFill>
-                        <a:prstDash val="solid"/>
-                        <a:round/>
-                        <a:headEnd type="none" w="sm" len="sm"/>
-                        <a:tailEnd type="none" w="sm" len="sm"/>
-                      </a:lnL>
-                      <a:lnR w="9525" cap="flat" cmpd="sng">
-                        <a:solidFill>
-                          <a:schemeClr val="dk1"/>
-                        </a:solidFill>
-                        <a:prstDash val="solid"/>
-                        <a:round/>
-                        <a:headEnd type="none" w="sm" len="sm"/>
-                        <a:tailEnd type="none" w="sm" len="sm"/>
-                      </a:lnR>
-                      <a:lnT w="9525" cap="flat" cmpd="sng">
-                        <a:solidFill>
-                          <a:schemeClr val="dk1"/>
-                        </a:solidFill>
-                        <a:prstDash val="solid"/>
-                        <a:round/>
-                        <a:headEnd type="none" w="sm" len="sm"/>
-                        <a:tailEnd type="none" w="sm" len="sm"/>
-                      </a:lnT>
-                      <a:lnB w="9525" cap="flat" cmpd="sng" algn="ctr">
-                        <a:solidFill>
-                          <a:schemeClr val="dk1"/>
-                        </a:solidFill>
-                        <a:prstDash val="solid"/>
-                        <a:round/>
-                        <a:headEnd type="none" w="sm" len="sm"/>
-                        <a:tailEnd type="none" w="sm" len="sm"/>
-                      </a:lnB>
-                      <a:solidFill>
-                        <a:srgbClr val="A48DD3"/>
-                      </a:solidFill>
-                    </a:tcPr>
-                  </a:tc>
-                  <a:tc>
-                    <a:txBody>
-                      <a:bodyPr/>
-                      <a:lstStyle/>
-                      <a:p>
-                        <a:pPr marL="0" marR="0" lvl="0" indent="0" algn="ctr" rtl="0">
-                          <a:spcBef>
-                            <a:spcPts val="0"/>
-                          </a:spcBef>
-                          <a:spcAft>
-                            <a:spcPts val="0"/>
-                          </a:spcAft>
-                          <a:buNone/>
-                        </a:pPr>
-                        <a:r>
-                          <a:rPr lang="en-US" sz="1900" strike="noStrike" dirty="0">
-                            <a:solidFill>
-                              <a:schemeClr val="lt1"/>
-                            </a:solidFill>
-                            <a:latin typeface="Quattrocento Sans"/>
-                            <a:ea typeface="Quattrocento Sans"/>
-                            <a:cs typeface="Quattrocento Sans"/>
-                            <a:sym typeface="Quattrocento Sans"/>
-                          </a:rPr>
-                          <a:t>PN</a:t>
-                        </a:r>
-                        <a:endParaRPr sz="1900" strike="noStrike" dirty="0">
-                          <a:solidFill>
-                            <a:schemeClr val="lt1"/>
-                          </a:solidFill>
-                          <a:latin typeface="Quattrocento Sans"/>
-                          <a:ea typeface="Quattrocento Sans"/>
-                          <a:cs typeface="Quattrocento Sans"/>
-                          <a:sym typeface="Quattrocento Sans"/>
-                        </a:endParaRPr>
-                      </a:p>
-                    </a:txBody>
-                    <a:tcPr marL="60950" marR="60950" marT="60950" marB="60950" anchor="ctr">
-                      <a:lnL w="9525" cap="flat" cmpd="sng">
-                        <a:solidFill>
-                          <a:schemeClr val="dk1"/>
-                        </a:solidFill>
-                        <a:prstDash val="solid"/>
-                        <a:round/>
-                        <a:headEnd type="none" w="sm" len="sm"/>
-                        <a:tailEnd type="none" w="sm" len="sm"/>
-                      </a:lnL>
-                      <a:lnR w="9525" cap="flat" cmpd="sng">
-                        <a:solidFill>
-                          <a:schemeClr val="dk1"/>
-                        </a:solidFill>
-                        <a:prstDash val="solid"/>
-                        <a:round/>
-                        <a:headEnd type="none" w="sm" len="sm"/>
-                        <a:tailEnd type="none" w="sm" len="sm"/>
-                      </a:lnR>
-                      <a:lnT w="9525" cap="flat" cmpd="sng">
-                        <a:solidFill>
-                          <a:schemeClr val="dk1"/>
-                        </a:solidFill>
-                        <a:prstDash val="solid"/>
-                        <a:round/>
-                        <a:headEnd type="none" w="sm" len="sm"/>
-                        <a:tailEnd type="none" w="sm" len="sm"/>
-                      </a:lnT>
-                      <a:lnB w="9525" cap="flat" cmpd="sng" algn="ctr">
-                        <a:solidFill>
-                          <a:schemeClr val="dk1"/>
-                        </a:solidFill>
-                        <a:prstDash val="solid"/>
-                        <a:round/>
-                        <a:headEnd type="none" w="sm" len="sm"/>
-                        <a:tailEnd type="none" w="sm" len="sm"/>
-                      </a:lnB>
-                      <a:solidFill>
-                        <a:srgbClr val="A48DD3"/>
-                      </a:solidFill>
-                    </a:tcPr>
-                  </a:tc>
-                  <a:extLst>
-                    <a:ext uri="{0D108BD9-81ED-4DB2-BD59-A6C34878D82A}">
-                      <a16:rowId xmlns:a16="http://schemas.microsoft.com/office/drawing/2014/main" val="10000"/>
-                    </a:ext>
-                  </a:extLst>
-                </a:tr>
-                <a:tr h="365750">
-                  <a:tc>
-                    <a:txBody>
-                      <a:bodyPr/>
-                      <a:lstStyle/>
-                      <a:p>
-                        <a:pPr algn="ctr"/>
-                        <a:r>
-                          <a:rPr lang="en-US" altLang="zh-CN" sz="1600" dirty="0">
-                            <a:solidFill>
-                              <a:schemeClr val="tx1"/>
-                            </a:solidFill>
-                            <a:latin typeface="Quattrocento Sans" panose="020B0502050000020003" pitchFamily="34" charset="0"/>
-                          </a:rPr>
-                          <a:t>A</a:t>
-                        </a:r>
-                        <a:endParaRPr lang="en-SE" sz="1600" dirty="0">
-                          <a:solidFill>
-                            <a:schemeClr val="tx1"/>
-                          </a:solidFill>
-                          <a:latin typeface="Quattrocento Sans" panose="020B0502050000020003" pitchFamily="34" charset="0"/>
-                        </a:endParaRPr>
-                      </a:p>
-                    </a:txBody>
-                    <a:tcPr>
-                      <a:lnL w="9525" cap="flat" cmpd="sng">
-                        <a:solidFill>
-                          <a:schemeClr val="dk1"/>
-                        </a:solidFill>
-                        <a:prstDash val="solid"/>
-                        <a:round/>
-                        <a:headEnd type="none" w="sm" len="sm"/>
-                        <a:tailEnd type="none" w="sm" len="sm"/>
-                      </a:lnL>
-                      <a:lnR w="9525" cap="flat" cmpd="sng" algn="ctr">
-                        <a:solidFill>
-                          <a:schemeClr val="dk1"/>
-                        </a:solidFill>
-                        <a:prstDash val="solid"/>
-                        <a:round/>
-                        <a:headEnd type="none" w="sm" len="sm"/>
-                        <a:tailEnd type="none" w="sm" len="sm"/>
-                      </a:lnR>
-                      <a:lnT w="9525" cap="flat" cmpd="sng">
-                        <a:solidFill>
-                          <a:schemeClr val="dk1"/>
-                        </a:solidFill>
-                        <a:prstDash val="solid"/>
-                        <a:round/>
-                        <a:headEnd type="none" w="sm" len="sm"/>
-                        <a:tailEnd type="none" w="sm" len="sm"/>
-                      </a:lnT>
-                      <a:lnB w="9525" cap="flat" cmpd="sng">
-                        <a:solidFill>
-                          <a:schemeClr val="dk1"/>
-                        </a:solidFill>
-                        <a:prstDash val="solid"/>
-                        <a:round/>
-                        <a:headEnd type="none" w="sm" len="sm"/>
-                        <a:tailEnd type="none" w="sm" len="sm"/>
-                      </a:lnB>
-                      <a:solidFill>
-                        <a:schemeClr val="lt1"/>
-                      </a:solidFill>
-                    </a:tcPr>
-                  </a:tc>
-                  <a:tc>
-                    <a:txBody>
-                      <a:bodyPr/>
-                      <a:lstStyle/>
-                      <a:p>
-                        <a:pPr algn="ctr"/>
-                        <a:r>
-                          <a:rPr lang="en-US" sz="1600" dirty="0">
-                            <a:solidFill>
-                              <a:schemeClr val="tx1"/>
-                            </a:solidFill>
-                            <a:latin typeface="Quattrocento Sans" panose="020B0502050000020003" pitchFamily="34" charset="0"/>
-                          </a:rPr>
-                          <a:t>0</a:t>
-                        </a:r>
-                        <a:endParaRPr lang="en-SE" sz="1600" dirty="0">
-                          <a:solidFill>
-                            <a:schemeClr val="tx1"/>
-                          </a:solidFill>
-                          <a:latin typeface="Quattrocento Sans" panose="020B0502050000020003" pitchFamily="34" charset="0"/>
-                        </a:endParaRPr>
-                      </a:p>
-                    </a:txBody>
-                    <a:tcPr>
-                      <a:lnL w="9525" cap="flat" cmpd="sng" algn="ctr">
-                        <a:solidFill>
-                          <a:schemeClr val="dk1"/>
-                        </a:solidFill>
-                        <a:prstDash val="solid"/>
-                        <a:round/>
-                        <a:headEnd type="none" w="sm" len="sm"/>
-                        <a:tailEnd type="none" w="sm" len="sm"/>
-                      </a:lnL>
-                      <a:lnR w="9525" cap="flat" cmpd="sng">
-                        <a:solidFill>
-                          <a:schemeClr val="dk1"/>
-                        </a:solidFill>
-                        <a:prstDash val="solid"/>
-                        <a:round/>
-                        <a:headEnd type="none" w="sm" len="sm"/>
-                        <a:tailEnd type="none" w="sm" len="sm"/>
-                      </a:lnR>
-                      <a:lnT w="9525" cap="flat" cmpd="sng" algn="ctr">
-                        <a:solidFill>
-                          <a:schemeClr val="dk1"/>
-                        </a:solidFill>
-                        <a:prstDash val="solid"/>
-                        <a:round/>
-                        <a:headEnd type="none" w="sm" len="sm"/>
-                        <a:tailEnd type="none" w="sm" len="sm"/>
-                      </a:lnT>
-                      <a:lnB w="9525" cap="flat" cmpd="sng" algn="ctr">
-                        <a:solidFill>
-                          <a:schemeClr val="dk1"/>
-                        </a:solidFill>
-                        <a:prstDash val="solid"/>
-                        <a:round/>
-                        <a:headEnd type="none" w="sm" len="sm"/>
-                        <a:tailEnd type="none" w="sm" len="sm"/>
-                      </a:lnB>
-                      <a:solidFill>
-                        <a:schemeClr val="lt1"/>
-                      </a:solidFill>
-                    </a:tcPr>
-                  </a:tc>
-                  <a:tc>
-                    <a:txBody>
-                      <a:bodyPr/>
-                      <a:lstStyle/>
-                      <a:p>
-                        <a:pPr algn="ctr"/>
-                        <a:r>
-                          <a:rPr lang="en-GB" sz="1600" dirty="0">
-                            <a:solidFill>
-                              <a:schemeClr val="tx1"/>
-                            </a:solidFill>
-                            <a:latin typeface="Quattrocento Sans" panose="020B0502050000020003" pitchFamily="34" charset="0"/>
-                          </a:rPr>
-                          <a:t>/</a:t>
-                        </a:r>
-                        <a:endParaRPr lang="en-SE" sz="1600" dirty="0">
-                          <a:solidFill>
-                            <a:schemeClr val="tx1"/>
-                          </a:solidFill>
-                          <a:latin typeface="Quattrocento Sans" panose="020B0502050000020003" pitchFamily="34" charset="0"/>
-                        </a:endParaRPr>
-                      </a:p>
-                    </a:txBody>
-                    <a:tcPr>
-                      <a:lnL w="9525" cap="flat" cmpd="sng">
-                        <a:solidFill>
-                          <a:schemeClr val="dk1"/>
-                        </a:solidFill>
-                        <a:prstDash val="solid"/>
-                        <a:round/>
-                        <a:headEnd type="none" w="sm" len="sm"/>
-                        <a:tailEnd type="none" w="sm" len="sm"/>
-                      </a:lnL>
-                      <a:lnR w="9525" cap="flat" cmpd="sng">
-                        <a:solidFill>
-                          <a:schemeClr val="dk1"/>
-                        </a:solidFill>
-                        <a:prstDash val="solid"/>
-                        <a:round/>
-                        <a:headEnd type="none" w="sm" len="sm"/>
-                        <a:tailEnd type="none" w="sm" len="sm"/>
-                      </a:lnR>
-                      <a:lnT w="9525" cap="flat" cmpd="sng">
-                        <a:solidFill>
-                          <a:schemeClr val="dk1"/>
-                        </a:solidFill>
-                        <a:prstDash val="solid"/>
-                        <a:round/>
-                        <a:headEnd type="none" w="sm" len="sm"/>
-                        <a:tailEnd type="none" w="sm" len="sm"/>
-                      </a:lnT>
-                      <a:lnB w="9525" cap="flat" cmpd="sng">
-                        <a:solidFill>
-                          <a:schemeClr val="dk1"/>
-                        </a:solidFill>
-                        <a:prstDash val="solid"/>
-                        <a:round/>
-                        <a:headEnd type="none" w="sm" len="sm"/>
-                        <a:tailEnd type="none" w="sm" len="sm"/>
-                      </a:lnB>
-                      <a:solidFill>
-                        <a:schemeClr val="lt1"/>
-                      </a:solidFill>
-                    </a:tcPr>
-                  </a:tc>
-                  <a:extLst>
-                    <a:ext uri="{0D108BD9-81ED-4DB2-BD59-A6C34878D82A}">
-                      <a16:rowId xmlns:a16="http://schemas.microsoft.com/office/drawing/2014/main" val="10001"/>
-                    </a:ext>
-                  </a:extLst>
-                </a:tr>
-                <a:tr h="365750">
-                  <a:tc>
-                    <a:txBody>
-                      <a:bodyPr/>
-                      <a:lstStyle/>
-                      <a:p>
-                        <a:pPr algn="ctr"/>
-                        <a:r>
-                          <a:rPr lang="en-US" sz="1600" dirty="0">
-                            <a:solidFill>
-                              <a:schemeClr val="tx1"/>
-                            </a:solidFill>
-                            <a:latin typeface="Quattrocento Sans" panose="020B0502050000020003" pitchFamily="34" charset="0"/>
-                          </a:rPr>
-                          <a:t>B</a:t>
-                        </a:r>
-                        <a:endParaRPr lang="en-SE" sz="1600" dirty="0">
-                          <a:solidFill>
-                            <a:schemeClr val="tx1"/>
-                          </a:solidFill>
-                          <a:latin typeface="Quattrocento Sans" panose="020B0502050000020003" pitchFamily="34" charset="0"/>
-                        </a:endParaRPr>
-                      </a:p>
-                    </a:txBody>
-                    <a:tcPr>
-                      <a:lnL w="9525" cap="flat" cmpd="sng">
-                        <a:solidFill>
-                          <a:schemeClr val="dk1"/>
-                        </a:solidFill>
-                        <a:prstDash val="solid"/>
-                        <a:round/>
-                        <a:headEnd type="none" w="sm" len="sm"/>
-                        <a:tailEnd type="none" w="sm" len="sm"/>
-                      </a:lnL>
-                      <a:lnR w="9525" cap="flat" cmpd="sng" algn="ctr">
-                        <a:solidFill>
-                          <a:schemeClr val="dk1"/>
-                        </a:solidFill>
-                        <a:prstDash val="solid"/>
-                        <a:round/>
-                        <a:headEnd type="none" w="sm" len="sm"/>
-                        <a:tailEnd type="none" w="sm" len="sm"/>
-                      </a:lnR>
-                      <a:lnT w="9525" cap="flat" cmpd="sng">
-                        <a:solidFill>
-                          <a:schemeClr val="dk1"/>
-                        </a:solidFill>
-                        <a:prstDash val="solid"/>
-                        <a:round/>
-                        <a:headEnd type="none" w="sm" len="sm"/>
-                        <a:tailEnd type="none" w="sm" len="sm"/>
-                      </a:lnT>
-                      <a:lnB w="9525" cap="flat" cmpd="sng">
-                        <a:solidFill>
-                          <a:schemeClr val="dk1"/>
-                        </a:solidFill>
-                        <a:prstDash val="solid"/>
-                        <a:round/>
-                        <a:headEnd type="none" w="sm" len="sm"/>
-                        <a:tailEnd type="none" w="sm" len="sm"/>
-                      </a:lnB>
-                      <a:solidFill>
-                        <a:schemeClr val="lt1"/>
-                      </a:solidFill>
-                    </a:tcPr>
-                  </a:tc>
-                  <a:tc>
-                    <a:txBody>
-                      <a:bodyPr/>
-                      <a:lstStyle/>
-                      <a:p>
-                        <a:pPr algn="ctr"/>
-                        <a:endParaRPr lang="en-SE" sz="1600" dirty="0">
-                          <a:solidFill>
-                            <a:schemeClr val="tx1"/>
-                          </a:solidFill>
-                          <a:latin typeface="Quattrocento Sans" panose="020B0502050000020003" pitchFamily="34" charset="0"/>
-                        </a:endParaRPr>
-                      </a:p>
-                    </a:txBody>
-                    <a:tcPr>
-                      <a:lnL w="9525" cap="flat" cmpd="sng" algn="ctr">
-                        <a:solidFill>
-                          <a:schemeClr val="dk1"/>
-                        </a:solidFill>
-                        <a:prstDash val="solid"/>
-                        <a:round/>
-                        <a:headEnd type="none" w="sm" len="sm"/>
-                        <a:tailEnd type="none" w="sm" len="sm"/>
-                      </a:lnL>
-                      <a:lnR w="9525" cap="flat" cmpd="sng">
-                        <a:solidFill>
-                          <a:schemeClr val="dk1"/>
-                        </a:solidFill>
-                        <a:prstDash val="solid"/>
-                        <a:round/>
-                        <a:headEnd type="none" w="sm" len="sm"/>
-                        <a:tailEnd type="none" w="sm" len="sm"/>
-                      </a:lnR>
-                      <a:lnT w="9525" cap="flat" cmpd="sng" algn="ctr">
-                        <a:solidFill>
-                          <a:schemeClr val="dk1"/>
-                        </a:solidFill>
-                        <a:prstDash val="solid"/>
-                        <a:round/>
-                        <a:headEnd type="none" w="sm" len="sm"/>
-                        <a:tailEnd type="none" w="sm" len="sm"/>
-                      </a:lnT>
-                      <a:lnB w="9525" cap="flat" cmpd="sng" algn="ctr">
-                        <a:solidFill>
-                          <a:schemeClr val="dk1"/>
-                        </a:solidFill>
-                        <a:prstDash val="solid"/>
-                        <a:round/>
-                        <a:headEnd type="none" w="sm" len="sm"/>
-                        <a:tailEnd type="none" w="sm" len="sm"/>
-                      </a:lnB>
-                      <a:solidFill>
-                        <a:schemeClr val="lt1"/>
-                      </a:solidFill>
-                    </a:tcPr>
-                  </a:tc>
-                  <a:tc>
-                    <a:txBody>
-                      <a:bodyPr/>
-                      <a:lstStyle/>
-                      <a:p>
-                        <a:pPr algn="ctr"/>
-                        <a:endParaRPr lang="en-SE" sz="1600" dirty="0">
-                          <a:solidFill>
-                            <a:schemeClr val="tx1"/>
-                          </a:solidFill>
-                          <a:latin typeface="Quattrocento Sans" panose="020B0502050000020003" pitchFamily="34" charset="0"/>
-                        </a:endParaRPr>
-                      </a:p>
-                    </a:txBody>
-                    <a:tcPr>
-                      <a:lnL w="9525" cap="flat" cmpd="sng">
-                        <a:solidFill>
-                          <a:schemeClr val="dk1"/>
-                        </a:solidFill>
-                        <a:prstDash val="solid"/>
-                        <a:round/>
-                        <a:headEnd type="none" w="sm" len="sm"/>
-                        <a:tailEnd type="none" w="sm" len="sm"/>
-                      </a:lnL>
-                      <a:lnR w="9525" cap="flat" cmpd="sng">
-                        <a:solidFill>
-                          <a:schemeClr val="dk1"/>
-                        </a:solidFill>
-                        <a:prstDash val="solid"/>
-                        <a:round/>
-                        <a:headEnd type="none" w="sm" len="sm"/>
-                        <a:tailEnd type="none" w="sm" len="sm"/>
-                      </a:lnR>
-                      <a:lnT w="9525" cap="flat" cmpd="sng">
-                        <a:solidFill>
-                          <a:schemeClr val="dk1"/>
-                        </a:solidFill>
-                        <a:prstDash val="solid"/>
-                        <a:round/>
-                        <a:headEnd type="none" w="sm" len="sm"/>
-                        <a:tailEnd type="none" w="sm" len="sm"/>
-                      </a:lnT>
-                      <a:lnB w="9525" cap="flat" cmpd="sng">
-                        <a:solidFill>
-                          <a:schemeClr val="dk1"/>
-                        </a:solidFill>
-                        <a:prstDash val="solid"/>
-                        <a:round/>
-                        <a:headEnd type="none" w="sm" len="sm"/>
-                        <a:tailEnd type="none" w="sm" len="sm"/>
-                      </a:lnB>
-                      <a:solidFill>
-                        <a:schemeClr val="lt1"/>
-                      </a:solidFill>
-                    </a:tcPr>
-                  </a:tc>
-                  <a:extLst>
-                    <a:ext uri="{0D108BD9-81ED-4DB2-BD59-A6C34878D82A}">
-                      <a16:rowId xmlns:a16="http://schemas.microsoft.com/office/drawing/2014/main" val="10002"/>
-                    </a:ext>
-                  </a:extLst>
-                </a:tr>
-                <a:tr h="365750">
-                  <a:tc>
-                    <a:txBody>
-                      <a:bodyPr/>
-                      <a:lstStyle/>
-                      <a:p>
-                        <a:pPr algn="ctr"/>
-                        <a:r>
-                          <a:rPr lang="en-US" sz="1600" dirty="0">
-                            <a:solidFill>
-                              <a:schemeClr val="tx1"/>
-                            </a:solidFill>
-                            <a:latin typeface="Quattrocento Sans" panose="020B0502050000020003" pitchFamily="34" charset="0"/>
-                          </a:rPr>
-                          <a:t>C</a:t>
-                        </a:r>
-                        <a:endParaRPr lang="en-SE" sz="1600" dirty="0">
-                          <a:solidFill>
-                            <a:schemeClr val="tx1"/>
-                          </a:solidFill>
-                          <a:latin typeface="Quattrocento Sans" panose="020B0502050000020003" pitchFamily="34" charset="0"/>
-                        </a:endParaRPr>
-                      </a:p>
-                    </a:txBody>
-                    <a:tcPr>
-                      <a:lnL w="9525" cap="flat" cmpd="sng">
-                        <a:solidFill>
-                          <a:schemeClr val="dk1"/>
-                        </a:solidFill>
-                        <a:prstDash val="solid"/>
-                        <a:round/>
-                        <a:headEnd type="none" w="sm" len="sm"/>
-                        <a:tailEnd type="none" w="sm" len="sm"/>
-                      </a:lnL>
-                      <a:lnR w="9525" cap="flat" cmpd="sng" algn="ctr">
-                        <a:solidFill>
-                          <a:schemeClr val="dk1"/>
-                        </a:solidFill>
-                        <a:prstDash val="solid"/>
-                        <a:round/>
-                        <a:headEnd type="none" w="sm" len="sm"/>
-                        <a:tailEnd type="none" w="sm" len="sm"/>
-                      </a:lnR>
-                      <a:lnT w="9525" cap="flat" cmpd="sng">
-                        <a:solidFill>
-                          <a:schemeClr val="dk1"/>
-                        </a:solidFill>
-                        <a:prstDash val="solid"/>
-                        <a:round/>
-                        <a:headEnd type="none" w="sm" len="sm"/>
-                        <a:tailEnd type="none" w="sm" len="sm"/>
-                      </a:lnT>
-                      <a:lnB w="9525" cap="flat" cmpd="sng">
-                        <a:solidFill>
-                          <a:schemeClr val="dk1"/>
-                        </a:solidFill>
-                        <a:prstDash val="solid"/>
-                        <a:round/>
-                        <a:headEnd type="none" w="sm" len="sm"/>
-                        <a:tailEnd type="none" w="sm" len="sm"/>
-                      </a:lnB>
-                      <a:solidFill>
-                        <a:schemeClr val="lt1"/>
-                      </a:solidFill>
-                    </a:tcPr>
-                  </a:tc>
-                  <a:tc>
-                    <a:txBody>
-                      <a:bodyPr/>
-                      <a:lstStyle/>
-                      <a:p>
-                        <a:pPr algn="ctr"/>
-                        <a:endParaRPr lang="en-SE" sz="1600" dirty="0">
-                          <a:solidFill>
-                            <a:schemeClr val="tx1"/>
-                          </a:solidFill>
-                          <a:latin typeface="Quattrocento Sans" panose="020B0502050000020003" pitchFamily="34" charset="0"/>
-                        </a:endParaRPr>
-                      </a:p>
-                    </a:txBody>
-                    <a:tcPr>
-                      <a:lnL w="9525" cap="flat" cmpd="sng" algn="ctr">
-                        <a:solidFill>
-                          <a:schemeClr val="dk1"/>
-                        </a:solidFill>
-                        <a:prstDash val="solid"/>
-                        <a:round/>
-                        <a:headEnd type="none" w="sm" len="sm"/>
-                        <a:tailEnd type="none" w="sm" len="sm"/>
-                      </a:lnL>
-                      <a:lnR w="9525" cap="flat" cmpd="sng">
-                        <a:solidFill>
-                          <a:schemeClr val="dk1"/>
-                        </a:solidFill>
-                        <a:prstDash val="solid"/>
-                        <a:round/>
-                        <a:headEnd type="none" w="sm" len="sm"/>
-                        <a:tailEnd type="none" w="sm" len="sm"/>
-                      </a:lnR>
-                      <a:lnT w="9525" cap="flat" cmpd="sng" algn="ctr">
-                        <a:solidFill>
-                          <a:schemeClr val="dk1"/>
-                        </a:solidFill>
-                        <a:prstDash val="solid"/>
-                        <a:round/>
-                        <a:headEnd type="none" w="sm" len="sm"/>
-                        <a:tailEnd type="none" w="sm" len="sm"/>
-                      </a:lnT>
-                      <a:lnB w="9525" cap="flat" cmpd="sng" algn="ctr">
-                        <a:solidFill>
-                          <a:schemeClr val="dk1"/>
-                        </a:solidFill>
-                        <a:prstDash val="solid"/>
-                        <a:round/>
-                        <a:headEnd type="none" w="sm" len="sm"/>
-                        <a:tailEnd type="none" w="sm" len="sm"/>
-                      </a:lnB>
-                      <a:solidFill>
-                        <a:schemeClr val="lt1"/>
-                      </a:solidFill>
-                    </a:tcPr>
-                  </a:tc>
-                  <a:tc>
-                    <a:txBody>
-                      <a:bodyPr/>
-                      <a:lstStyle/>
-                      <a:p>
-                        <a:pPr algn="ctr"/>
-                        <a:endParaRPr lang="en-SE" sz="1600" dirty="0">
-                          <a:solidFill>
-                            <a:schemeClr val="tx1"/>
-                          </a:solidFill>
-                          <a:latin typeface="Quattrocento Sans" panose="020B0502050000020003" pitchFamily="34" charset="0"/>
-                        </a:endParaRPr>
-                      </a:p>
-                    </a:txBody>
-                    <a:tcPr>
-                      <a:lnL w="9525" cap="flat" cmpd="sng">
-                        <a:solidFill>
-                          <a:schemeClr val="dk1"/>
-                        </a:solidFill>
-                        <a:prstDash val="solid"/>
-                        <a:round/>
-                        <a:headEnd type="none" w="sm" len="sm"/>
-                        <a:tailEnd type="none" w="sm" len="sm"/>
-                      </a:lnL>
-                      <a:lnR w="9525" cap="flat" cmpd="sng">
-                        <a:solidFill>
-                          <a:schemeClr val="dk1"/>
-                        </a:solidFill>
-                        <a:prstDash val="solid"/>
-                        <a:round/>
-                        <a:headEnd type="none" w="sm" len="sm"/>
-                        <a:tailEnd type="none" w="sm" len="sm"/>
-                      </a:lnR>
-                      <a:lnT w="9525" cap="flat" cmpd="sng">
-                        <a:solidFill>
-                          <a:schemeClr val="dk1"/>
-                        </a:solidFill>
-                        <a:prstDash val="solid"/>
-                        <a:round/>
-                        <a:headEnd type="none" w="sm" len="sm"/>
-                        <a:tailEnd type="none" w="sm" len="sm"/>
-                      </a:lnT>
-                      <a:lnB w="9525" cap="flat" cmpd="sng">
-                        <a:solidFill>
-                          <a:schemeClr val="dk1"/>
-                        </a:solidFill>
-                        <a:prstDash val="solid"/>
-                        <a:round/>
-                        <a:headEnd type="none" w="sm" len="sm"/>
-                        <a:tailEnd type="none" w="sm" len="sm"/>
-                      </a:lnB>
-                      <a:solidFill>
-                        <a:schemeClr val="lt1"/>
-                      </a:solidFill>
-                    </a:tcPr>
-                  </a:tc>
-                  <a:extLst>
-                    <a:ext uri="{0D108BD9-81ED-4DB2-BD59-A6C34878D82A}">
-                      <a16:rowId xmlns:a16="http://schemas.microsoft.com/office/drawing/2014/main" val="10003"/>
-                    </a:ext>
-                  </a:extLst>
-                </a:tr>
-                <a:tr h="365750">
-                  <a:tc>
-                    <a:txBody>
-                      <a:bodyPr/>
-                      <a:lstStyle/>
-                      <a:p>
-                        <a:pPr algn="ctr"/>
-                        <a:r>
-                          <a:rPr lang="en-US" sz="1600" dirty="0">
-                            <a:solidFill>
-                              <a:schemeClr val="tx1"/>
-                            </a:solidFill>
-                            <a:latin typeface="Quattrocento Sans" panose="020B0502050000020003" pitchFamily="34" charset="0"/>
-                          </a:rPr>
-                          <a:t>D</a:t>
-                        </a:r>
-                        <a:endParaRPr lang="en-SE" sz="1600" dirty="0">
-                          <a:solidFill>
-                            <a:schemeClr val="tx1"/>
-                          </a:solidFill>
-                          <a:latin typeface="Quattrocento Sans" panose="020B0502050000020003" pitchFamily="34" charset="0"/>
-                        </a:endParaRPr>
-                      </a:p>
-                    </a:txBody>
-                    <a:tcPr>
-                      <a:lnL w="9525" cap="flat" cmpd="sng">
-                        <a:solidFill>
-                          <a:schemeClr val="dk1"/>
-                        </a:solidFill>
-                        <a:prstDash val="solid"/>
-                        <a:round/>
-                        <a:headEnd type="none" w="sm" len="sm"/>
-                        <a:tailEnd type="none" w="sm" len="sm"/>
-                      </a:lnL>
-                      <a:lnR w="9525" cap="flat" cmpd="sng" algn="ctr">
-                        <a:solidFill>
-                          <a:schemeClr val="dk1"/>
-                        </a:solidFill>
-                        <a:prstDash val="solid"/>
-                        <a:round/>
-                        <a:headEnd type="none" w="sm" len="sm"/>
-                        <a:tailEnd type="none" w="sm" len="sm"/>
-                      </a:lnR>
-                      <a:lnT w="9525" cap="flat" cmpd="sng">
-                        <a:solidFill>
-                          <a:schemeClr val="dk1"/>
-                        </a:solidFill>
-                        <a:prstDash val="solid"/>
-                        <a:round/>
-                        <a:headEnd type="none" w="sm" len="sm"/>
-                        <a:tailEnd type="none" w="sm" len="sm"/>
-                      </a:lnT>
-                      <a:lnB w="9525" cap="flat" cmpd="sng">
-                        <a:solidFill>
-                          <a:schemeClr val="dk1"/>
-                        </a:solidFill>
-                        <a:prstDash val="solid"/>
-                        <a:round/>
-                        <a:headEnd type="none" w="sm" len="sm"/>
-                        <a:tailEnd type="none" w="sm" len="sm"/>
-                      </a:lnB>
-                      <a:solidFill>
-                        <a:schemeClr val="lt1"/>
-                      </a:solidFill>
-                    </a:tcPr>
-                  </a:tc>
-                  <a:tc>
-                    <a:txBody>
-                      <a:bodyPr/>
-                      <a:lstStyle/>
-                      <a:p>
-                        <a:pPr algn="ctr"/>
-                        <a:endParaRPr lang="en-SE" sz="1600" dirty="0">
-                          <a:solidFill>
-                            <a:schemeClr val="tx1"/>
-                          </a:solidFill>
-                          <a:latin typeface="Quattrocento Sans" panose="020B0502050000020003" pitchFamily="34" charset="0"/>
-                        </a:endParaRPr>
-                      </a:p>
-                    </a:txBody>
-                    <a:tcPr>
-                      <a:lnL w="9525" cap="flat" cmpd="sng" algn="ctr">
-                        <a:solidFill>
-                          <a:schemeClr val="dk1"/>
-                        </a:solidFill>
-                        <a:prstDash val="solid"/>
-                        <a:round/>
-                        <a:headEnd type="none" w="sm" len="sm"/>
-                        <a:tailEnd type="none" w="sm" len="sm"/>
-                      </a:lnL>
-                      <a:lnR w="9525" cap="flat" cmpd="sng">
-                        <a:solidFill>
-                          <a:schemeClr val="dk1"/>
-                        </a:solidFill>
-                        <a:prstDash val="solid"/>
-                        <a:round/>
-                        <a:headEnd type="none" w="sm" len="sm"/>
-                        <a:tailEnd type="none" w="sm" len="sm"/>
-                      </a:lnR>
-                      <a:lnT w="9525" cap="flat" cmpd="sng" algn="ctr">
-                        <a:solidFill>
-                          <a:schemeClr val="dk1"/>
-                        </a:solidFill>
-                        <a:prstDash val="solid"/>
-                        <a:round/>
-                        <a:headEnd type="none" w="sm" len="sm"/>
-                        <a:tailEnd type="none" w="sm" len="sm"/>
-                      </a:lnT>
-                      <a:lnB w="9525" cap="flat" cmpd="sng" algn="ctr">
-                        <a:solidFill>
-                          <a:schemeClr val="dk1"/>
-                        </a:solidFill>
-                        <a:prstDash val="solid"/>
-                        <a:round/>
-                        <a:headEnd type="none" w="sm" len="sm"/>
-                        <a:tailEnd type="none" w="sm" len="sm"/>
-                      </a:lnB>
-                      <a:solidFill>
-                        <a:schemeClr val="lt1"/>
-                      </a:solidFill>
-                    </a:tcPr>
-                  </a:tc>
-                  <a:tc>
-                    <a:txBody>
-                      <a:bodyPr/>
-                      <a:lstStyle/>
-                      <a:p>
-                        <a:pPr algn="ctr"/>
-                        <a:endParaRPr lang="en-SE" sz="1600" dirty="0">
-                          <a:solidFill>
-                            <a:schemeClr val="tx1"/>
-                          </a:solidFill>
-                          <a:latin typeface="Quattrocento Sans" panose="020B0502050000020003" pitchFamily="34" charset="0"/>
-                        </a:endParaRPr>
-                      </a:p>
-                    </a:txBody>
-                    <a:tcPr>
-                      <a:lnL w="9525" cap="flat" cmpd="sng">
-                        <a:solidFill>
-                          <a:schemeClr val="dk1"/>
-                        </a:solidFill>
-                        <a:prstDash val="solid"/>
-                        <a:round/>
-                        <a:headEnd type="none" w="sm" len="sm"/>
-                        <a:tailEnd type="none" w="sm" len="sm"/>
-                      </a:lnL>
-                      <a:lnR w="9525" cap="flat" cmpd="sng">
-                        <a:solidFill>
-                          <a:schemeClr val="dk1"/>
-                        </a:solidFill>
-                        <a:prstDash val="solid"/>
-                        <a:round/>
-                        <a:headEnd type="none" w="sm" len="sm"/>
-                        <a:tailEnd type="none" w="sm" len="sm"/>
-                      </a:lnR>
-                      <a:lnT w="9525" cap="flat" cmpd="sng">
-                        <a:solidFill>
-                          <a:schemeClr val="dk1"/>
-                        </a:solidFill>
-                        <a:prstDash val="solid"/>
-                        <a:round/>
-                        <a:headEnd type="none" w="sm" len="sm"/>
-                        <a:tailEnd type="none" w="sm" len="sm"/>
-                      </a:lnT>
-                      <a:lnB w="9525" cap="flat" cmpd="sng">
-                        <a:solidFill>
-                          <a:schemeClr val="dk1"/>
-                        </a:solidFill>
-                        <a:prstDash val="solid"/>
-                        <a:round/>
-                        <a:headEnd type="none" w="sm" len="sm"/>
-                        <a:tailEnd type="none" w="sm" len="sm"/>
-                      </a:lnB>
-                      <a:solidFill>
-                        <a:schemeClr val="lt1"/>
-                      </a:solidFill>
-                    </a:tcPr>
-                  </a:tc>
-                  <a:extLst>
-                    <a:ext uri="{0D108BD9-81ED-4DB2-BD59-A6C34878D82A}">
-                      <a16:rowId xmlns:a16="http://schemas.microsoft.com/office/drawing/2014/main" val="10004"/>
-                    </a:ext>
-                  </a:extLst>
-                </a:tr>
-                <a:tr h="365750">
-                  <a:tc>
-                    <a:txBody>
-                      <a:bodyPr/>
-                      <a:lstStyle/>
-                      <a:p>
-                        <a:pPr algn="ctr"/>
-                        <a:r>
-                          <a:rPr lang="en-US" altLang="zh-CN" sz="1600" dirty="0">
-                            <a:solidFill>
-                              <a:schemeClr val="tx1"/>
-                            </a:solidFill>
-                            <a:latin typeface="Quattrocento Sans" panose="020B0502050000020003" pitchFamily="34" charset="0"/>
-                          </a:rPr>
-                          <a:t>E</a:t>
-                        </a:r>
-                        <a:endParaRPr lang="en-SE" sz="1600" dirty="0">
-                          <a:solidFill>
-                            <a:schemeClr val="tx1"/>
-                          </a:solidFill>
-                          <a:latin typeface="Quattrocento Sans" panose="020B0502050000020003" pitchFamily="34" charset="0"/>
-                        </a:endParaRPr>
-                      </a:p>
-                    </a:txBody>
-                    <a:tcPr>
-                      <a:lnL w="9525" cap="flat" cmpd="sng">
-                        <a:solidFill>
-                          <a:schemeClr val="dk1"/>
-                        </a:solidFill>
-                        <a:prstDash val="solid"/>
-                        <a:round/>
-                        <a:headEnd type="none" w="sm" len="sm"/>
-                        <a:tailEnd type="none" w="sm" len="sm"/>
-                      </a:lnL>
-                      <a:lnR w="9525" cap="flat" cmpd="sng" algn="ctr">
-                        <a:solidFill>
-                          <a:schemeClr val="dk1"/>
-                        </a:solidFill>
-                        <a:prstDash val="solid"/>
-                        <a:round/>
-                        <a:headEnd type="none" w="sm" len="sm"/>
-                        <a:tailEnd type="none" w="sm" len="sm"/>
-                      </a:lnR>
-                      <a:lnT w="9525" cap="flat" cmpd="sng">
-                        <a:solidFill>
-                          <a:schemeClr val="dk1"/>
-                        </a:solidFill>
-                        <a:prstDash val="solid"/>
-                        <a:round/>
-                        <a:headEnd type="none" w="sm" len="sm"/>
-                        <a:tailEnd type="none" w="sm" len="sm"/>
-                      </a:lnT>
-                      <a:lnB w="9525" cap="flat" cmpd="sng">
-                        <a:solidFill>
-                          <a:schemeClr val="dk1"/>
-                        </a:solidFill>
-                        <a:prstDash val="solid"/>
-                        <a:round/>
-                        <a:headEnd type="none" w="sm" len="sm"/>
-                        <a:tailEnd type="none" w="sm" len="sm"/>
-                      </a:lnB>
-                      <a:solidFill>
-                        <a:schemeClr val="lt1"/>
-                      </a:solidFill>
-                    </a:tcPr>
-                  </a:tc>
-                  <a:tc>
-                    <a:txBody>
-                      <a:bodyPr/>
-                      <a:lstStyle/>
-                      <a:p>
-                        <a:pPr marL="0" marR="0" lvl="0" indent="0" algn="ctr" defTabSz="457200" rtl="0" eaLnBrk="1" fontAlgn="auto" latinLnBrk="0" hangingPunct="1">
-                          <a:lnSpc>
-                            <a:spcPct val="100000"/>
-                          </a:lnSpc>
-                          <a:spcBef>
-                            <a:spcPts val="0"/>
-                          </a:spcBef>
-                          <a:spcAft>
-                            <a:spcPts val="0"/>
-                          </a:spcAft>
-                          <a:buClrTx/>
-                          <a:buSzTx/>
-                          <a:buFontTx/>
-                          <a:buNone/>
-                          <a:tabLst/>
-                          <a:defRPr/>
-                        </a:pPr>
-                        <a:endParaRPr lang="en-SE" sz="1600" dirty="0">
-                          <a:solidFill>
-                            <a:schemeClr val="tx1"/>
-                          </a:solidFill>
-                          <a:latin typeface="Quattrocento Sans" panose="020B0502050000020003" pitchFamily="34" charset="0"/>
-                        </a:endParaRPr>
-                      </a:p>
-                    </a:txBody>
-                    <a:tcPr>
-                      <a:lnL w="9525" cap="flat" cmpd="sng" algn="ctr">
-                        <a:solidFill>
-                          <a:schemeClr val="dk1"/>
-                        </a:solidFill>
-                        <a:prstDash val="solid"/>
-                        <a:round/>
-                        <a:headEnd type="none" w="sm" len="sm"/>
-                        <a:tailEnd type="none" w="sm" len="sm"/>
-                      </a:lnL>
-                      <a:lnR w="9525" cap="flat" cmpd="sng">
-                        <a:solidFill>
-                          <a:schemeClr val="dk1"/>
-                        </a:solidFill>
-                        <a:prstDash val="solid"/>
-                        <a:round/>
-                        <a:headEnd type="none" w="sm" len="sm"/>
-                        <a:tailEnd type="none" w="sm" len="sm"/>
-                      </a:lnR>
-                      <a:lnT w="9525" cap="flat" cmpd="sng" algn="ctr">
-                        <a:solidFill>
-                          <a:schemeClr val="dk1"/>
-                        </a:solidFill>
-                        <a:prstDash val="solid"/>
-                        <a:round/>
-                        <a:headEnd type="none" w="sm" len="sm"/>
-                        <a:tailEnd type="none" w="sm" len="sm"/>
-                      </a:lnT>
-                      <a:lnB w="9525" cap="flat" cmpd="sng" algn="ctr">
-                        <a:solidFill>
-                          <a:schemeClr val="dk1"/>
-                        </a:solidFill>
-                        <a:prstDash val="solid"/>
-                        <a:round/>
-                        <a:headEnd type="none" w="sm" len="sm"/>
-                        <a:tailEnd type="none" w="sm" len="sm"/>
-                      </a:lnB>
-                      <a:solidFill>
-                        <a:schemeClr val="lt1"/>
-                      </a:solidFill>
-                    </a:tcPr>
-                  </a:tc>
-                  <a:tc>
-                    <a:txBody>
-                      <a:bodyPr/>
-                      <a:lstStyle/>
-                      <a:p>
-                        <a:pPr algn="ctr"/>
-                        <a:endParaRPr lang="en-SE" sz="1600" dirty="0">
-                          <a:solidFill>
-                            <a:schemeClr val="tx1"/>
-                          </a:solidFill>
-                          <a:latin typeface="Quattrocento Sans" panose="020B0502050000020003" pitchFamily="34" charset="0"/>
-                        </a:endParaRPr>
-                      </a:p>
-                    </a:txBody>
-                    <a:tcPr>
-                      <a:lnL w="9525" cap="flat" cmpd="sng">
-                        <a:solidFill>
-                          <a:schemeClr val="dk1"/>
-                        </a:solidFill>
-                        <a:prstDash val="solid"/>
-                        <a:round/>
-                        <a:headEnd type="none" w="sm" len="sm"/>
-                        <a:tailEnd type="none" w="sm" len="sm"/>
-                      </a:lnL>
-                      <a:lnR w="9525" cap="flat" cmpd="sng">
-                        <a:solidFill>
-                          <a:schemeClr val="dk1"/>
-                        </a:solidFill>
-                        <a:prstDash val="solid"/>
-                        <a:round/>
-                        <a:headEnd type="none" w="sm" len="sm"/>
-                        <a:tailEnd type="none" w="sm" len="sm"/>
-                      </a:lnR>
-                      <a:lnT w="9525" cap="flat" cmpd="sng">
-                        <a:solidFill>
-                          <a:schemeClr val="dk1"/>
-                        </a:solidFill>
-                        <a:prstDash val="solid"/>
-                        <a:round/>
-                        <a:headEnd type="none" w="sm" len="sm"/>
-                        <a:tailEnd type="none" w="sm" len="sm"/>
-                      </a:lnT>
-                      <a:lnB w="9525" cap="flat" cmpd="sng">
-                        <a:solidFill>
-                          <a:schemeClr val="dk1"/>
-                        </a:solidFill>
-                        <a:prstDash val="solid"/>
-                        <a:round/>
-                        <a:headEnd type="none" w="sm" len="sm"/>
-                        <a:tailEnd type="none" w="sm" len="sm"/>
-                      </a:lnB>
-                      <a:solidFill>
-                        <a:schemeClr val="lt1"/>
-                      </a:solidFill>
-                    </a:tcPr>
-                  </a:tc>
-                  <a:extLst>
-                    <a:ext uri="{0D108BD9-81ED-4DB2-BD59-A6C34878D82A}">
-                      <a16:rowId xmlns:a16="http://schemas.microsoft.com/office/drawing/2014/main" val="10005"/>
-                    </a:ext>
-                  </a:extLst>
-                </a:tr>
-              </a:tbl>
-            </a:graphicData>
-          </a:graphic>
-        </p:graphicFrame>
-        <p:sp>
-          <p:nvSpPr>
-            <p:cNvPr id="90" name="Google Shape;1032;p42">
-              <a:extLst>
-                <a:ext uri="{FF2B5EF4-FFF2-40B4-BE49-F238E27FC236}">
-                  <a16:creationId xmlns:a16="http://schemas.microsoft.com/office/drawing/2014/main" id="{FA7A0A39-89B5-EB0C-CCEA-58D943F1EFE5}"/>
-                </a:ext>
-              </a:extLst>
-            </p:cNvPr>
-            <p:cNvSpPr txBox="1"/>
-            <p:nvPr/>
-          </p:nvSpPr>
-          <p:spPr>
-            <a:xfrm>
-              <a:off x="8841391" y="1894638"/>
-              <a:ext cx="3070361" cy="677068"/>
-            </a:xfrm>
-            <a:prstGeom prst="rect">
-              <a:avLst/>
-            </a:prstGeom>
-            <a:solidFill>
-              <a:srgbClr val="E7F1FA"/>
-            </a:solidFill>
-            <a:ln w="19050" cap="flat" cmpd="sng">
-              <a:solidFill>
-                <a:srgbClr val="7F7F7F"/>
-              </a:solidFill>
-              <a:prstDash val="solid"/>
-              <a:round/>
-              <a:headEnd type="none" w="sm" len="sm"/>
-              <a:tailEnd type="none" w="sm" len="sm"/>
-            </a:ln>
-          </p:spPr>
-          <p:txBody>
-            <a:bodyPr spcFirstLastPara="1" wrap="square" lIns="91425" tIns="45700" rIns="91425" bIns="45700" anchor="t" anchorCtr="0">
-              <a:spAutoFit/>
-            </a:bodyPr>
-            <a:lstStyle/>
-            <a:p>
-              <a:pPr marL="0" marR="0" lvl="0" indent="0" algn="l" rtl="0">
-                <a:spcBef>
-                  <a:spcPts val="0"/>
-                </a:spcBef>
-                <a:spcAft>
-                  <a:spcPts val="0"/>
-                </a:spcAft>
-                <a:buNone/>
-              </a:pPr>
-              <a:r>
-                <a:rPr lang="en-US" sz="2400" u="sng" dirty="0">
-                  <a:solidFill>
-                    <a:schemeClr val="dk1"/>
-                  </a:solidFill>
-                  <a:latin typeface="Quattrocento Sans"/>
-                  <a:ea typeface="Quattrocento Sans"/>
-                  <a:cs typeface="Quattrocento Sans"/>
-                  <a:sym typeface="Quattrocento Sans"/>
-                </a:rPr>
-                <a:t>Visit Order</a:t>
-              </a:r>
-              <a:endParaRPr dirty="0">
-                <a:latin typeface="Quattrocento Sans"/>
-                <a:ea typeface="Quattrocento Sans"/>
-                <a:cs typeface="Quattrocento Sans"/>
-                <a:sym typeface="Quattrocento Sans"/>
-              </a:endParaRPr>
-            </a:p>
-            <a:p>
-              <a:pPr marL="0" marR="0" lvl="0" indent="0" algn="l" rtl="0">
-                <a:spcBef>
-                  <a:spcPts val="0"/>
-                </a:spcBef>
-                <a:spcAft>
-                  <a:spcPts val="0"/>
-                </a:spcAft>
-                <a:buNone/>
-              </a:pPr>
-              <a:endParaRPr dirty="0">
-                <a:latin typeface="Quattrocento Sans"/>
-                <a:ea typeface="Quattrocento Sans"/>
-                <a:cs typeface="Quattrocento Sans"/>
-                <a:sym typeface="Quattrocento Sans"/>
-              </a:endParaRPr>
-            </a:p>
-          </p:txBody>
-        </p:sp>
-      </p:grpSp>
-      <p:sp>
-        <p:nvSpPr>
-          <p:cNvPr id="17" name="Oval 5">
-            <a:extLst>
-              <a:ext uri="{FF2B5EF4-FFF2-40B4-BE49-F238E27FC236}">
-                <a16:creationId xmlns:a16="http://schemas.microsoft.com/office/drawing/2014/main" id="{80A36392-E1E7-F87C-CC88-A7BFB6336761}"/>
-              </a:ext>
-            </a:extLst>
-          </p:cNvPr>
-          <p:cNvSpPr>
-            <a:spLocks noChangeArrowheads="1"/>
-          </p:cNvSpPr>
-          <p:nvPr/>
-        </p:nvSpPr>
-        <p:spPr bwMode="auto">
-          <a:xfrm>
-            <a:off x="808516" y="4105122"/>
-            <a:ext cx="533400" cy="533400"/>
-          </a:xfrm>
-          <a:prstGeom prst="ellipse">
-            <a:avLst/>
-          </a:prstGeom>
-          <a:solidFill>
-            <a:schemeClr val="bg1"/>
-          </a:solidFill>
-          <a:ln w="9525">
-            <a:solidFill>
-              <a:schemeClr val="tx1"/>
-            </a:solidFill>
-            <a:round/>
-            <a:headEnd/>
-            <a:tailEnd/>
-          </a:ln>
-          <a:effectLst/>
-          <a:extLst>
-            <a:ext uri="{AF507438-7753-43E0-B8FC-AC1667EBCBE1}">
-              <a14:hiddenEffects xmlns:a14="http://schemas.microsoft.com/office/drawing/2010/main">
-                <a:effectLst>
-                  <a:outerShdw dist="35921" dir="2700000" algn="ctr" rotWithShape="0">
-                    <a:schemeClr val="bg2"/>
-                  </a:outerShdw>
-                </a:effectLst>
-              </a14:hiddenEffects>
-            </a:ext>
-          </a:extLst>
-        </p:spPr>
-        <p:txBody>
-          <a:bodyPr wrap="none" anchor="ctr"/>
-          <a:lstStyle/>
-          <a:p>
-            <a:pPr fontAlgn="base">
-              <a:spcBef>
-                <a:spcPct val="0"/>
-              </a:spcBef>
-              <a:spcAft>
-                <a:spcPct val="0"/>
-              </a:spcAft>
-              <a:buClrTx/>
-              <a:defRPr/>
-            </a:pPr>
-            <a:r>
-              <a:rPr lang="en-GB" sz="2400" dirty="0">
-                <a:latin typeface="Arial" panose="020B0604020202020204" pitchFamily="34" charset="0"/>
-              </a:rPr>
-              <a:t>A</a:t>
-            </a:r>
-            <a:endParaRPr lang="en-SE" sz="2400" dirty="0">
-              <a:latin typeface="Arial" panose="020B0604020202020204" pitchFamily="34" charset="0"/>
-            </a:endParaRPr>
-          </a:p>
-        </p:txBody>
-      </p:sp>
-      <p:sp>
-        <p:nvSpPr>
-          <p:cNvPr id="18" name="Oval 8">
-            <a:extLst>
-              <a:ext uri="{FF2B5EF4-FFF2-40B4-BE49-F238E27FC236}">
-                <a16:creationId xmlns:a16="http://schemas.microsoft.com/office/drawing/2014/main" id="{27A562CA-8D7E-D332-B19E-A56C3F728E0C}"/>
-              </a:ext>
-            </a:extLst>
-          </p:cNvPr>
-          <p:cNvSpPr>
-            <a:spLocks noChangeArrowheads="1"/>
-          </p:cNvSpPr>
-          <p:nvPr/>
-        </p:nvSpPr>
-        <p:spPr bwMode="auto">
-          <a:xfrm>
-            <a:off x="1951516" y="3190722"/>
-            <a:ext cx="533400" cy="533400"/>
-          </a:xfrm>
-          <a:prstGeom prst="ellipse">
-            <a:avLst/>
-          </a:prstGeom>
-          <a:solidFill>
-            <a:schemeClr val="bg1"/>
-          </a:solidFill>
-          <a:ln w="9525">
-            <a:solidFill>
-              <a:schemeClr val="tx1"/>
-            </a:solidFill>
-            <a:round/>
-            <a:headEnd/>
-            <a:tailEnd/>
-          </a:ln>
-          <a:effectLst/>
-          <a:extLst>
-            <a:ext uri="{AF507438-7753-43E0-B8FC-AC1667EBCBE1}">
-              <a14:hiddenEffects xmlns:a14="http://schemas.microsoft.com/office/drawing/2010/main">
-                <a:effectLst>
-                  <a:outerShdw dist="35921" dir="2700000" algn="ctr" rotWithShape="0">
-                    <a:schemeClr val="bg2"/>
-                  </a:outerShdw>
-                </a:effectLst>
-              </a14:hiddenEffects>
-            </a:ext>
-          </a:extLst>
-        </p:spPr>
-        <p:txBody>
-          <a:bodyPr wrap="none" anchor="ctr"/>
-          <a:lstStyle/>
-          <a:p>
-            <a:pPr fontAlgn="base">
-              <a:spcBef>
-                <a:spcPct val="0"/>
-              </a:spcBef>
-              <a:spcAft>
-                <a:spcPct val="0"/>
-              </a:spcAft>
-              <a:buClrTx/>
-              <a:defRPr/>
-            </a:pPr>
-            <a:r>
-              <a:rPr lang="en-GB" sz="2400" dirty="0">
-                <a:latin typeface="Arial" panose="020B0604020202020204" pitchFamily="34" charset="0"/>
-              </a:rPr>
-              <a:t>B</a:t>
-            </a:r>
-            <a:endParaRPr lang="en-SE" sz="2400" dirty="0">
-              <a:latin typeface="Arial" panose="020B0604020202020204" pitchFamily="34" charset="0"/>
-            </a:endParaRPr>
-          </a:p>
-        </p:txBody>
-      </p:sp>
-      <p:sp>
-        <p:nvSpPr>
-          <p:cNvPr id="19" name="Oval 11">
-            <a:extLst>
-              <a:ext uri="{FF2B5EF4-FFF2-40B4-BE49-F238E27FC236}">
-                <a16:creationId xmlns:a16="http://schemas.microsoft.com/office/drawing/2014/main" id="{CDE7974D-6805-2B21-8102-89A8507D993A}"/>
-              </a:ext>
-            </a:extLst>
-          </p:cNvPr>
-          <p:cNvSpPr>
-            <a:spLocks noChangeArrowheads="1"/>
-          </p:cNvSpPr>
-          <p:nvPr/>
-        </p:nvSpPr>
-        <p:spPr bwMode="auto">
-          <a:xfrm>
-            <a:off x="1951516" y="4867122"/>
-            <a:ext cx="533400" cy="533400"/>
-          </a:xfrm>
-          <a:prstGeom prst="ellipse">
-            <a:avLst/>
-          </a:prstGeom>
-          <a:solidFill>
-            <a:schemeClr val="bg1"/>
-          </a:solidFill>
-          <a:ln w="9525">
-            <a:solidFill>
-              <a:schemeClr val="tx1"/>
-            </a:solidFill>
-            <a:round/>
-            <a:headEnd/>
-            <a:tailEnd/>
-          </a:ln>
-          <a:effectLst/>
-          <a:extLst>
-            <a:ext uri="{AF507438-7753-43E0-B8FC-AC1667EBCBE1}">
-              <a14:hiddenEffects xmlns:a14="http://schemas.microsoft.com/office/drawing/2010/main">
-                <a:effectLst>
-                  <a:outerShdw dist="35921" dir="2700000" algn="ctr" rotWithShape="0">
-                    <a:schemeClr val="bg2"/>
-                  </a:outerShdw>
-                </a:effectLst>
-              </a14:hiddenEffects>
-            </a:ext>
-          </a:extLst>
-        </p:spPr>
-        <p:txBody>
-          <a:bodyPr wrap="none" anchor="ctr"/>
-          <a:lstStyle/>
-          <a:p>
-            <a:pPr fontAlgn="base">
-              <a:spcBef>
-                <a:spcPct val="0"/>
-              </a:spcBef>
-              <a:spcAft>
-                <a:spcPct val="0"/>
-              </a:spcAft>
-              <a:buClrTx/>
-              <a:defRPr/>
-            </a:pPr>
-            <a:r>
-              <a:rPr lang="en-GB" sz="2400" dirty="0">
-                <a:latin typeface="Arial" panose="020B0604020202020204" pitchFamily="34" charset="0"/>
-              </a:rPr>
-              <a:t>C</a:t>
-            </a:r>
-            <a:endParaRPr lang="en-SE" sz="2400" dirty="0">
-              <a:latin typeface="Arial" panose="020B0604020202020204" pitchFamily="34" charset="0"/>
-            </a:endParaRPr>
-          </a:p>
-        </p:txBody>
-      </p:sp>
-      <p:sp>
-        <p:nvSpPr>
-          <p:cNvPr id="20" name="Line 19">
-            <a:extLst>
-              <a:ext uri="{FF2B5EF4-FFF2-40B4-BE49-F238E27FC236}">
-                <a16:creationId xmlns:a16="http://schemas.microsoft.com/office/drawing/2014/main" id="{844B594C-2166-2BAB-845A-8FB9E23C58B1}"/>
-              </a:ext>
-            </a:extLst>
-          </p:cNvPr>
-          <p:cNvSpPr>
-            <a:spLocks noChangeShapeType="1"/>
-          </p:cNvSpPr>
-          <p:nvPr/>
-        </p:nvSpPr>
-        <p:spPr bwMode="auto">
-          <a:xfrm flipV="1">
-            <a:off x="1265716" y="3647922"/>
-            <a:ext cx="762000" cy="533400"/>
-          </a:xfrm>
-          <a:prstGeom prst="line">
-            <a:avLst/>
-          </a:prstGeom>
-          <a:ln w="19050" cap="flat" cmpd="sng" algn="ctr">
-            <a:solidFill>
-              <a:schemeClr val="dk1"/>
-            </a:solidFill>
-            <a:prstDash val="solid"/>
-            <a:round/>
-            <a:headEnd type="none" w="med" len="med"/>
-            <a:tailEnd type="arrow" w="med" len="med"/>
-          </a:ln>
-        </p:spPr>
-        <p:style>
-          <a:lnRef idx="0">
-            <a:scrgbClr r="0" g="0" b="0"/>
-          </a:lnRef>
-          <a:fillRef idx="0">
-            <a:scrgbClr r="0" g="0" b="0"/>
-          </a:fillRef>
-          <a:effectRef idx="0">
-            <a:scrgbClr r="0" g="0" b="0"/>
-          </a:effectRef>
-          <a:fontRef idx="minor">
-            <a:schemeClr val="tx1"/>
-          </a:fontRef>
-        </p:style>
-        <p:txBody>
-          <a:bodyPr/>
-          <a:lstStyle/>
-          <a:p>
-            <a:pPr fontAlgn="base">
-              <a:spcBef>
-                <a:spcPct val="0"/>
-              </a:spcBef>
-              <a:spcAft>
-                <a:spcPct val="0"/>
-              </a:spcAft>
-              <a:buClrTx/>
-              <a:defRPr/>
-            </a:pPr>
-            <a:endParaRPr lang="en-SE" sz="1800" dirty="0">
-              <a:solidFill>
-                <a:srgbClr val="000000"/>
-              </a:solidFill>
-              <a:latin typeface="Arial" panose="020B0604020202020204" pitchFamily="34" charset="0"/>
-            </a:endParaRPr>
-          </a:p>
-        </p:txBody>
-      </p:sp>
-      <p:sp>
-        <p:nvSpPr>
-          <p:cNvPr id="21" name="Line 20">
-            <a:extLst>
-              <a:ext uri="{FF2B5EF4-FFF2-40B4-BE49-F238E27FC236}">
-                <a16:creationId xmlns:a16="http://schemas.microsoft.com/office/drawing/2014/main" id="{3DF751E6-233B-D750-F386-830B18CF6FA5}"/>
-              </a:ext>
-            </a:extLst>
-          </p:cNvPr>
-          <p:cNvSpPr>
-            <a:spLocks noChangeShapeType="1"/>
-          </p:cNvSpPr>
-          <p:nvPr/>
-        </p:nvSpPr>
-        <p:spPr bwMode="auto">
-          <a:xfrm>
-            <a:off x="1265716" y="4562322"/>
-            <a:ext cx="723900" cy="493940"/>
-          </a:xfrm>
-          <a:prstGeom prst="line">
-            <a:avLst/>
-          </a:prstGeom>
-          <a:ln w="19050" cap="flat" cmpd="sng" algn="ctr">
-            <a:solidFill>
-              <a:schemeClr val="dk1"/>
-            </a:solidFill>
-            <a:prstDash val="solid"/>
-            <a:round/>
-            <a:headEnd type="none" w="med" len="med"/>
-            <a:tailEnd type="arrow" w="med" len="med"/>
-          </a:ln>
-        </p:spPr>
-        <p:style>
-          <a:lnRef idx="0">
-            <a:scrgbClr r="0" g="0" b="0"/>
-          </a:lnRef>
-          <a:fillRef idx="0">
-            <a:scrgbClr r="0" g="0" b="0"/>
-          </a:fillRef>
-          <a:effectRef idx="0">
-            <a:scrgbClr r="0" g="0" b="0"/>
-          </a:effectRef>
-          <a:fontRef idx="minor">
-            <a:schemeClr val="tx1"/>
-          </a:fontRef>
-        </p:style>
-        <p:txBody>
-          <a:bodyPr/>
-          <a:lstStyle/>
-          <a:p>
-            <a:pPr fontAlgn="base">
-              <a:spcBef>
-                <a:spcPct val="0"/>
-              </a:spcBef>
-              <a:spcAft>
-                <a:spcPct val="0"/>
-              </a:spcAft>
-            </a:pPr>
-            <a:endParaRPr lang="en-SE">
-              <a:solidFill>
-                <a:srgbClr val="000000"/>
-              </a:solidFill>
-              <a:latin typeface="Arial" panose="020B0604020202020204" pitchFamily="34" charset="0"/>
-            </a:endParaRPr>
-          </a:p>
-        </p:txBody>
-      </p:sp>
-      <p:sp>
-        <p:nvSpPr>
-          <p:cNvPr id="22" name="Text Box 26">
-            <a:extLst>
-              <a:ext uri="{FF2B5EF4-FFF2-40B4-BE49-F238E27FC236}">
-                <a16:creationId xmlns:a16="http://schemas.microsoft.com/office/drawing/2014/main" id="{85F05472-39F3-9F15-ED40-D6409219301F}"/>
-              </a:ext>
-            </a:extLst>
-          </p:cNvPr>
-          <p:cNvSpPr txBox="1">
-            <a:spLocks noChangeArrowheads="1"/>
-          </p:cNvSpPr>
-          <p:nvPr/>
-        </p:nvSpPr>
-        <p:spPr bwMode="auto">
-          <a:xfrm>
-            <a:off x="1409578" y="4729011"/>
-            <a:ext cx="399803" cy="369332"/>
+            <a:off x="3772350" y="2209627"/>
+            <a:ext cx="4207539" cy="2362373"/>
           </a:xfrm>
           <a:prstGeom prst="rect">
             <a:avLst/>
           </a:prstGeom>
-          <a:noFill/>
-          <a:ln>
-            <a:noFill/>
-          </a:ln>
-          <a:effectLst/>
-          <a:extLst>
-            <a:ext uri="{909E8E84-426E-40DD-AFC4-6F175D3DCCD1}">
-              <a14:hiddenFill xmlns:a14="http://schemas.microsoft.com/office/drawing/2010/main">
-                <a:solidFill>
-                  <a:schemeClr val="accent1"/>
-                </a:solidFill>
-              </a14:hiddenFill>
-            </a:ext>
-            <a:ext uri="{91240B29-F687-4F45-9708-019B960494DF}">
-              <a14:hiddenLine xmlns:a14="http://schemas.microsoft.com/office/drawing/2010/main" w="9525">
-                <a:solidFill>
-                  <a:schemeClr val="tx1"/>
-                </a:solidFill>
-                <a:miter lim="800000"/>
-                <a:headEnd/>
-                <a:tailEnd/>
-              </a14:hiddenLine>
-            </a:ext>
-            <a:ext uri="{AF507438-7753-43E0-B8FC-AC1667EBCBE1}">
-              <a14:hiddenEffects xmlns:a14="http://schemas.microsoft.com/office/drawing/2010/main">
-                <a:effectLst>
-                  <a:outerShdw dist="35921" dir="2700000" algn="ctr" rotWithShape="0">
-                    <a:schemeClr val="bg2"/>
-                  </a:outerShdw>
-                </a:effectLst>
-              </a14:hiddenEffects>
-            </a:ext>
-          </a:extLst>
         </p:spPr>
-        <p:txBody>
-          <a:bodyPr wrap="square">
-            <a:spAutoFit/>
-          </a:bodyPr>
-          <a:lstStyle/>
-          <a:p>
-            <a:pPr fontAlgn="base">
-              <a:spcBef>
-                <a:spcPct val="50000"/>
-              </a:spcBef>
-              <a:spcAft>
-                <a:spcPct val="0"/>
-              </a:spcAft>
-            </a:pPr>
-            <a:r>
-              <a:rPr lang="en-US" altLang="en-SE" sz="1800">
-                <a:latin typeface="Arial" panose="020B0604020202020204" pitchFamily="34" charset="0"/>
-              </a:rPr>
-              <a:t>1</a:t>
-            </a:r>
-          </a:p>
-        </p:txBody>
-      </p:sp>
-      <p:sp>
-        <p:nvSpPr>
-          <p:cNvPr id="23" name="Text Box 28">
+      </p:pic>
+      <p:pic>
+        <p:nvPicPr>
+          <p:cNvPr id="44" name="Picture 43">
             <a:extLst>
               <a:ext uri="{FF2B5EF4-FFF2-40B4-BE49-F238E27FC236}">
-                <a16:creationId xmlns:a16="http://schemas.microsoft.com/office/drawing/2014/main" id="{2F7FBA1A-C5E0-C848-9324-C597B5CD34B7}"/>
+                <a16:creationId xmlns:a16="http://schemas.microsoft.com/office/drawing/2014/main" id="{5B5F5F05-4A14-D8D3-DC89-06AE26FA4C9D}"/>
               </a:ext>
             </a:extLst>
           </p:cNvPr>
-          <p:cNvSpPr txBox="1">
-            <a:spLocks noChangeArrowheads="1"/>
-          </p:cNvSpPr>
+          <p:cNvPicPr>
+            <a:picLocks noChangeAspect="1"/>
+          </p:cNvPicPr>
           <p:nvPr/>
-        </p:nvSpPr>
-        <p:spPr bwMode="auto">
+        </p:nvPicPr>
+        <p:blipFill>
+          <a:blip r:embed="rId3"/>
+          <a:stretch>
+            <a:fillRect/>
+          </a:stretch>
+        </p:blipFill>
+        <p:spPr>
           <a:xfrm>
-            <a:off x="1265717" y="3569103"/>
-            <a:ext cx="514349" cy="369332"/>
+            <a:off x="2111913" y="4625429"/>
+            <a:ext cx="7770174" cy="2061269"/>
           </a:xfrm>
           <a:prstGeom prst="rect">
             <a:avLst/>
           </a:prstGeom>
-          <a:noFill/>
-          <a:ln>
-            <a:noFill/>
-          </a:ln>
-          <a:effectLst/>
-          <a:extLst>
-            <a:ext uri="{909E8E84-426E-40DD-AFC4-6F175D3DCCD1}">
-              <a14:hiddenFill xmlns:a14="http://schemas.microsoft.com/office/drawing/2010/main">
-                <a:solidFill>
-                  <a:schemeClr val="accent1"/>
-                </a:solidFill>
-              </a14:hiddenFill>
-            </a:ext>
-            <a:ext uri="{91240B29-F687-4F45-9708-019B960494DF}">
-              <a14:hiddenLine xmlns:a14="http://schemas.microsoft.com/office/drawing/2010/main" w="9525">
-                <a:solidFill>
-                  <a:schemeClr val="tx1"/>
-                </a:solidFill>
-                <a:miter lim="800000"/>
-                <a:headEnd/>
-                <a:tailEnd/>
-              </a14:hiddenLine>
-            </a:ext>
-            <a:ext uri="{AF507438-7753-43E0-B8FC-AC1667EBCBE1}">
-              <a14:hiddenEffects xmlns:a14="http://schemas.microsoft.com/office/drawing/2010/main">
-                <a:effectLst>
-                  <a:outerShdw dist="35921" dir="2700000" algn="ctr" rotWithShape="0">
-                    <a:schemeClr val="bg2"/>
-                  </a:outerShdw>
-                </a:effectLst>
-              </a14:hiddenEffects>
-            </a:ext>
-          </a:extLst>
         </p:spPr>
-        <p:txBody>
-          <a:bodyPr wrap="square">
-            <a:spAutoFit/>
-          </a:bodyPr>
-          <a:lstStyle/>
-          <a:p>
-            <a:pPr fontAlgn="base">
-              <a:spcBef>
-                <a:spcPct val="50000"/>
-              </a:spcBef>
-              <a:spcAft>
-                <a:spcPct val="0"/>
-              </a:spcAft>
-            </a:pPr>
-            <a:r>
-              <a:rPr lang="en-US" altLang="en-SE" sz="1800" dirty="0">
-                <a:latin typeface="Arial" panose="020B0604020202020204" pitchFamily="34" charset="0"/>
-              </a:rPr>
-              <a:t>10</a:t>
-            </a:r>
-          </a:p>
-        </p:txBody>
-      </p:sp>
-      <p:sp>
-        <p:nvSpPr>
-          <p:cNvPr id="24" name="Oval 8">
-            <a:extLst>
-              <a:ext uri="{FF2B5EF4-FFF2-40B4-BE49-F238E27FC236}">
-                <a16:creationId xmlns:a16="http://schemas.microsoft.com/office/drawing/2014/main" id="{205450C9-1D82-614E-10DD-45125FC767E2}"/>
-              </a:ext>
-            </a:extLst>
-          </p:cNvPr>
-          <p:cNvSpPr>
-            <a:spLocks noChangeArrowheads="1"/>
-          </p:cNvSpPr>
-          <p:nvPr/>
-        </p:nvSpPr>
-        <p:spPr bwMode="auto">
-          <a:xfrm>
-            <a:off x="3132616" y="4026168"/>
-            <a:ext cx="533400" cy="533400"/>
-          </a:xfrm>
-          <a:prstGeom prst="ellipse">
-            <a:avLst/>
-          </a:prstGeom>
-          <a:solidFill>
-            <a:schemeClr val="bg1"/>
-          </a:solidFill>
-          <a:ln w="9525">
-            <a:solidFill>
-              <a:schemeClr val="tx1"/>
-            </a:solidFill>
-            <a:round/>
-            <a:headEnd/>
-            <a:tailEnd/>
-          </a:ln>
-          <a:effectLst/>
-          <a:extLst>
-            <a:ext uri="{AF507438-7753-43E0-B8FC-AC1667EBCBE1}">
-              <a14:hiddenEffects xmlns:a14="http://schemas.microsoft.com/office/drawing/2010/main">
-                <a:effectLst>
-                  <a:outerShdw dist="35921" dir="2700000" algn="ctr" rotWithShape="0">
-                    <a:schemeClr val="bg2"/>
-                  </a:outerShdw>
-                </a:effectLst>
-              </a14:hiddenEffects>
-            </a:ext>
-          </a:extLst>
-        </p:spPr>
-        <p:txBody>
-          <a:bodyPr wrap="none" anchor="ctr"/>
-          <a:lstStyle/>
-          <a:p>
-            <a:pPr fontAlgn="base">
-              <a:spcBef>
-                <a:spcPct val="0"/>
-              </a:spcBef>
-              <a:spcAft>
-                <a:spcPct val="0"/>
-              </a:spcAft>
-              <a:buClrTx/>
-              <a:defRPr/>
-            </a:pPr>
-            <a:r>
-              <a:rPr lang="en-GB" sz="2400" dirty="0">
-                <a:latin typeface="Arial" panose="020B0604020202020204" pitchFamily="34" charset="0"/>
-              </a:rPr>
-              <a:t>D</a:t>
-            </a:r>
-            <a:endParaRPr lang="en-SE" sz="2400" dirty="0">
-              <a:latin typeface="Arial" panose="020B0604020202020204" pitchFamily="34" charset="0"/>
-            </a:endParaRPr>
-          </a:p>
-        </p:txBody>
-      </p:sp>
-      <p:sp>
-        <p:nvSpPr>
-          <p:cNvPr id="25" name="Line 19">
-            <a:extLst>
-              <a:ext uri="{FF2B5EF4-FFF2-40B4-BE49-F238E27FC236}">
-                <a16:creationId xmlns:a16="http://schemas.microsoft.com/office/drawing/2014/main" id="{42C455CA-74D0-806C-3802-1920B9F02245}"/>
-              </a:ext>
-            </a:extLst>
-          </p:cNvPr>
-          <p:cNvSpPr>
-            <a:spLocks noChangeShapeType="1"/>
-          </p:cNvSpPr>
-          <p:nvPr/>
-        </p:nvSpPr>
-        <p:spPr bwMode="auto">
-          <a:xfrm>
-            <a:off x="2446817" y="3585417"/>
-            <a:ext cx="723902" cy="572892"/>
-          </a:xfrm>
-          <a:prstGeom prst="line">
-            <a:avLst/>
-          </a:prstGeom>
-          <a:ln w="19050" cap="flat" cmpd="sng" algn="ctr">
-            <a:solidFill>
-              <a:schemeClr val="dk1"/>
-            </a:solidFill>
-            <a:prstDash val="solid"/>
-            <a:round/>
-            <a:headEnd type="none" w="med" len="med"/>
-            <a:tailEnd type="arrow" w="med" len="med"/>
-          </a:ln>
-        </p:spPr>
-        <p:style>
-          <a:lnRef idx="0">
-            <a:scrgbClr r="0" g="0" b="0"/>
-          </a:lnRef>
-          <a:fillRef idx="0">
-            <a:scrgbClr r="0" g="0" b="0"/>
-          </a:fillRef>
-          <a:effectRef idx="0">
-            <a:scrgbClr r="0" g="0" b="0"/>
-          </a:effectRef>
-          <a:fontRef idx="minor">
-            <a:schemeClr val="tx1"/>
-          </a:fontRef>
-        </p:style>
-        <p:txBody>
-          <a:bodyPr/>
-          <a:lstStyle/>
-          <a:p>
-            <a:pPr fontAlgn="base">
-              <a:spcBef>
-                <a:spcPct val="0"/>
-              </a:spcBef>
-              <a:spcAft>
-                <a:spcPct val="0"/>
-              </a:spcAft>
-              <a:buClrTx/>
-              <a:defRPr/>
-            </a:pPr>
-            <a:endParaRPr lang="en-SE" sz="1800" dirty="0">
-              <a:solidFill>
-                <a:srgbClr val="000000"/>
-              </a:solidFill>
-              <a:latin typeface="Arial" panose="020B0604020202020204" pitchFamily="34" charset="0"/>
-            </a:endParaRPr>
-          </a:p>
-        </p:txBody>
-      </p:sp>
-      <p:sp>
-        <p:nvSpPr>
-          <p:cNvPr id="26" name="Line 19">
-            <a:extLst>
-              <a:ext uri="{FF2B5EF4-FFF2-40B4-BE49-F238E27FC236}">
-                <a16:creationId xmlns:a16="http://schemas.microsoft.com/office/drawing/2014/main" id="{D74B81D0-E5D1-C515-9EFD-36386CCADE36}"/>
-              </a:ext>
-            </a:extLst>
-          </p:cNvPr>
-          <p:cNvSpPr>
-            <a:spLocks noChangeShapeType="1"/>
-          </p:cNvSpPr>
-          <p:nvPr/>
-        </p:nvSpPr>
-        <p:spPr bwMode="auto">
-          <a:xfrm flipV="1">
-            <a:off x="2497206" y="4483370"/>
-            <a:ext cx="711610" cy="572893"/>
-          </a:xfrm>
-          <a:prstGeom prst="line">
-            <a:avLst/>
-          </a:prstGeom>
-          <a:ln w="19050" cap="flat" cmpd="sng" algn="ctr">
-            <a:solidFill>
-              <a:schemeClr val="dk1"/>
-            </a:solidFill>
-            <a:prstDash val="solid"/>
-            <a:round/>
-            <a:headEnd type="none" w="med" len="med"/>
-            <a:tailEnd type="arrow" w="med" len="med"/>
-          </a:ln>
-        </p:spPr>
-        <p:style>
-          <a:lnRef idx="0">
-            <a:scrgbClr r="0" g="0" b="0"/>
-          </a:lnRef>
-          <a:fillRef idx="0">
-            <a:scrgbClr r="0" g="0" b="0"/>
-          </a:fillRef>
-          <a:effectRef idx="0">
-            <a:scrgbClr r="0" g="0" b="0"/>
-          </a:effectRef>
-          <a:fontRef idx="minor">
-            <a:schemeClr val="tx1"/>
-          </a:fontRef>
-        </p:style>
-        <p:txBody>
-          <a:bodyPr/>
-          <a:lstStyle/>
-          <a:p>
-            <a:pPr fontAlgn="base">
-              <a:spcBef>
-                <a:spcPct val="0"/>
-              </a:spcBef>
-              <a:spcAft>
-                <a:spcPct val="0"/>
-              </a:spcAft>
-              <a:buClrTx/>
-              <a:defRPr/>
-            </a:pPr>
-            <a:endParaRPr lang="en-SE" sz="1800" dirty="0">
-              <a:solidFill>
-                <a:srgbClr val="000000"/>
-              </a:solidFill>
-              <a:latin typeface="Arial" panose="020B0604020202020204" pitchFamily="34" charset="0"/>
-            </a:endParaRPr>
-          </a:p>
-        </p:txBody>
-      </p:sp>
-      <p:sp>
-        <p:nvSpPr>
-          <p:cNvPr id="27" name="Text Box 28">
-            <a:extLst>
-              <a:ext uri="{FF2B5EF4-FFF2-40B4-BE49-F238E27FC236}">
-                <a16:creationId xmlns:a16="http://schemas.microsoft.com/office/drawing/2014/main" id="{C3C8A8B3-DA80-4868-4D75-A43F18F4C4D5}"/>
-              </a:ext>
-            </a:extLst>
-          </p:cNvPr>
-          <p:cNvSpPr txBox="1">
-            <a:spLocks noChangeArrowheads="1"/>
-          </p:cNvSpPr>
-          <p:nvPr/>
-        </p:nvSpPr>
-        <p:spPr bwMode="auto">
-          <a:xfrm>
-            <a:off x="2656366" y="3569103"/>
-            <a:ext cx="533400" cy="369332"/>
-          </a:xfrm>
-          <a:prstGeom prst="rect">
-            <a:avLst/>
-          </a:prstGeom>
-          <a:noFill/>
-          <a:ln>
-            <a:noFill/>
-          </a:ln>
-          <a:effectLst/>
-          <a:extLst>
-            <a:ext uri="{909E8E84-426E-40DD-AFC4-6F175D3DCCD1}">
-              <a14:hiddenFill xmlns:a14="http://schemas.microsoft.com/office/drawing/2010/main">
-                <a:solidFill>
-                  <a:schemeClr val="accent1"/>
-                </a:solidFill>
-              </a14:hiddenFill>
-            </a:ext>
-            <a:ext uri="{91240B29-F687-4F45-9708-019B960494DF}">
-              <a14:hiddenLine xmlns:a14="http://schemas.microsoft.com/office/drawing/2010/main" w="9525">
-                <a:solidFill>
-                  <a:schemeClr val="tx1"/>
-                </a:solidFill>
-                <a:miter lim="800000"/>
-                <a:headEnd/>
-                <a:tailEnd/>
-              </a14:hiddenLine>
-            </a:ext>
-            <a:ext uri="{AF507438-7753-43E0-B8FC-AC1667EBCBE1}">
-              <a14:hiddenEffects xmlns:a14="http://schemas.microsoft.com/office/drawing/2010/main">
-                <a:effectLst>
-                  <a:outerShdw dist="35921" dir="2700000" algn="ctr" rotWithShape="0">
-                    <a:schemeClr val="bg2"/>
-                  </a:outerShdw>
-                </a:effectLst>
-              </a14:hiddenEffects>
-            </a:ext>
-          </a:extLst>
-        </p:spPr>
-        <p:txBody>
-          <a:bodyPr wrap="square">
-            <a:spAutoFit/>
-          </a:bodyPr>
-          <a:lstStyle/>
-          <a:p>
-            <a:pPr fontAlgn="base">
-              <a:spcBef>
-                <a:spcPct val="50000"/>
-              </a:spcBef>
-              <a:spcAft>
-                <a:spcPct val="0"/>
-              </a:spcAft>
-            </a:pPr>
-            <a:r>
-              <a:rPr lang="en-US" altLang="en-SE" sz="1800" dirty="0">
-                <a:latin typeface="Arial" panose="020B0604020202020204" pitchFamily="34" charset="0"/>
-              </a:rPr>
-              <a:t>-20</a:t>
-            </a:r>
-          </a:p>
-        </p:txBody>
-      </p:sp>
-      <p:sp>
-        <p:nvSpPr>
-          <p:cNvPr id="28" name="Text Box 26">
-            <a:extLst>
-              <a:ext uri="{FF2B5EF4-FFF2-40B4-BE49-F238E27FC236}">
-                <a16:creationId xmlns:a16="http://schemas.microsoft.com/office/drawing/2014/main" id="{F2617051-8F46-162E-EF53-1A6E8EE89E28}"/>
-              </a:ext>
-            </a:extLst>
-          </p:cNvPr>
-          <p:cNvSpPr txBox="1">
-            <a:spLocks noChangeArrowheads="1"/>
-          </p:cNvSpPr>
-          <p:nvPr/>
-        </p:nvSpPr>
-        <p:spPr bwMode="auto">
-          <a:xfrm>
-            <a:off x="2810363" y="4689551"/>
-            <a:ext cx="399803" cy="369332"/>
-          </a:xfrm>
-          <a:prstGeom prst="rect">
-            <a:avLst/>
-          </a:prstGeom>
-          <a:noFill/>
-          <a:ln>
-            <a:noFill/>
-          </a:ln>
-          <a:effectLst/>
-          <a:extLst>
-            <a:ext uri="{909E8E84-426E-40DD-AFC4-6F175D3DCCD1}">
-              <a14:hiddenFill xmlns:a14="http://schemas.microsoft.com/office/drawing/2010/main">
-                <a:solidFill>
-                  <a:schemeClr val="accent1"/>
-                </a:solidFill>
-              </a14:hiddenFill>
-            </a:ext>
-            <a:ext uri="{91240B29-F687-4F45-9708-019B960494DF}">
-              <a14:hiddenLine xmlns:a14="http://schemas.microsoft.com/office/drawing/2010/main" w="9525">
-                <a:solidFill>
-                  <a:schemeClr val="tx1"/>
-                </a:solidFill>
-                <a:miter lim="800000"/>
-                <a:headEnd/>
-                <a:tailEnd/>
-              </a14:hiddenLine>
-            </a:ext>
-            <a:ext uri="{AF507438-7753-43E0-B8FC-AC1667EBCBE1}">
-              <a14:hiddenEffects xmlns:a14="http://schemas.microsoft.com/office/drawing/2010/main">
-                <a:effectLst>
-                  <a:outerShdw dist="35921" dir="2700000" algn="ctr" rotWithShape="0">
-                    <a:schemeClr val="bg2"/>
-                  </a:outerShdw>
-                </a:effectLst>
-              </a14:hiddenEffects>
-            </a:ext>
-          </a:extLst>
-        </p:spPr>
-        <p:txBody>
-          <a:bodyPr wrap="square">
-            <a:spAutoFit/>
-          </a:bodyPr>
-          <a:lstStyle/>
-          <a:p>
-            <a:pPr fontAlgn="base">
-              <a:spcBef>
-                <a:spcPct val="50000"/>
-              </a:spcBef>
-              <a:spcAft>
-                <a:spcPct val="0"/>
-              </a:spcAft>
-            </a:pPr>
-            <a:r>
-              <a:rPr lang="en-US" altLang="en-SE" sz="1800" dirty="0">
-                <a:latin typeface="Arial" panose="020B0604020202020204" pitchFamily="34" charset="0"/>
-              </a:rPr>
-              <a:t>1</a:t>
-            </a:r>
-          </a:p>
-        </p:txBody>
-      </p:sp>
-      <p:sp>
-        <p:nvSpPr>
-          <p:cNvPr id="29" name="Oval 8">
-            <a:extLst>
-              <a:ext uri="{FF2B5EF4-FFF2-40B4-BE49-F238E27FC236}">
-                <a16:creationId xmlns:a16="http://schemas.microsoft.com/office/drawing/2014/main" id="{A4F01990-BB31-8ADB-4F23-1053197AB173}"/>
-              </a:ext>
-            </a:extLst>
-          </p:cNvPr>
-          <p:cNvSpPr>
-            <a:spLocks noChangeArrowheads="1"/>
-          </p:cNvSpPr>
-          <p:nvPr/>
-        </p:nvSpPr>
-        <p:spPr bwMode="auto">
-          <a:xfrm>
-            <a:off x="4364106" y="4026168"/>
-            <a:ext cx="533400" cy="533400"/>
-          </a:xfrm>
-          <a:prstGeom prst="ellipse">
-            <a:avLst/>
-          </a:prstGeom>
-          <a:solidFill>
-            <a:schemeClr val="bg1"/>
-          </a:solidFill>
-          <a:ln w="9525">
-            <a:solidFill>
-              <a:schemeClr val="tx1"/>
-            </a:solidFill>
-            <a:round/>
-            <a:headEnd/>
-            <a:tailEnd/>
-          </a:ln>
-          <a:effectLst/>
-          <a:extLst>
-            <a:ext uri="{AF507438-7753-43E0-B8FC-AC1667EBCBE1}">
-              <a14:hiddenEffects xmlns:a14="http://schemas.microsoft.com/office/drawing/2010/main">
-                <a:effectLst>
-                  <a:outerShdw dist="35921" dir="2700000" algn="ctr" rotWithShape="0">
-                    <a:schemeClr val="bg2"/>
-                  </a:outerShdw>
-                </a:effectLst>
-              </a14:hiddenEffects>
-            </a:ext>
-          </a:extLst>
-        </p:spPr>
-        <p:txBody>
-          <a:bodyPr wrap="none" anchor="ctr"/>
-          <a:lstStyle/>
-          <a:p>
-            <a:pPr fontAlgn="base">
-              <a:spcBef>
-                <a:spcPct val="0"/>
-              </a:spcBef>
-              <a:spcAft>
-                <a:spcPct val="0"/>
-              </a:spcAft>
-              <a:buClrTx/>
-              <a:defRPr/>
-            </a:pPr>
-            <a:r>
-              <a:rPr lang="en-GB" sz="2400" dirty="0">
-                <a:latin typeface="Arial" panose="020B0604020202020204" pitchFamily="34" charset="0"/>
-              </a:rPr>
-              <a:t>E</a:t>
-            </a:r>
-            <a:endParaRPr lang="en-SE" sz="2400" dirty="0">
-              <a:latin typeface="Arial" panose="020B0604020202020204" pitchFamily="34" charset="0"/>
-            </a:endParaRPr>
-          </a:p>
-        </p:txBody>
-      </p:sp>
-      <p:sp>
-        <p:nvSpPr>
-          <p:cNvPr id="30" name="Line 19">
-            <a:extLst>
-              <a:ext uri="{FF2B5EF4-FFF2-40B4-BE49-F238E27FC236}">
-                <a16:creationId xmlns:a16="http://schemas.microsoft.com/office/drawing/2014/main" id="{2CBB95F1-ADFD-A32F-17B0-BF1FC376F4A8}"/>
-              </a:ext>
-            </a:extLst>
-          </p:cNvPr>
-          <p:cNvSpPr>
-            <a:spLocks noChangeShapeType="1"/>
-          </p:cNvSpPr>
-          <p:nvPr/>
-        </p:nvSpPr>
-        <p:spPr bwMode="auto">
-          <a:xfrm>
-            <a:off x="3666016" y="4301835"/>
-            <a:ext cx="698090" cy="10391"/>
-          </a:xfrm>
-          <a:prstGeom prst="line">
-            <a:avLst/>
-          </a:prstGeom>
-          <a:ln w="19050" cap="flat" cmpd="sng" algn="ctr">
-            <a:solidFill>
-              <a:schemeClr val="dk1"/>
-            </a:solidFill>
-            <a:prstDash val="solid"/>
-            <a:round/>
-            <a:headEnd type="none" w="med" len="med"/>
-            <a:tailEnd type="arrow" w="med" len="med"/>
-          </a:ln>
-        </p:spPr>
-        <p:style>
-          <a:lnRef idx="0">
-            <a:scrgbClr r="0" g="0" b="0"/>
-          </a:lnRef>
-          <a:fillRef idx="0">
-            <a:scrgbClr r="0" g="0" b="0"/>
-          </a:fillRef>
-          <a:effectRef idx="0">
-            <a:scrgbClr r="0" g="0" b="0"/>
-          </a:effectRef>
-          <a:fontRef idx="minor">
-            <a:schemeClr val="tx1"/>
-          </a:fontRef>
-        </p:style>
-        <p:txBody>
-          <a:bodyPr/>
-          <a:lstStyle/>
-          <a:p>
-            <a:pPr fontAlgn="base">
-              <a:spcBef>
-                <a:spcPct val="0"/>
-              </a:spcBef>
-              <a:spcAft>
-                <a:spcPct val="0"/>
-              </a:spcAft>
-              <a:buClrTx/>
-              <a:defRPr/>
-            </a:pPr>
-            <a:endParaRPr lang="en-SE" sz="1800" dirty="0">
-              <a:solidFill>
-                <a:srgbClr val="000000"/>
-              </a:solidFill>
-              <a:latin typeface="Arial" panose="020B0604020202020204" pitchFamily="34" charset="0"/>
-            </a:endParaRPr>
-          </a:p>
-        </p:txBody>
-      </p:sp>
-      <p:sp>
-        <p:nvSpPr>
-          <p:cNvPr id="31" name="Text Box 26">
-            <a:extLst>
-              <a:ext uri="{FF2B5EF4-FFF2-40B4-BE49-F238E27FC236}">
-                <a16:creationId xmlns:a16="http://schemas.microsoft.com/office/drawing/2014/main" id="{795CCA6F-400B-210F-4D08-5C4E72309ECE}"/>
-              </a:ext>
-            </a:extLst>
-          </p:cNvPr>
-          <p:cNvSpPr txBox="1">
-            <a:spLocks noChangeArrowheads="1"/>
-          </p:cNvSpPr>
-          <p:nvPr/>
-        </p:nvSpPr>
-        <p:spPr bwMode="auto">
-          <a:xfrm>
-            <a:off x="3854667" y="3965670"/>
-            <a:ext cx="399803" cy="369332"/>
-          </a:xfrm>
-          <a:prstGeom prst="rect">
-            <a:avLst/>
-          </a:prstGeom>
-          <a:noFill/>
-          <a:ln>
-            <a:noFill/>
-          </a:ln>
-          <a:effectLst/>
-          <a:extLst>
-            <a:ext uri="{909E8E84-426E-40DD-AFC4-6F175D3DCCD1}">
-              <a14:hiddenFill xmlns:a14="http://schemas.microsoft.com/office/drawing/2010/main">
-                <a:solidFill>
-                  <a:schemeClr val="accent1"/>
-                </a:solidFill>
-              </a14:hiddenFill>
-            </a:ext>
-            <a:ext uri="{91240B29-F687-4F45-9708-019B960494DF}">
-              <a14:hiddenLine xmlns:a14="http://schemas.microsoft.com/office/drawing/2010/main" w="9525">
-                <a:solidFill>
-                  <a:schemeClr val="tx1"/>
-                </a:solidFill>
-                <a:miter lim="800000"/>
-                <a:headEnd/>
-                <a:tailEnd/>
-              </a14:hiddenLine>
-            </a:ext>
-            <a:ext uri="{AF507438-7753-43E0-B8FC-AC1667EBCBE1}">
-              <a14:hiddenEffects xmlns:a14="http://schemas.microsoft.com/office/drawing/2010/main">
-                <a:effectLst>
-                  <a:outerShdw dist="35921" dir="2700000" algn="ctr" rotWithShape="0">
-                    <a:schemeClr val="bg2"/>
-                  </a:outerShdw>
-                </a:effectLst>
-              </a14:hiddenEffects>
-            </a:ext>
-          </a:extLst>
-        </p:spPr>
-        <p:txBody>
-          <a:bodyPr wrap="square">
-            <a:spAutoFit/>
-          </a:bodyPr>
-          <a:lstStyle/>
-          <a:p>
-            <a:pPr fontAlgn="base">
-              <a:spcBef>
-                <a:spcPct val="50000"/>
-              </a:spcBef>
-              <a:spcAft>
-                <a:spcPct val="0"/>
-              </a:spcAft>
-            </a:pPr>
-            <a:r>
-              <a:rPr lang="en-US" altLang="en-SE" sz="1800" dirty="0">
-                <a:latin typeface="Arial" panose="020B0604020202020204" pitchFamily="34" charset="0"/>
-              </a:rPr>
-              <a:t>1</a:t>
-            </a:r>
-          </a:p>
-        </p:txBody>
-      </p:sp>
+      </p:pic>
     </p:spTree>
     <p:extLst>
       <p:ext uri="{BB962C8B-B14F-4D97-AF65-F5344CB8AC3E}">
-        <p14:creationId xmlns:p14="http://schemas.microsoft.com/office/powerpoint/2010/main" val="849030039"/>
+        <p14:creationId xmlns:p14="http://schemas.microsoft.com/office/powerpoint/2010/main" val="605038739"/>
       </p:ext>
     </p:extLst>
   </p:cSld>
@@ -38020,7 +35682,7 @@
           <p:cNvPr id="2" name="Title 1">
             <a:extLst>
               <a:ext uri="{FF2B5EF4-FFF2-40B4-BE49-F238E27FC236}">
-                <a16:creationId xmlns:a16="http://schemas.microsoft.com/office/drawing/2014/main" id="{27254DBE-A918-E21C-1C0E-4247405715D1}"/>
+                <a16:creationId xmlns:a16="http://schemas.microsoft.com/office/drawing/2014/main" id="{8D388046-0321-C196-0816-2AE53FE69E53}"/>
               </a:ext>
             </a:extLst>
           </p:cNvPr>
@@ -38037,10 +35699,9 @@
           <a:lstStyle/>
           <a:p>
             <a:r>
-              <a:rPr lang="en-GB" dirty="0"/>
-              <a:t>Q. Johnson’s algorithm</a:t>
+              <a:rPr lang="en-US" dirty="0"/>
+              <a:t>Q. Link-State Routing</a:t>
             </a:r>
-            <a:endParaRPr lang="en-SE" dirty="0"/>
           </a:p>
         </p:txBody>
       </p:sp>
@@ -38049,7 +35710,7 @@
           <p:cNvPr id="3" name="Content Placeholder 2">
             <a:extLst>
               <a:ext uri="{FF2B5EF4-FFF2-40B4-BE49-F238E27FC236}">
-                <a16:creationId xmlns:a16="http://schemas.microsoft.com/office/drawing/2014/main" id="{E2B07607-1D6E-6192-75D5-3079E0AB82DE}"/>
+                <a16:creationId xmlns:a16="http://schemas.microsoft.com/office/drawing/2014/main" id="{2BC8C81A-96B7-027C-4E6E-48DE3E1042D0}"/>
               </a:ext>
             </a:extLst>
           </p:cNvPr>
@@ -38062,2517 +35723,174 @@
         </p:nvSpPr>
         <p:spPr>
           <a:xfrm>
-            <a:off x="575240" y="1054706"/>
-            <a:ext cx="11186999" cy="2983381"/>
+            <a:off x="668758" y="1080073"/>
+            <a:ext cx="11187000" cy="603200"/>
           </a:xfrm>
         </p:spPr>
         <p:txBody>
-          <a:bodyPr>
-            <a:normAutofit fontScale="77500" lnSpcReduction="20000"/>
-          </a:bodyPr>
+          <a:bodyPr/>
           <a:lstStyle/>
           <a:p>
             <a:pPr marL="63500" indent="0">
               <a:buNone/>
             </a:pPr>
             <a:r>
-              <a:rPr lang="en-GB" sz="2400" dirty="0"/>
-              <a:t>Consider the following weighted digraph. As part of Johnson’s algorithm for All-pairs Shortest Paths, add a dummy source node d, and edges with weight 0 from d to all vertices of G. Let the modified graph be G’.  </a:t>
+              <a:rPr lang="en-US" dirty="0"/>
+              <a:t>Refer to the handout for details.</a:t>
             </a:r>
           </a:p>
+        </p:txBody>
+      </p:sp>
+      <p:pic>
+        <p:nvPicPr>
+          <p:cNvPr id="5" name="Picture 4">
+            <a:extLst>
+              <a:ext uri="{FF2B5EF4-FFF2-40B4-BE49-F238E27FC236}">
+                <a16:creationId xmlns:a16="http://schemas.microsoft.com/office/drawing/2014/main" id="{3DEF34D5-E3F6-515C-F3F8-FAC7AB1D5057}"/>
+              </a:ext>
+            </a:extLst>
+          </p:cNvPr>
+          <p:cNvPicPr>
+            <a:picLocks noChangeAspect="1"/>
+          </p:cNvPicPr>
+          <p:nvPr/>
+        </p:nvPicPr>
+        <p:blipFill>
+          <a:blip r:embed="rId2"/>
+          <a:stretch>
+            <a:fillRect/>
+          </a:stretch>
+        </p:blipFill>
+        <p:spPr>
+          <a:xfrm>
+            <a:off x="2886803" y="1797096"/>
+            <a:ext cx="6418393" cy="4911928"/>
+          </a:xfrm>
+          <a:prstGeom prst="rect">
+            <a:avLst/>
+          </a:prstGeom>
+        </p:spPr>
+      </p:pic>
+    </p:spTree>
+    <p:extLst>
+      <p:ext uri="{BB962C8B-B14F-4D97-AF65-F5344CB8AC3E}">
+        <p14:creationId xmlns:p14="http://schemas.microsoft.com/office/powerpoint/2010/main" val="440691786"/>
+      </p:ext>
+    </p:extLst>
+  </p:cSld>
+  <p:clrMapOvr>
+    <a:masterClrMapping/>
+  </p:clrMapOvr>
+</p:sld>
+</file>
+
+<file path=ppt/slides/slide8.xml><?xml version="1.0" encoding="utf-8"?>
+<p:sld xmlns:a="http://schemas.openxmlformats.org/drawingml/2006/main" xmlns:r="http://schemas.openxmlformats.org/officeDocument/2006/relationships" xmlns:p="http://schemas.openxmlformats.org/presentationml/2006/main">
+  <p:cSld>
+    <p:spTree>
+      <p:nvGrpSpPr>
+        <p:cNvPr id="1" name=""/>
+        <p:cNvGrpSpPr/>
+        <p:nvPr/>
+      </p:nvGrpSpPr>
+      <p:grpSpPr>
+        <a:xfrm>
+          <a:off x="0" y="0"/>
+          <a:ext cx="0" cy="0"/>
+          <a:chOff x="0" y="0"/>
+          <a:chExt cx="0" cy="0"/>
+        </a:xfrm>
+      </p:grpSpPr>
+      <p:sp>
+        <p:nvSpPr>
+          <p:cNvPr id="2" name="Title 1">
+            <a:extLst>
+              <a:ext uri="{FF2B5EF4-FFF2-40B4-BE49-F238E27FC236}">
+                <a16:creationId xmlns:a16="http://schemas.microsoft.com/office/drawing/2014/main" id="{CB838235-6715-0DD1-C6BA-0CF3305B374B}"/>
+              </a:ext>
+            </a:extLst>
+          </p:cNvPr>
+          <p:cNvSpPr>
+            <a:spLocks noGrp="1"/>
+          </p:cNvSpPr>
+          <p:nvPr>
+            <p:ph type="title"/>
+          </p:nvPr>
+        </p:nvSpPr>
+        <p:spPr/>
+        <p:txBody>
+          <a:bodyPr/>
+          <a:lstStyle/>
           <a:p>
-            <a:pPr marL="63500" indent="0" algn="just">
-              <a:buNone/>
-            </a:pPr>
             <a:r>
-              <a:rPr lang="en-GB" sz="2400" dirty="0"/>
-              <a:t>a) Compute the shortest distances from dummy source node d to each node in G’ by hand: h[0], h[1], .. h[V-1], then reweight the edges of the original graph to make the edge weights greater than or equal to 0. Draw the reweighted graph G’ (without the dummy node d).</a:t>
+              <a:rPr lang="en-US" dirty="0"/>
+              <a:t>Q. More L3 Link State</a:t>
             </a:r>
           </a:p>
+        </p:txBody>
+      </p:sp>
+      <p:pic>
+        <p:nvPicPr>
+          <p:cNvPr id="5" name="Picture 4">
+            <a:extLst>
+              <a:ext uri="{FF2B5EF4-FFF2-40B4-BE49-F238E27FC236}">
+                <a16:creationId xmlns:a16="http://schemas.microsoft.com/office/drawing/2014/main" id="{F63452E6-D673-5F27-D87F-132EF3EE7C06}"/>
+              </a:ext>
+            </a:extLst>
+          </p:cNvPr>
+          <p:cNvPicPr>
+            <a:picLocks noChangeAspect="1"/>
+          </p:cNvPicPr>
+          <p:nvPr/>
+        </p:nvPicPr>
+        <p:blipFill>
+          <a:blip r:embed="rId2"/>
+          <a:stretch>
+            <a:fillRect/>
+          </a:stretch>
+        </p:blipFill>
+        <p:spPr>
+          <a:xfrm>
+            <a:off x="575239" y="1954148"/>
+            <a:ext cx="10813305" cy="4342743"/>
+          </a:xfrm>
+          <a:prstGeom prst="rect">
+            <a:avLst/>
+          </a:prstGeom>
+        </p:spPr>
+      </p:pic>
+      <p:sp>
+        <p:nvSpPr>
+          <p:cNvPr id="6" name="Content Placeholder 2">
+            <a:extLst>
+              <a:ext uri="{FF2B5EF4-FFF2-40B4-BE49-F238E27FC236}">
+                <a16:creationId xmlns:a16="http://schemas.microsoft.com/office/drawing/2014/main" id="{21D0BAF4-E08C-F3A2-7BD1-2E823A751FCF}"/>
+              </a:ext>
+            </a:extLst>
+          </p:cNvPr>
+          <p:cNvSpPr>
+            <a:spLocks noGrp="1"/>
+          </p:cNvSpPr>
+          <p:nvPr>
+            <p:ph idx="1"/>
+          </p:nvPr>
+        </p:nvSpPr>
+        <p:spPr>
+          <a:xfrm>
+            <a:off x="668758" y="1080073"/>
+            <a:ext cx="11187000" cy="603200"/>
+          </a:xfrm>
+        </p:spPr>
+        <p:txBody>
+          <a:bodyPr/>
+          <a:lstStyle/>
           <a:p>
             <a:pPr marL="63500" indent="0">
               <a:buNone/>
             </a:pPr>
             <a:r>
-              <a:rPr lang="en-GB" sz="2400" dirty="0"/>
-              <a:t>b) For the reweighted graph G’: r</a:t>
-            </a:r>
-            <a:r>
-              <a:rPr lang="en-GB" sz="2400" dirty="0">
-                <a:latin typeface="Quattrocento Sans" panose="020B0502050000020003" pitchFamily="34" charset="0"/>
-              </a:rPr>
-              <a:t>un Dijkstra’s Algo to find shortest paths starting from </a:t>
-            </a:r>
-            <a:r>
-              <a:rPr lang="en-GB" sz="2400" dirty="0">
-                <a:solidFill>
-                  <a:srgbClr val="FF0000"/>
-                </a:solidFill>
-                <a:latin typeface="Quattrocento Sans" panose="020B0502050000020003" pitchFamily="34" charset="0"/>
-              </a:rPr>
-              <a:t>source node 1</a:t>
-            </a:r>
-            <a:r>
-              <a:rPr lang="en-GB" sz="2400" dirty="0"/>
-              <a:t>, and compute the shortest paths for the graph with updated positive or zero weights. (Do not show the intermediate steps.)</a:t>
-            </a:r>
-          </a:p>
-          <a:p>
-            <a:pPr marL="63500" indent="0">
-              <a:buNone/>
-            </a:pPr>
-            <a:r>
-              <a:rPr lang="en-GB" sz="2400" dirty="0"/>
-              <a:t>c) For the original graph G: compute the shortest paths </a:t>
-            </a:r>
-            <a:r>
-              <a:rPr lang="en-GB" sz="2400" dirty="0">
-                <a:latin typeface="Quattrocento Sans" panose="020B0502050000020003" pitchFamily="34" charset="0"/>
-              </a:rPr>
-              <a:t>starting from </a:t>
-            </a:r>
-            <a:r>
-              <a:rPr lang="en-GB" sz="2400" dirty="0">
-                <a:solidFill>
-                  <a:srgbClr val="FF0000"/>
-                </a:solidFill>
-                <a:latin typeface="Quattrocento Sans" panose="020B0502050000020003" pitchFamily="34" charset="0"/>
-              </a:rPr>
-              <a:t>source node 1</a:t>
-            </a:r>
-            <a:r>
-              <a:rPr lang="en-GB" sz="2400" dirty="0"/>
-              <a:t> with negative weights.</a:t>
-            </a:r>
-            <a:endParaRPr lang="en-SE" sz="2400" dirty="0"/>
-          </a:p>
-        </p:txBody>
-      </p:sp>
-      <p:graphicFrame>
-        <p:nvGraphicFramePr>
-          <p:cNvPr id="34" name="Table 33">
-            <a:extLst>
-              <a:ext uri="{FF2B5EF4-FFF2-40B4-BE49-F238E27FC236}">
-                <a16:creationId xmlns:a16="http://schemas.microsoft.com/office/drawing/2014/main" id="{48F3F9D2-50D6-1A99-C64F-77CDD8AA05BD}"/>
-              </a:ext>
-            </a:extLst>
-          </p:cNvPr>
-          <p:cNvGraphicFramePr>
-            <a:graphicFrameLocks noGrp="1"/>
-          </p:cNvGraphicFramePr>
-          <p:nvPr/>
-        </p:nvGraphicFramePr>
-        <p:xfrm>
-          <a:off x="6241501" y="3929503"/>
-          <a:ext cx="2643909" cy="1854200"/>
-        </p:xfrm>
-        <a:graphic>
-          <a:graphicData uri="http://schemas.openxmlformats.org/drawingml/2006/table">
-            <a:tbl>
-              <a:tblPr firstRow="1" bandRow="1">
-                <a:tableStyleId>{5940675A-B579-460E-94D1-54222C63F5DA}</a:tableStyleId>
-              </a:tblPr>
-              <a:tblGrid>
-                <a:gridCol w="881303">
-                  <a:extLst>
-                    <a:ext uri="{9D8B030D-6E8A-4147-A177-3AD203B41FA5}">
-                      <a16:colId xmlns:a16="http://schemas.microsoft.com/office/drawing/2014/main" val="3113293538"/>
-                    </a:ext>
-                  </a:extLst>
-                </a:gridCol>
-                <a:gridCol w="881303">
-                  <a:extLst>
-                    <a:ext uri="{9D8B030D-6E8A-4147-A177-3AD203B41FA5}">
-                      <a16:colId xmlns:a16="http://schemas.microsoft.com/office/drawing/2014/main" val="4210074216"/>
-                    </a:ext>
-                  </a:extLst>
-                </a:gridCol>
-                <a:gridCol w="881303">
-                  <a:extLst>
-                    <a:ext uri="{9D8B030D-6E8A-4147-A177-3AD203B41FA5}">
-                      <a16:colId xmlns:a16="http://schemas.microsoft.com/office/drawing/2014/main" val="3424504882"/>
-                    </a:ext>
-                  </a:extLst>
-                </a:gridCol>
-              </a:tblGrid>
-              <a:tr h="370840">
-                <a:tc>
-                  <a:txBody>
-                    <a:bodyPr/>
-                    <a:lstStyle/>
-                    <a:p>
-                      <a:pPr algn="ctr"/>
-                      <a:r>
-                        <a:rPr lang="en-GB" sz="1600" dirty="0"/>
-                        <a:t>Node </a:t>
-                      </a:r>
-                      <a:endParaRPr lang="en-SE" sz="1600" dirty="0"/>
-                    </a:p>
-                  </a:txBody>
-                  <a:tcPr/>
-                </a:tc>
-                <a:tc>
-                  <a:txBody>
-                    <a:bodyPr/>
-                    <a:lstStyle/>
-                    <a:p>
-                      <a:pPr algn="ctr"/>
-                      <a:r>
-                        <a:rPr lang="en-GB" sz="1600" dirty="0"/>
-                        <a:t>SD</a:t>
-                      </a:r>
-                      <a:endParaRPr lang="en-SE" sz="1600" dirty="0"/>
-                    </a:p>
-                  </a:txBody>
-                  <a:tcPr/>
-                </a:tc>
-                <a:tc>
-                  <a:txBody>
-                    <a:bodyPr/>
-                    <a:lstStyle/>
-                    <a:p>
-                      <a:pPr algn="ctr"/>
-                      <a:r>
-                        <a:rPr lang="en-GB" sz="1600" dirty="0"/>
-                        <a:t>PN</a:t>
-                      </a:r>
-                      <a:endParaRPr lang="en-SE" sz="1600" dirty="0"/>
-                    </a:p>
-                  </a:txBody>
-                  <a:tcPr/>
-                </a:tc>
-                <a:extLst>
-                  <a:ext uri="{0D108BD9-81ED-4DB2-BD59-A6C34878D82A}">
-                    <a16:rowId xmlns:a16="http://schemas.microsoft.com/office/drawing/2014/main" val="2582891870"/>
-                  </a:ext>
-                </a:extLst>
-              </a:tr>
-              <a:tr h="370840">
-                <a:tc>
-                  <a:txBody>
-                    <a:bodyPr/>
-                    <a:lstStyle/>
-                    <a:p>
-                      <a:pPr algn="ctr"/>
-                      <a:r>
-                        <a:rPr lang="en-GB" sz="1600" dirty="0"/>
-                        <a:t>1</a:t>
-                      </a:r>
-                      <a:endParaRPr lang="en-SE" sz="1600" dirty="0"/>
-                    </a:p>
-                  </a:txBody>
-                  <a:tcPr/>
-                </a:tc>
-                <a:tc>
-                  <a:txBody>
-                    <a:bodyPr/>
-                    <a:lstStyle/>
-                    <a:p>
-                      <a:pPr algn="ctr"/>
-                      <a:r>
-                        <a:rPr lang="en-GB" sz="1600" dirty="0"/>
-                        <a:t>0</a:t>
-                      </a:r>
-                      <a:endParaRPr lang="en-SE" sz="1600" dirty="0"/>
-                    </a:p>
-                  </a:txBody>
-                  <a:tcPr/>
-                </a:tc>
-                <a:tc>
-                  <a:txBody>
-                    <a:bodyPr/>
-                    <a:lstStyle/>
-                    <a:p>
-                      <a:pPr algn="ctr"/>
-                      <a:r>
-                        <a:rPr lang="en-GB" sz="1600" dirty="0"/>
-                        <a:t>/</a:t>
-                      </a:r>
-                      <a:endParaRPr lang="en-SE" sz="1600" dirty="0"/>
-                    </a:p>
-                  </a:txBody>
-                  <a:tcPr/>
-                </a:tc>
-                <a:extLst>
-                  <a:ext uri="{0D108BD9-81ED-4DB2-BD59-A6C34878D82A}">
-                    <a16:rowId xmlns:a16="http://schemas.microsoft.com/office/drawing/2014/main" val="1047507187"/>
-                  </a:ext>
-                </a:extLst>
-              </a:tr>
-              <a:tr h="370840">
-                <a:tc>
-                  <a:txBody>
-                    <a:bodyPr/>
-                    <a:lstStyle/>
-                    <a:p>
-                      <a:pPr algn="ctr"/>
-                      <a:r>
-                        <a:rPr lang="en-GB" sz="1600" dirty="0"/>
-                        <a:t>2</a:t>
-                      </a:r>
-                      <a:endParaRPr lang="en-SE" sz="1600" dirty="0"/>
-                    </a:p>
-                  </a:txBody>
-                  <a:tcPr/>
-                </a:tc>
-                <a:tc>
-                  <a:txBody>
-                    <a:bodyPr/>
-                    <a:lstStyle/>
-                    <a:p>
-                      <a:pPr algn="ctr"/>
-                      <a:endParaRPr lang="en-SE" sz="1600" dirty="0"/>
-                    </a:p>
-                  </a:txBody>
-                  <a:tcPr/>
-                </a:tc>
-                <a:tc>
-                  <a:txBody>
-                    <a:bodyPr/>
-                    <a:lstStyle/>
-                    <a:p>
-                      <a:pPr algn="ctr"/>
-                      <a:endParaRPr lang="en-SE" sz="1600" dirty="0"/>
-                    </a:p>
-                  </a:txBody>
-                  <a:tcPr/>
-                </a:tc>
-                <a:extLst>
-                  <a:ext uri="{0D108BD9-81ED-4DB2-BD59-A6C34878D82A}">
-                    <a16:rowId xmlns:a16="http://schemas.microsoft.com/office/drawing/2014/main" val="3620951922"/>
-                  </a:ext>
-                </a:extLst>
-              </a:tr>
-              <a:tr h="370840">
-                <a:tc>
-                  <a:txBody>
-                    <a:bodyPr/>
-                    <a:lstStyle/>
-                    <a:p>
-                      <a:pPr algn="ctr"/>
-                      <a:r>
-                        <a:rPr lang="en-GB" sz="1600" dirty="0"/>
-                        <a:t>3</a:t>
-                      </a:r>
-                      <a:endParaRPr lang="en-SE" sz="1600" dirty="0"/>
-                    </a:p>
-                  </a:txBody>
-                  <a:tcPr/>
-                </a:tc>
-                <a:tc>
-                  <a:txBody>
-                    <a:bodyPr/>
-                    <a:lstStyle/>
-                    <a:p>
-                      <a:pPr algn="ctr"/>
-                      <a:endParaRPr lang="en-SE" sz="1600" dirty="0"/>
-                    </a:p>
-                  </a:txBody>
-                  <a:tcPr/>
-                </a:tc>
-                <a:tc>
-                  <a:txBody>
-                    <a:bodyPr/>
-                    <a:lstStyle/>
-                    <a:p>
-                      <a:pPr algn="ctr"/>
-                      <a:endParaRPr lang="en-SE" sz="1600" dirty="0"/>
-                    </a:p>
-                  </a:txBody>
-                  <a:tcPr/>
-                </a:tc>
-                <a:extLst>
-                  <a:ext uri="{0D108BD9-81ED-4DB2-BD59-A6C34878D82A}">
-                    <a16:rowId xmlns:a16="http://schemas.microsoft.com/office/drawing/2014/main" val="4276274880"/>
-                  </a:ext>
-                </a:extLst>
-              </a:tr>
-              <a:tr h="370840">
-                <a:tc>
-                  <a:txBody>
-                    <a:bodyPr/>
-                    <a:lstStyle/>
-                    <a:p>
-                      <a:pPr algn="ctr"/>
-                      <a:r>
-                        <a:rPr lang="en-GB" sz="1600" dirty="0"/>
-                        <a:t>4</a:t>
-                      </a:r>
-                      <a:endParaRPr lang="en-SE" sz="1600" dirty="0"/>
-                    </a:p>
-                  </a:txBody>
-                  <a:tcPr/>
-                </a:tc>
-                <a:tc>
-                  <a:txBody>
-                    <a:bodyPr/>
-                    <a:lstStyle/>
-                    <a:p>
-                      <a:pPr algn="ctr"/>
-                      <a:endParaRPr lang="en-SE" sz="1600" dirty="0"/>
-                    </a:p>
-                  </a:txBody>
-                  <a:tcPr/>
-                </a:tc>
-                <a:tc>
-                  <a:txBody>
-                    <a:bodyPr/>
-                    <a:lstStyle/>
-                    <a:p>
-                      <a:pPr algn="ctr"/>
-                      <a:endParaRPr lang="en-SE" sz="1600" dirty="0"/>
-                    </a:p>
-                  </a:txBody>
-                  <a:tcPr/>
-                </a:tc>
-                <a:extLst>
-                  <a:ext uri="{0D108BD9-81ED-4DB2-BD59-A6C34878D82A}">
-                    <a16:rowId xmlns:a16="http://schemas.microsoft.com/office/drawing/2014/main" val="2669259463"/>
-                  </a:ext>
-                </a:extLst>
-              </a:tr>
-            </a:tbl>
-          </a:graphicData>
-        </a:graphic>
-      </p:graphicFrame>
-      <p:sp>
-        <p:nvSpPr>
-          <p:cNvPr id="35" name="TextBox 34">
-            <a:extLst>
-              <a:ext uri="{FF2B5EF4-FFF2-40B4-BE49-F238E27FC236}">
-                <a16:creationId xmlns:a16="http://schemas.microsoft.com/office/drawing/2014/main" id="{057532EE-5B39-FD7E-9235-1C41C9385E13}"/>
-              </a:ext>
-            </a:extLst>
-          </p:cNvPr>
-          <p:cNvSpPr txBox="1"/>
-          <p:nvPr/>
-        </p:nvSpPr>
-        <p:spPr>
-          <a:xfrm>
-            <a:off x="6393445" y="5773527"/>
-            <a:ext cx="2558823" cy="923330"/>
-          </a:xfrm>
-          <a:prstGeom prst="rect">
-            <a:avLst/>
-          </a:prstGeom>
-          <a:noFill/>
-        </p:spPr>
-        <p:txBody>
-          <a:bodyPr wrap="square">
-            <a:spAutoFit/>
-          </a:bodyPr>
-          <a:lstStyle/>
-          <a:p>
-            <a:r>
-              <a:rPr lang="en-GB" sz="1800" dirty="0">
-                <a:solidFill>
-                  <a:schemeClr val="tx1"/>
-                </a:solidFill>
-                <a:latin typeface="Quattrocento Sans" panose="020B0502050000020003" pitchFamily="34" charset="0"/>
-              </a:rPr>
-              <a:t>Shortest paths starting from source node 1 in reweighted graph</a:t>
-            </a:r>
-          </a:p>
-        </p:txBody>
-      </p:sp>
-      <p:graphicFrame>
-        <p:nvGraphicFramePr>
-          <p:cNvPr id="36" name="Table 35">
-            <a:extLst>
-              <a:ext uri="{FF2B5EF4-FFF2-40B4-BE49-F238E27FC236}">
-                <a16:creationId xmlns:a16="http://schemas.microsoft.com/office/drawing/2014/main" id="{303BE698-4BAE-E5FA-F50F-8C159BA4F149}"/>
-              </a:ext>
-            </a:extLst>
-          </p:cNvPr>
-          <p:cNvGraphicFramePr>
-            <a:graphicFrameLocks noGrp="1"/>
-          </p:cNvGraphicFramePr>
-          <p:nvPr/>
-        </p:nvGraphicFramePr>
-        <p:xfrm>
-          <a:off x="9139730" y="3929503"/>
-          <a:ext cx="2643909" cy="1854200"/>
-        </p:xfrm>
-        <a:graphic>
-          <a:graphicData uri="http://schemas.openxmlformats.org/drawingml/2006/table">
-            <a:tbl>
-              <a:tblPr firstRow="1" bandRow="1">
-                <a:tableStyleId>{5940675A-B579-460E-94D1-54222C63F5DA}</a:tableStyleId>
-              </a:tblPr>
-              <a:tblGrid>
-                <a:gridCol w="881303">
-                  <a:extLst>
-                    <a:ext uri="{9D8B030D-6E8A-4147-A177-3AD203B41FA5}">
-                      <a16:colId xmlns:a16="http://schemas.microsoft.com/office/drawing/2014/main" val="3113293538"/>
-                    </a:ext>
-                  </a:extLst>
-                </a:gridCol>
-                <a:gridCol w="881303">
-                  <a:extLst>
-                    <a:ext uri="{9D8B030D-6E8A-4147-A177-3AD203B41FA5}">
-                      <a16:colId xmlns:a16="http://schemas.microsoft.com/office/drawing/2014/main" val="4210074216"/>
-                    </a:ext>
-                  </a:extLst>
-                </a:gridCol>
-                <a:gridCol w="881303">
-                  <a:extLst>
-                    <a:ext uri="{9D8B030D-6E8A-4147-A177-3AD203B41FA5}">
-                      <a16:colId xmlns:a16="http://schemas.microsoft.com/office/drawing/2014/main" val="3424504882"/>
-                    </a:ext>
-                  </a:extLst>
-                </a:gridCol>
-              </a:tblGrid>
-              <a:tr h="370840">
-                <a:tc>
-                  <a:txBody>
-                    <a:bodyPr/>
-                    <a:lstStyle/>
-                    <a:p>
-                      <a:pPr algn="ctr"/>
-                      <a:r>
-                        <a:rPr lang="en-GB" sz="1600" dirty="0"/>
-                        <a:t>Node </a:t>
-                      </a:r>
-                      <a:endParaRPr lang="en-SE" sz="1600" dirty="0"/>
-                    </a:p>
-                  </a:txBody>
-                  <a:tcPr/>
-                </a:tc>
-                <a:tc>
-                  <a:txBody>
-                    <a:bodyPr/>
-                    <a:lstStyle/>
-                    <a:p>
-                      <a:pPr algn="ctr"/>
-                      <a:r>
-                        <a:rPr lang="en-GB" sz="1600" dirty="0"/>
-                        <a:t>SD</a:t>
-                      </a:r>
-                      <a:endParaRPr lang="en-SE" sz="1600" dirty="0"/>
-                    </a:p>
-                  </a:txBody>
-                  <a:tcPr/>
-                </a:tc>
-                <a:tc>
-                  <a:txBody>
-                    <a:bodyPr/>
-                    <a:lstStyle/>
-                    <a:p>
-                      <a:pPr algn="ctr"/>
-                      <a:r>
-                        <a:rPr lang="en-GB" sz="1600" dirty="0"/>
-                        <a:t>PN</a:t>
-                      </a:r>
-                      <a:endParaRPr lang="en-SE" sz="1600" dirty="0"/>
-                    </a:p>
-                  </a:txBody>
-                  <a:tcPr/>
-                </a:tc>
-                <a:extLst>
-                  <a:ext uri="{0D108BD9-81ED-4DB2-BD59-A6C34878D82A}">
-                    <a16:rowId xmlns:a16="http://schemas.microsoft.com/office/drawing/2014/main" val="2582891870"/>
-                  </a:ext>
-                </a:extLst>
-              </a:tr>
-              <a:tr h="370840">
-                <a:tc>
-                  <a:txBody>
-                    <a:bodyPr/>
-                    <a:lstStyle/>
-                    <a:p>
-                      <a:pPr algn="ctr"/>
-                      <a:r>
-                        <a:rPr lang="en-GB" sz="1600" dirty="0"/>
-                        <a:t>1</a:t>
-                      </a:r>
-                      <a:endParaRPr lang="en-SE" sz="1600" dirty="0"/>
-                    </a:p>
-                  </a:txBody>
-                  <a:tcPr/>
-                </a:tc>
-                <a:tc>
-                  <a:txBody>
-                    <a:bodyPr/>
-                    <a:lstStyle/>
-                    <a:p>
-                      <a:pPr algn="ctr"/>
-                      <a:r>
-                        <a:rPr lang="en-GB" sz="1600" dirty="0"/>
-                        <a:t>0</a:t>
-                      </a:r>
-                      <a:endParaRPr lang="en-SE" sz="1600" dirty="0"/>
-                    </a:p>
-                  </a:txBody>
-                  <a:tcPr/>
-                </a:tc>
-                <a:tc>
-                  <a:txBody>
-                    <a:bodyPr/>
-                    <a:lstStyle/>
-                    <a:p>
-                      <a:pPr algn="ctr"/>
-                      <a:r>
-                        <a:rPr lang="en-GB" sz="1600" dirty="0"/>
-                        <a:t>/</a:t>
-                      </a:r>
-                      <a:endParaRPr lang="en-SE" sz="1600" dirty="0"/>
-                    </a:p>
-                  </a:txBody>
-                  <a:tcPr/>
-                </a:tc>
-                <a:extLst>
-                  <a:ext uri="{0D108BD9-81ED-4DB2-BD59-A6C34878D82A}">
-                    <a16:rowId xmlns:a16="http://schemas.microsoft.com/office/drawing/2014/main" val="1047507187"/>
-                  </a:ext>
-                </a:extLst>
-              </a:tr>
-              <a:tr h="370840">
-                <a:tc>
-                  <a:txBody>
-                    <a:bodyPr/>
-                    <a:lstStyle/>
-                    <a:p>
-                      <a:pPr algn="ctr"/>
-                      <a:r>
-                        <a:rPr lang="en-GB" sz="1600" dirty="0"/>
-                        <a:t>2</a:t>
-                      </a:r>
-                      <a:endParaRPr lang="en-SE" sz="1600" dirty="0"/>
-                    </a:p>
-                  </a:txBody>
-                  <a:tcPr/>
-                </a:tc>
-                <a:tc>
-                  <a:txBody>
-                    <a:bodyPr/>
-                    <a:lstStyle/>
-                    <a:p>
-                      <a:pPr algn="ctr"/>
-                      <a:endParaRPr lang="en-SE" sz="1600" dirty="0"/>
-                    </a:p>
-                  </a:txBody>
-                  <a:tcPr/>
-                </a:tc>
-                <a:tc>
-                  <a:txBody>
-                    <a:bodyPr/>
-                    <a:lstStyle/>
-                    <a:p>
-                      <a:pPr algn="ctr"/>
-                      <a:endParaRPr lang="en-SE" sz="1600" dirty="0"/>
-                    </a:p>
-                  </a:txBody>
-                  <a:tcPr/>
-                </a:tc>
-                <a:extLst>
-                  <a:ext uri="{0D108BD9-81ED-4DB2-BD59-A6C34878D82A}">
-                    <a16:rowId xmlns:a16="http://schemas.microsoft.com/office/drawing/2014/main" val="3620951922"/>
-                  </a:ext>
-                </a:extLst>
-              </a:tr>
-              <a:tr h="370840">
-                <a:tc>
-                  <a:txBody>
-                    <a:bodyPr/>
-                    <a:lstStyle/>
-                    <a:p>
-                      <a:pPr algn="ctr"/>
-                      <a:r>
-                        <a:rPr lang="en-GB" sz="1600" dirty="0"/>
-                        <a:t>3</a:t>
-                      </a:r>
-                      <a:endParaRPr lang="en-SE" sz="1600" dirty="0"/>
-                    </a:p>
-                  </a:txBody>
-                  <a:tcPr/>
-                </a:tc>
-                <a:tc>
-                  <a:txBody>
-                    <a:bodyPr/>
-                    <a:lstStyle/>
-                    <a:p>
-                      <a:pPr algn="ctr"/>
-                      <a:endParaRPr lang="en-SE" sz="1600" dirty="0"/>
-                    </a:p>
-                  </a:txBody>
-                  <a:tcPr/>
-                </a:tc>
-                <a:tc>
-                  <a:txBody>
-                    <a:bodyPr/>
-                    <a:lstStyle/>
-                    <a:p>
-                      <a:pPr algn="ctr"/>
-                      <a:endParaRPr lang="en-SE" sz="1600" dirty="0"/>
-                    </a:p>
-                  </a:txBody>
-                  <a:tcPr/>
-                </a:tc>
-                <a:extLst>
-                  <a:ext uri="{0D108BD9-81ED-4DB2-BD59-A6C34878D82A}">
-                    <a16:rowId xmlns:a16="http://schemas.microsoft.com/office/drawing/2014/main" val="4276274880"/>
-                  </a:ext>
-                </a:extLst>
-              </a:tr>
-              <a:tr h="370840">
-                <a:tc>
-                  <a:txBody>
-                    <a:bodyPr/>
-                    <a:lstStyle/>
-                    <a:p>
-                      <a:pPr algn="ctr"/>
-                      <a:r>
-                        <a:rPr lang="en-GB" sz="1600" dirty="0"/>
-                        <a:t>4</a:t>
-                      </a:r>
-                      <a:endParaRPr lang="en-SE" sz="1600" dirty="0"/>
-                    </a:p>
-                  </a:txBody>
-                  <a:tcPr/>
-                </a:tc>
-                <a:tc>
-                  <a:txBody>
-                    <a:bodyPr/>
-                    <a:lstStyle/>
-                    <a:p>
-                      <a:pPr algn="ctr"/>
-                      <a:endParaRPr lang="en-SE" sz="1600" dirty="0"/>
-                    </a:p>
-                  </a:txBody>
-                  <a:tcPr/>
-                </a:tc>
-                <a:tc>
-                  <a:txBody>
-                    <a:bodyPr/>
-                    <a:lstStyle/>
-                    <a:p>
-                      <a:pPr algn="ctr"/>
-                      <a:endParaRPr lang="en-SE" sz="1600" dirty="0"/>
-                    </a:p>
-                  </a:txBody>
-                  <a:tcPr/>
-                </a:tc>
-                <a:extLst>
-                  <a:ext uri="{0D108BD9-81ED-4DB2-BD59-A6C34878D82A}">
-                    <a16:rowId xmlns:a16="http://schemas.microsoft.com/office/drawing/2014/main" val="2669259463"/>
-                  </a:ext>
-                </a:extLst>
-              </a:tr>
-            </a:tbl>
-          </a:graphicData>
-        </a:graphic>
-      </p:graphicFrame>
-      <p:sp>
-        <p:nvSpPr>
-          <p:cNvPr id="37" name="TextBox 36">
-            <a:extLst>
-              <a:ext uri="{FF2B5EF4-FFF2-40B4-BE49-F238E27FC236}">
-                <a16:creationId xmlns:a16="http://schemas.microsoft.com/office/drawing/2014/main" id="{733C6FDF-7DE8-8C79-CD12-1CAE1E1F2968}"/>
-              </a:ext>
-            </a:extLst>
-          </p:cNvPr>
-          <p:cNvSpPr txBox="1"/>
-          <p:nvPr/>
-        </p:nvSpPr>
-        <p:spPr>
-          <a:xfrm>
-            <a:off x="9396359" y="5773527"/>
-            <a:ext cx="2558823" cy="923330"/>
-          </a:xfrm>
-          <a:prstGeom prst="rect">
-            <a:avLst/>
-          </a:prstGeom>
-          <a:noFill/>
-        </p:spPr>
-        <p:txBody>
-          <a:bodyPr wrap="square">
-            <a:spAutoFit/>
-          </a:bodyPr>
-          <a:lstStyle/>
-          <a:p>
-            <a:r>
-              <a:rPr lang="en-GB" sz="1800" dirty="0">
-                <a:solidFill>
-                  <a:schemeClr val="tx1"/>
-                </a:solidFill>
-                <a:latin typeface="Quattrocento Sans" panose="020B0502050000020003" pitchFamily="34" charset="0"/>
-              </a:rPr>
-              <a:t>Shortest paths starting from source node 1 in original graph</a:t>
-            </a:r>
-          </a:p>
-        </p:txBody>
-      </p:sp>
-      <p:sp>
-        <p:nvSpPr>
-          <p:cNvPr id="50" name="Oval 5">
-            <a:extLst>
-              <a:ext uri="{FF2B5EF4-FFF2-40B4-BE49-F238E27FC236}">
-                <a16:creationId xmlns:a16="http://schemas.microsoft.com/office/drawing/2014/main" id="{274267F4-CE3B-DC6E-004A-7E6DE509A977}"/>
-              </a:ext>
-            </a:extLst>
-          </p:cNvPr>
-          <p:cNvSpPr>
-            <a:spLocks noChangeArrowheads="1"/>
-          </p:cNvSpPr>
-          <p:nvPr/>
-        </p:nvSpPr>
-        <p:spPr bwMode="auto">
-          <a:xfrm>
-            <a:off x="2395544" y="4082625"/>
-            <a:ext cx="533400" cy="533400"/>
-          </a:xfrm>
-          <a:prstGeom prst="ellipse">
-            <a:avLst/>
-          </a:prstGeom>
-          <a:solidFill>
-            <a:schemeClr val="bg1"/>
-          </a:solidFill>
-          <a:ln w="9525">
-            <a:solidFill>
-              <a:schemeClr val="tx1"/>
-            </a:solidFill>
-            <a:round/>
-            <a:headEnd/>
-            <a:tailEnd/>
-          </a:ln>
-          <a:effectLst/>
-          <a:extLst>
-            <a:ext uri="{AF507438-7753-43E0-B8FC-AC1667EBCBE1}">
-              <a14:hiddenEffects xmlns:a14="http://schemas.microsoft.com/office/drawing/2010/main">
-                <a:effectLst>
-                  <a:outerShdw dist="35921" dir="2700000" algn="ctr" rotWithShape="0">
-                    <a:schemeClr val="bg2"/>
-                  </a:outerShdw>
-                </a:effectLst>
-              </a14:hiddenEffects>
-            </a:ext>
-          </a:extLst>
-        </p:spPr>
-        <p:txBody>
-          <a:bodyPr wrap="none" anchor="ctr"/>
-          <a:lstStyle/>
-          <a:p>
-            <a:pPr fontAlgn="base">
-              <a:spcBef>
-                <a:spcPct val="0"/>
-              </a:spcBef>
-              <a:spcAft>
-                <a:spcPct val="0"/>
-              </a:spcAft>
-              <a:buClrTx/>
-              <a:defRPr/>
-            </a:pPr>
-            <a:r>
-              <a:rPr lang="en-GB" sz="2400" dirty="0">
-                <a:latin typeface="Arial" panose="020B0604020202020204" pitchFamily="34" charset="0"/>
-              </a:rPr>
-              <a:t>1</a:t>
-            </a:r>
-            <a:endParaRPr lang="en-SE" sz="2400" dirty="0">
-              <a:latin typeface="Arial" panose="020B0604020202020204" pitchFamily="34" charset="0"/>
-            </a:endParaRPr>
-          </a:p>
-        </p:txBody>
-      </p:sp>
-      <p:sp>
-        <p:nvSpPr>
-          <p:cNvPr id="51" name="Oval 8">
-            <a:extLst>
-              <a:ext uri="{FF2B5EF4-FFF2-40B4-BE49-F238E27FC236}">
-                <a16:creationId xmlns:a16="http://schemas.microsoft.com/office/drawing/2014/main" id="{12AFA5AC-BE19-9947-6225-79BB9B823562}"/>
-              </a:ext>
-            </a:extLst>
-          </p:cNvPr>
-          <p:cNvSpPr>
-            <a:spLocks noChangeArrowheads="1"/>
-          </p:cNvSpPr>
-          <p:nvPr/>
-        </p:nvSpPr>
-        <p:spPr bwMode="auto">
-          <a:xfrm>
-            <a:off x="3817839" y="4082625"/>
-            <a:ext cx="533400" cy="533400"/>
-          </a:xfrm>
-          <a:prstGeom prst="ellipse">
-            <a:avLst/>
-          </a:prstGeom>
-          <a:solidFill>
-            <a:schemeClr val="bg1"/>
-          </a:solidFill>
-          <a:ln w="9525">
-            <a:solidFill>
-              <a:schemeClr val="tx1"/>
-            </a:solidFill>
-            <a:round/>
-            <a:headEnd/>
-            <a:tailEnd/>
-          </a:ln>
-          <a:effectLst/>
-          <a:extLst>
-            <a:ext uri="{AF507438-7753-43E0-B8FC-AC1667EBCBE1}">
-              <a14:hiddenEffects xmlns:a14="http://schemas.microsoft.com/office/drawing/2010/main">
-                <a:effectLst>
-                  <a:outerShdw dist="35921" dir="2700000" algn="ctr" rotWithShape="0">
-                    <a:schemeClr val="bg2"/>
-                  </a:outerShdw>
-                </a:effectLst>
-              </a14:hiddenEffects>
-            </a:ext>
-          </a:extLst>
-        </p:spPr>
-        <p:txBody>
-          <a:bodyPr wrap="none" anchor="ctr"/>
-          <a:lstStyle/>
-          <a:p>
-            <a:pPr fontAlgn="base">
-              <a:spcBef>
-                <a:spcPct val="0"/>
-              </a:spcBef>
-              <a:spcAft>
-                <a:spcPct val="0"/>
-              </a:spcAft>
-              <a:buClrTx/>
-              <a:defRPr/>
-            </a:pPr>
-            <a:r>
-              <a:rPr lang="en-GB" sz="2400" dirty="0">
-                <a:latin typeface="Arial" panose="020B0604020202020204" pitchFamily="34" charset="0"/>
-              </a:rPr>
-              <a:t>2</a:t>
-            </a:r>
-            <a:endParaRPr lang="en-SE" sz="2400" dirty="0">
-              <a:latin typeface="Arial" panose="020B0604020202020204" pitchFamily="34" charset="0"/>
-            </a:endParaRPr>
-          </a:p>
-        </p:txBody>
-      </p:sp>
-      <p:sp>
-        <p:nvSpPr>
-          <p:cNvPr id="52" name="Oval 11">
-            <a:extLst>
-              <a:ext uri="{FF2B5EF4-FFF2-40B4-BE49-F238E27FC236}">
-                <a16:creationId xmlns:a16="http://schemas.microsoft.com/office/drawing/2014/main" id="{E4FB63D7-0D98-F598-D4C0-F0C9D80C3E8E}"/>
-              </a:ext>
-            </a:extLst>
-          </p:cNvPr>
-          <p:cNvSpPr>
-            <a:spLocks noChangeArrowheads="1"/>
-          </p:cNvSpPr>
-          <p:nvPr/>
-        </p:nvSpPr>
-        <p:spPr bwMode="auto">
-          <a:xfrm>
-            <a:off x="2395544" y="5270083"/>
-            <a:ext cx="533400" cy="533400"/>
-          </a:xfrm>
-          <a:prstGeom prst="ellipse">
-            <a:avLst/>
-          </a:prstGeom>
-          <a:solidFill>
-            <a:schemeClr val="bg1"/>
-          </a:solidFill>
-          <a:ln w="9525">
-            <a:solidFill>
-              <a:schemeClr val="tx1"/>
-            </a:solidFill>
-            <a:round/>
-            <a:headEnd/>
-            <a:tailEnd/>
-          </a:ln>
-          <a:effectLst/>
-          <a:extLst>
-            <a:ext uri="{AF507438-7753-43E0-B8FC-AC1667EBCBE1}">
-              <a14:hiddenEffects xmlns:a14="http://schemas.microsoft.com/office/drawing/2010/main">
-                <a:effectLst>
-                  <a:outerShdw dist="35921" dir="2700000" algn="ctr" rotWithShape="0">
-                    <a:schemeClr val="bg2"/>
-                  </a:outerShdw>
-                </a:effectLst>
-              </a14:hiddenEffects>
-            </a:ext>
-          </a:extLst>
-        </p:spPr>
-        <p:txBody>
-          <a:bodyPr wrap="none" anchor="ctr"/>
-          <a:lstStyle/>
-          <a:p>
-            <a:pPr fontAlgn="base">
-              <a:spcBef>
-                <a:spcPct val="0"/>
-              </a:spcBef>
-              <a:spcAft>
-                <a:spcPct val="0"/>
-              </a:spcAft>
-              <a:buClrTx/>
-              <a:defRPr/>
-            </a:pPr>
-            <a:r>
-              <a:rPr lang="en-GB" sz="2400" dirty="0">
-                <a:latin typeface="Arial" panose="020B0604020202020204" pitchFamily="34" charset="0"/>
-              </a:rPr>
-              <a:t>3</a:t>
-            </a:r>
-            <a:endParaRPr lang="en-SE" sz="2400" dirty="0">
-              <a:latin typeface="Arial" panose="020B0604020202020204" pitchFamily="34" charset="0"/>
-            </a:endParaRPr>
-          </a:p>
-        </p:txBody>
-      </p:sp>
-      <p:sp>
-        <p:nvSpPr>
-          <p:cNvPr id="53" name="Line 19">
-            <a:extLst>
-              <a:ext uri="{FF2B5EF4-FFF2-40B4-BE49-F238E27FC236}">
-                <a16:creationId xmlns:a16="http://schemas.microsoft.com/office/drawing/2014/main" id="{C9E781ED-1913-07EF-BAAB-76E78E19A408}"/>
-              </a:ext>
-            </a:extLst>
-          </p:cNvPr>
-          <p:cNvSpPr>
-            <a:spLocks noChangeShapeType="1"/>
-          </p:cNvSpPr>
-          <p:nvPr/>
-        </p:nvSpPr>
-        <p:spPr bwMode="auto">
-          <a:xfrm flipV="1">
-            <a:off x="2928944" y="4363140"/>
-            <a:ext cx="904134" cy="1"/>
-          </a:xfrm>
-          <a:prstGeom prst="line">
-            <a:avLst/>
-          </a:prstGeom>
-          <a:ln w="19050" cap="flat" cmpd="sng" algn="ctr">
-            <a:solidFill>
-              <a:schemeClr val="dk1"/>
-            </a:solidFill>
-            <a:prstDash val="solid"/>
-            <a:round/>
-            <a:headEnd type="none" w="med" len="med"/>
-            <a:tailEnd type="arrow" w="med" len="med"/>
-          </a:ln>
-        </p:spPr>
-        <p:style>
-          <a:lnRef idx="0">
-            <a:scrgbClr r="0" g="0" b="0"/>
-          </a:lnRef>
-          <a:fillRef idx="0">
-            <a:scrgbClr r="0" g="0" b="0"/>
-          </a:fillRef>
-          <a:effectRef idx="0">
-            <a:scrgbClr r="0" g="0" b="0"/>
-          </a:effectRef>
-          <a:fontRef idx="minor">
-            <a:schemeClr val="tx1"/>
-          </a:fontRef>
-        </p:style>
-        <p:txBody>
-          <a:bodyPr/>
-          <a:lstStyle/>
-          <a:p>
-            <a:pPr fontAlgn="base">
-              <a:spcBef>
-                <a:spcPct val="0"/>
-              </a:spcBef>
-              <a:spcAft>
-                <a:spcPct val="0"/>
-              </a:spcAft>
-              <a:buClrTx/>
-              <a:defRPr/>
-            </a:pPr>
-            <a:endParaRPr lang="en-SE" sz="1800" dirty="0">
-              <a:solidFill>
-                <a:srgbClr val="000000"/>
-              </a:solidFill>
-              <a:latin typeface="Arial" panose="020B0604020202020204" pitchFamily="34" charset="0"/>
-            </a:endParaRPr>
-          </a:p>
-        </p:txBody>
-      </p:sp>
-      <p:sp>
-        <p:nvSpPr>
-          <p:cNvPr id="54" name="Line 20">
-            <a:extLst>
-              <a:ext uri="{FF2B5EF4-FFF2-40B4-BE49-F238E27FC236}">
-                <a16:creationId xmlns:a16="http://schemas.microsoft.com/office/drawing/2014/main" id="{12571EC7-DF0B-878F-6E2E-753C47C30444}"/>
-              </a:ext>
-            </a:extLst>
-          </p:cNvPr>
-          <p:cNvSpPr>
-            <a:spLocks noChangeShapeType="1"/>
-          </p:cNvSpPr>
-          <p:nvPr/>
-        </p:nvSpPr>
-        <p:spPr bwMode="auto">
-          <a:xfrm>
-            <a:off x="2679187" y="4609861"/>
-            <a:ext cx="15586" cy="660221"/>
-          </a:xfrm>
-          <a:prstGeom prst="line">
-            <a:avLst/>
-          </a:prstGeom>
-          <a:ln w="19050" cap="flat" cmpd="sng" algn="ctr">
-            <a:solidFill>
-              <a:schemeClr val="dk1"/>
-            </a:solidFill>
-            <a:prstDash val="solid"/>
-            <a:round/>
-            <a:headEnd type="none" w="med" len="med"/>
-            <a:tailEnd type="arrow" w="med" len="med"/>
-          </a:ln>
-        </p:spPr>
-        <p:style>
-          <a:lnRef idx="0">
-            <a:scrgbClr r="0" g="0" b="0"/>
-          </a:lnRef>
-          <a:fillRef idx="0">
-            <a:scrgbClr r="0" g="0" b="0"/>
-          </a:fillRef>
-          <a:effectRef idx="0">
-            <a:scrgbClr r="0" g="0" b="0"/>
-          </a:effectRef>
-          <a:fontRef idx="minor">
-            <a:schemeClr val="tx1"/>
-          </a:fontRef>
-        </p:style>
-        <p:txBody>
-          <a:bodyPr/>
-          <a:lstStyle/>
-          <a:p>
-            <a:pPr fontAlgn="base">
-              <a:spcBef>
-                <a:spcPct val="0"/>
-              </a:spcBef>
-              <a:spcAft>
-                <a:spcPct val="0"/>
-              </a:spcAft>
-            </a:pPr>
-            <a:endParaRPr lang="en-SE">
-              <a:solidFill>
-                <a:srgbClr val="000000"/>
-              </a:solidFill>
-              <a:latin typeface="Arial" panose="020B0604020202020204" pitchFamily="34" charset="0"/>
-            </a:endParaRPr>
-          </a:p>
-        </p:txBody>
-      </p:sp>
-      <p:sp>
-        <p:nvSpPr>
-          <p:cNvPr id="56" name="Oval 8">
-            <a:extLst>
-              <a:ext uri="{FF2B5EF4-FFF2-40B4-BE49-F238E27FC236}">
-                <a16:creationId xmlns:a16="http://schemas.microsoft.com/office/drawing/2014/main" id="{A906DAA8-F7EA-CCF8-4235-826A958847F3}"/>
-              </a:ext>
-            </a:extLst>
-          </p:cNvPr>
-          <p:cNvSpPr>
-            <a:spLocks noChangeArrowheads="1"/>
-          </p:cNvSpPr>
-          <p:nvPr/>
-        </p:nvSpPr>
-        <p:spPr bwMode="auto">
-          <a:xfrm>
-            <a:off x="3828230" y="5270083"/>
-            <a:ext cx="533400" cy="533400"/>
-          </a:xfrm>
-          <a:prstGeom prst="ellipse">
-            <a:avLst/>
-          </a:prstGeom>
-          <a:solidFill>
-            <a:schemeClr val="bg1"/>
-          </a:solidFill>
-          <a:ln w="9525">
-            <a:solidFill>
-              <a:schemeClr val="tx1"/>
-            </a:solidFill>
-            <a:round/>
-            <a:headEnd/>
-            <a:tailEnd/>
-          </a:ln>
-          <a:effectLst/>
-          <a:extLst>
-            <a:ext uri="{AF507438-7753-43E0-B8FC-AC1667EBCBE1}">
-              <a14:hiddenEffects xmlns:a14="http://schemas.microsoft.com/office/drawing/2010/main">
-                <a:effectLst>
-                  <a:outerShdw dist="35921" dir="2700000" algn="ctr" rotWithShape="0">
-                    <a:schemeClr val="bg2"/>
-                  </a:outerShdw>
-                </a:effectLst>
-              </a14:hiddenEffects>
-            </a:ext>
-          </a:extLst>
-        </p:spPr>
-        <p:txBody>
-          <a:bodyPr wrap="none" anchor="ctr"/>
-          <a:lstStyle/>
-          <a:p>
-            <a:pPr fontAlgn="base">
-              <a:spcBef>
-                <a:spcPct val="0"/>
-              </a:spcBef>
-              <a:spcAft>
-                <a:spcPct val="0"/>
-              </a:spcAft>
-              <a:buClrTx/>
-              <a:defRPr/>
-            </a:pPr>
-            <a:r>
-              <a:rPr lang="en-GB" sz="2400" dirty="0">
-                <a:latin typeface="Arial" panose="020B0604020202020204" pitchFamily="34" charset="0"/>
-              </a:rPr>
-              <a:t>4</a:t>
-            </a:r>
-            <a:endParaRPr lang="en-SE" sz="2400" dirty="0">
-              <a:latin typeface="Arial" panose="020B0604020202020204" pitchFamily="34" charset="0"/>
-            </a:endParaRPr>
-          </a:p>
-        </p:txBody>
-      </p:sp>
-      <p:sp>
-        <p:nvSpPr>
-          <p:cNvPr id="57" name="Line 19">
-            <a:extLst>
-              <a:ext uri="{FF2B5EF4-FFF2-40B4-BE49-F238E27FC236}">
-                <a16:creationId xmlns:a16="http://schemas.microsoft.com/office/drawing/2014/main" id="{599C0751-E5E8-33BD-765C-6CDB99AAD440}"/>
-              </a:ext>
-            </a:extLst>
-          </p:cNvPr>
-          <p:cNvSpPr>
-            <a:spLocks noChangeShapeType="1"/>
-          </p:cNvSpPr>
-          <p:nvPr/>
-        </p:nvSpPr>
-        <p:spPr bwMode="auto">
-          <a:xfrm flipV="1">
-            <a:off x="2873163" y="4488736"/>
-            <a:ext cx="1009411" cy="868913"/>
-          </a:xfrm>
-          <a:prstGeom prst="line">
-            <a:avLst/>
-          </a:prstGeom>
-          <a:ln w="19050" cap="flat" cmpd="sng" algn="ctr">
-            <a:solidFill>
-              <a:schemeClr val="dk1"/>
-            </a:solidFill>
-            <a:prstDash val="solid"/>
-            <a:round/>
-            <a:headEnd type="none" w="med" len="med"/>
-            <a:tailEnd type="arrow" w="med" len="med"/>
-          </a:ln>
-        </p:spPr>
-        <p:style>
-          <a:lnRef idx="0">
-            <a:scrgbClr r="0" g="0" b="0"/>
-          </a:lnRef>
-          <a:fillRef idx="0">
-            <a:scrgbClr r="0" g="0" b="0"/>
-          </a:fillRef>
-          <a:effectRef idx="0">
-            <a:scrgbClr r="0" g="0" b="0"/>
-          </a:effectRef>
-          <a:fontRef idx="minor">
-            <a:schemeClr val="tx1"/>
-          </a:fontRef>
-        </p:style>
-        <p:txBody>
-          <a:bodyPr/>
-          <a:lstStyle/>
-          <a:p>
-            <a:pPr fontAlgn="base">
-              <a:spcBef>
-                <a:spcPct val="0"/>
-              </a:spcBef>
-              <a:spcAft>
-                <a:spcPct val="0"/>
-              </a:spcAft>
-              <a:buClrTx/>
-              <a:defRPr/>
-            </a:pPr>
-            <a:endParaRPr lang="en-SE" sz="1800" dirty="0">
-              <a:solidFill>
-                <a:srgbClr val="000000"/>
-              </a:solidFill>
-              <a:latin typeface="Arial" panose="020B0604020202020204" pitchFamily="34" charset="0"/>
-            </a:endParaRPr>
-          </a:p>
-        </p:txBody>
-      </p:sp>
-      <p:sp>
-        <p:nvSpPr>
-          <p:cNvPr id="58" name="Line 19">
-            <a:extLst>
-              <a:ext uri="{FF2B5EF4-FFF2-40B4-BE49-F238E27FC236}">
-                <a16:creationId xmlns:a16="http://schemas.microsoft.com/office/drawing/2014/main" id="{5C91E7D7-2687-911A-C7A5-469C7BDEE6D1}"/>
-              </a:ext>
-            </a:extLst>
-          </p:cNvPr>
-          <p:cNvSpPr>
-            <a:spLocks noChangeShapeType="1"/>
-          </p:cNvSpPr>
-          <p:nvPr/>
-        </p:nvSpPr>
-        <p:spPr bwMode="auto">
-          <a:xfrm flipV="1">
-            <a:off x="2928944" y="5550698"/>
-            <a:ext cx="904134" cy="1"/>
-          </a:xfrm>
-          <a:prstGeom prst="line">
-            <a:avLst/>
-          </a:prstGeom>
-          <a:ln w="19050" cap="flat" cmpd="sng" algn="ctr">
-            <a:solidFill>
-              <a:schemeClr val="dk1"/>
-            </a:solidFill>
-            <a:prstDash val="solid"/>
-            <a:round/>
-            <a:headEnd type="none" w="med" len="med"/>
-            <a:tailEnd type="arrow" w="med" len="med"/>
-          </a:ln>
-        </p:spPr>
-        <p:style>
-          <a:lnRef idx="0">
-            <a:scrgbClr r="0" g="0" b="0"/>
-          </a:lnRef>
-          <a:fillRef idx="0">
-            <a:scrgbClr r="0" g="0" b="0"/>
-          </a:fillRef>
-          <a:effectRef idx="0">
-            <a:scrgbClr r="0" g="0" b="0"/>
-          </a:effectRef>
-          <a:fontRef idx="minor">
-            <a:schemeClr val="tx1"/>
-          </a:fontRef>
-        </p:style>
-        <p:txBody>
-          <a:bodyPr/>
-          <a:lstStyle/>
-          <a:p>
-            <a:pPr fontAlgn="base">
-              <a:spcBef>
-                <a:spcPct val="0"/>
-              </a:spcBef>
-              <a:spcAft>
-                <a:spcPct val="0"/>
-              </a:spcAft>
-              <a:buClrTx/>
-              <a:defRPr/>
-            </a:pPr>
-            <a:endParaRPr lang="en-SE" sz="1800" dirty="0">
-              <a:solidFill>
-                <a:srgbClr val="000000"/>
-              </a:solidFill>
-              <a:latin typeface="Arial" panose="020B0604020202020204" pitchFamily="34" charset="0"/>
-            </a:endParaRPr>
-          </a:p>
-        </p:txBody>
-      </p:sp>
-      <p:sp>
-        <p:nvSpPr>
-          <p:cNvPr id="62" name="TextBox 61">
-            <a:extLst>
-              <a:ext uri="{FF2B5EF4-FFF2-40B4-BE49-F238E27FC236}">
-                <a16:creationId xmlns:a16="http://schemas.microsoft.com/office/drawing/2014/main" id="{175DB786-501A-D4E3-95FB-DAE0CC3186D7}"/>
-              </a:ext>
-            </a:extLst>
-          </p:cNvPr>
-          <p:cNvSpPr txBox="1"/>
-          <p:nvPr/>
-        </p:nvSpPr>
-        <p:spPr>
-          <a:xfrm>
-            <a:off x="2541999" y="6008034"/>
-            <a:ext cx="2081445" cy="369332"/>
-          </a:xfrm>
-          <a:prstGeom prst="rect">
-            <a:avLst/>
-          </a:prstGeom>
-          <a:noFill/>
-        </p:spPr>
-        <p:txBody>
-          <a:bodyPr wrap="square">
-            <a:spAutoFit/>
-          </a:bodyPr>
-          <a:lstStyle/>
-          <a:p>
-            <a:r>
-              <a:rPr lang="en-GB" sz="1800" dirty="0">
-                <a:latin typeface="Quattrocento Sans" panose="020B0502050000020003" pitchFamily="34" charset="0"/>
-              </a:rPr>
-              <a:t>Reweighted graph</a:t>
-            </a:r>
-            <a:endParaRPr lang="en-SE" sz="1800" dirty="0"/>
-          </a:p>
-        </p:txBody>
-      </p:sp>
-      <p:sp>
-        <p:nvSpPr>
-          <p:cNvPr id="63" name="Oval 5">
-            <a:extLst>
-              <a:ext uri="{FF2B5EF4-FFF2-40B4-BE49-F238E27FC236}">
-                <a16:creationId xmlns:a16="http://schemas.microsoft.com/office/drawing/2014/main" id="{D1A2DAEF-512A-B6C3-6A15-29C350E4AA64}"/>
-              </a:ext>
-            </a:extLst>
-          </p:cNvPr>
-          <p:cNvSpPr>
-            <a:spLocks noChangeArrowheads="1"/>
-          </p:cNvSpPr>
-          <p:nvPr/>
-        </p:nvSpPr>
-        <p:spPr bwMode="auto">
-          <a:xfrm>
-            <a:off x="185529" y="4082625"/>
-            <a:ext cx="533400" cy="533400"/>
-          </a:xfrm>
-          <a:prstGeom prst="ellipse">
-            <a:avLst/>
-          </a:prstGeom>
-          <a:solidFill>
-            <a:schemeClr val="bg1"/>
-          </a:solidFill>
-          <a:ln w="9525">
-            <a:solidFill>
-              <a:schemeClr val="tx1"/>
-            </a:solidFill>
-            <a:round/>
-            <a:headEnd/>
-            <a:tailEnd/>
-          </a:ln>
-          <a:effectLst/>
-          <a:extLst>
-            <a:ext uri="{AF507438-7753-43E0-B8FC-AC1667EBCBE1}">
-              <a14:hiddenEffects xmlns:a14="http://schemas.microsoft.com/office/drawing/2010/main">
-                <a:effectLst>
-                  <a:outerShdw dist="35921" dir="2700000" algn="ctr" rotWithShape="0">
-                    <a:schemeClr val="bg2"/>
-                  </a:outerShdw>
-                </a:effectLst>
-              </a14:hiddenEffects>
-            </a:ext>
-          </a:extLst>
-        </p:spPr>
-        <p:txBody>
-          <a:bodyPr wrap="none" anchor="ctr"/>
-          <a:lstStyle/>
-          <a:p>
-            <a:pPr fontAlgn="base">
-              <a:spcBef>
-                <a:spcPct val="0"/>
-              </a:spcBef>
-              <a:spcAft>
-                <a:spcPct val="0"/>
-              </a:spcAft>
-              <a:buClrTx/>
-              <a:defRPr/>
-            </a:pPr>
-            <a:r>
-              <a:rPr lang="en-GB" sz="2400" dirty="0">
-                <a:latin typeface="Arial" panose="020B0604020202020204" pitchFamily="34" charset="0"/>
-              </a:rPr>
-              <a:t>1</a:t>
-            </a:r>
-            <a:endParaRPr lang="en-SE" sz="2400" dirty="0">
-              <a:latin typeface="Arial" panose="020B0604020202020204" pitchFamily="34" charset="0"/>
-            </a:endParaRPr>
-          </a:p>
-        </p:txBody>
-      </p:sp>
-      <p:sp>
-        <p:nvSpPr>
-          <p:cNvPr id="64" name="Oval 8">
-            <a:extLst>
-              <a:ext uri="{FF2B5EF4-FFF2-40B4-BE49-F238E27FC236}">
-                <a16:creationId xmlns:a16="http://schemas.microsoft.com/office/drawing/2014/main" id="{9ACE2CF2-F3C2-98BD-4065-C12176242666}"/>
-              </a:ext>
-            </a:extLst>
-          </p:cNvPr>
-          <p:cNvSpPr>
-            <a:spLocks noChangeArrowheads="1"/>
-          </p:cNvSpPr>
-          <p:nvPr/>
-        </p:nvSpPr>
-        <p:spPr bwMode="auto">
-          <a:xfrm>
-            <a:off x="1607824" y="4082625"/>
-            <a:ext cx="533400" cy="533400"/>
-          </a:xfrm>
-          <a:prstGeom prst="ellipse">
-            <a:avLst/>
-          </a:prstGeom>
-          <a:solidFill>
-            <a:schemeClr val="bg1"/>
-          </a:solidFill>
-          <a:ln w="9525">
-            <a:solidFill>
-              <a:schemeClr val="tx1"/>
-            </a:solidFill>
-            <a:round/>
-            <a:headEnd/>
-            <a:tailEnd/>
-          </a:ln>
-          <a:effectLst/>
-          <a:extLst>
-            <a:ext uri="{AF507438-7753-43E0-B8FC-AC1667EBCBE1}">
-              <a14:hiddenEffects xmlns:a14="http://schemas.microsoft.com/office/drawing/2010/main">
-                <a:effectLst>
-                  <a:outerShdw dist="35921" dir="2700000" algn="ctr" rotWithShape="0">
-                    <a:schemeClr val="bg2"/>
-                  </a:outerShdw>
-                </a:effectLst>
-              </a14:hiddenEffects>
-            </a:ext>
-          </a:extLst>
-        </p:spPr>
-        <p:txBody>
-          <a:bodyPr wrap="none" anchor="ctr"/>
-          <a:lstStyle/>
-          <a:p>
-            <a:pPr fontAlgn="base">
-              <a:spcBef>
-                <a:spcPct val="0"/>
-              </a:spcBef>
-              <a:spcAft>
-                <a:spcPct val="0"/>
-              </a:spcAft>
-              <a:buClrTx/>
-              <a:defRPr/>
-            </a:pPr>
-            <a:r>
-              <a:rPr lang="en-GB" sz="2400" dirty="0">
-                <a:latin typeface="Arial" panose="020B0604020202020204" pitchFamily="34" charset="0"/>
-              </a:rPr>
-              <a:t>2</a:t>
-            </a:r>
-            <a:endParaRPr lang="en-SE" sz="2400" dirty="0">
-              <a:latin typeface="Arial" panose="020B0604020202020204" pitchFamily="34" charset="0"/>
-            </a:endParaRPr>
-          </a:p>
-        </p:txBody>
-      </p:sp>
-      <p:sp>
-        <p:nvSpPr>
-          <p:cNvPr id="65" name="Oval 11">
-            <a:extLst>
-              <a:ext uri="{FF2B5EF4-FFF2-40B4-BE49-F238E27FC236}">
-                <a16:creationId xmlns:a16="http://schemas.microsoft.com/office/drawing/2014/main" id="{06A2AAE6-4E60-F0BA-5584-858BB2458B5A}"/>
-              </a:ext>
-            </a:extLst>
-          </p:cNvPr>
-          <p:cNvSpPr>
-            <a:spLocks noChangeArrowheads="1"/>
-          </p:cNvSpPr>
-          <p:nvPr/>
-        </p:nvSpPr>
-        <p:spPr bwMode="auto">
-          <a:xfrm>
-            <a:off x="185529" y="5270083"/>
-            <a:ext cx="533400" cy="533400"/>
-          </a:xfrm>
-          <a:prstGeom prst="ellipse">
-            <a:avLst/>
-          </a:prstGeom>
-          <a:solidFill>
-            <a:schemeClr val="bg1"/>
-          </a:solidFill>
-          <a:ln w="9525">
-            <a:solidFill>
-              <a:schemeClr val="tx1"/>
-            </a:solidFill>
-            <a:round/>
-            <a:headEnd/>
-            <a:tailEnd/>
-          </a:ln>
-          <a:effectLst/>
-          <a:extLst>
-            <a:ext uri="{AF507438-7753-43E0-B8FC-AC1667EBCBE1}">
-              <a14:hiddenEffects xmlns:a14="http://schemas.microsoft.com/office/drawing/2010/main">
-                <a:effectLst>
-                  <a:outerShdw dist="35921" dir="2700000" algn="ctr" rotWithShape="0">
-                    <a:schemeClr val="bg2"/>
-                  </a:outerShdw>
-                </a:effectLst>
-              </a14:hiddenEffects>
-            </a:ext>
-          </a:extLst>
-        </p:spPr>
-        <p:txBody>
-          <a:bodyPr wrap="none" anchor="ctr"/>
-          <a:lstStyle/>
-          <a:p>
-            <a:pPr fontAlgn="base">
-              <a:spcBef>
-                <a:spcPct val="0"/>
-              </a:spcBef>
-              <a:spcAft>
-                <a:spcPct val="0"/>
-              </a:spcAft>
-              <a:buClrTx/>
-              <a:defRPr/>
-            </a:pPr>
-            <a:r>
-              <a:rPr lang="en-GB" sz="2400" dirty="0">
-                <a:latin typeface="Arial" panose="020B0604020202020204" pitchFamily="34" charset="0"/>
-              </a:rPr>
-              <a:t>3</a:t>
-            </a:r>
-            <a:endParaRPr lang="en-SE" sz="2400" dirty="0">
-              <a:latin typeface="Arial" panose="020B0604020202020204" pitchFamily="34" charset="0"/>
-            </a:endParaRPr>
-          </a:p>
-        </p:txBody>
-      </p:sp>
-      <p:sp>
-        <p:nvSpPr>
-          <p:cNvPr id="66" name="Line 19">
-            <a:extLst>
-              <a:ext uri="{FF2B5EF4-FFF2-40B4-BE49-F238E27FC236}">
-                <a16:creationId xmlns:a16="http://schemas.microsoft.com/office/drawing/2014/main" id="{4F80CD8A-F785-F3EC-D99B-94268A887210}"/>
-              </a:ext>
-            </a:extLst>
-          </p:cNvPr>
-          <p:cNvSpPr>
-            <a:spLocks noChangeShapeType="1"/>
-          </p:cNvSpPr>
-          <p:nvPr/>
-        </p:nvSpPr>
-        <p:spPr bwMode="auto">
-          <a:xfrm flipV="1">
-            <a:off x="718929" y="4363140"/>
-            <a:ext cx="904134" cy="1"/>
-          </a:xfrm>
-          <a:prstGeom prst="line">
-            <a:avLst/>
-          </a:prstGeom>
-          <a:ln w="19050" cap="flat" cmpd="sng" algn="ctr">
-            <a:solidFill>
-              <a:schemeClr val="dk1"/>
-            </a:solidFill>
-            <a:prstDash val="solid"/>
-            <a:round/>
-            <a:headEnd type="none" w="med" len="med"/>
-            <a:tailEnd type="arrow" w="med" len="med"/>
-          </a:ln>
-        </p:spPr>
-        <p:style>
-          <a:lnRef idx="0">
-            <a:scrgbClr r="0" g="0" b="0"/>
-          </a:lnRef>
-          <a:fillRef idx="0">
-            <a:scrgbClr r="0" g="0" b="0"/>
-          </a:fillRef>
-          <a:effectRef idx="0">
-            <a:scrgbClr r="0" g="0" b="0"/>
-          </a:effectRef>
-          <a:fontRef idx="minor">
-            <a:schemeClr val="tx1"/>
-          </a:fontRef>
-        </p:style>
-        <p:txBody>
-          <a:bodyPr/>
-          <a:lstStyle/>
-          <a:p>
-            <a:pPr fontAlgn="base">
-              <a:spcBef>
-                <a:spcPct val="0"/>
-              </a:spcBef>
-              <a:spcAft>
-                <a:spcPct val="0"/>
-              </a:spcAft>
-              <a:buClrTx/>
-              <a:defRPr/>
-            </a:pPr>
-            <a:endParaRPr lang="en-SE" sz="1800" dirty="0">
-              <a:solidFill>
-                <a:srgbClr val="000000"/>
-              </a:solidFill>
-              <a:latin typeface="Arial" panose="020B0604020202020204" pitchFamily="34" charset="0"/>
-            </a:endParaRPr>
-          </a:p>
-        </p:txBody>
-      </p:sp>
-      <p:sp>
-        <p:nvSpPr>
-          <p:cNvPr id="67" name="Line 20">
-            <a:extLst>
-              <a:ext uri="{FF2B5EF4-FFF2-40B4-BE49-F238E27FC236}">
-                <a16:creationId xmlns:a16="http://schemas.microsoft.com/office/drawing/2014/main" id="{F3A8BD28-B20E-72BD-A202-29CE687F4B7F}"/>
-              </a:ext>
-            </a:extLst>
-          </p:cNvPr>
-          <p:cNvSpPr>
-            <a:spLocks noChangeShapeType="1"/>
-          </p:cNvSpPr>
-          <p:nvPr/>
-        </p:nvSpPr>
-        <p:spPr bwMode="auto">
-          <a:xfrm>
-            <a:off x="469172" y="4609861"/>
-            <a:ext cx="15586" cy="660221"/>
-          </a:xfrm>
-          <a:prstGeom prst="line">
-            <a:avLst/>
-          </a:prstGeom>
-          <a:ln w="19050" cap="flat" cmpd="sng" algn="ctr">
-            <a:solidFill>
-              <a:schemeClr val="dk1"/>
-            </a:solidFill>
-            <a:prstDash val="solid"/>
-            <a:round/>
-            <a:headEnd type="none" w="med" len="med"/>
-            <a:tailEnd type="arrow" w="med" len="med"/>
-          </a:ln>
-        </p:spPr>
-        <p:style>
-          <a:lnRef idx="0">
-            <a:scrgbClr r="0" g="0" b="0"/>
-          </a:lnRef>
-          <a:fillRef idx="0">
-            <a:scrgbClr r="0" g="0" b="0"/>
-          </a:fillRef>
-          <a:effectRef idx="0">
-            <a:scrgbClr r="0" g="0" b="0"/>
-          </a:effectRef>
-          <a:fontRef idx="minor">
-            <a:schemeClr val="tx1"/>
-          </a:fontRef>
-        </p:style>
-        <p:txBody>
-          <a:bodyPr/>
-          <a:lstStyle/>
-          <a:p>
-            <a:pPr fontAlgn="base">
-              <a:spcBef>
-                <a:spcPct val="0"/>
-              </a:spcBef>
-              <a:spcAft>
-                <a:spcPct val="0"/>
-              </a:spcAft>
-            </a:pPr>
-            <a:endParaRPr lang="en-SE">
-              <a:solidFill>
-                <a:srgbClr val="000000"/>
-              </a:solidFill>
-              <a:latin typeface="Arial" panose="020B0604020202020204" pitchFamily="34" charset="0"/>
-            </a:endParaRPr>
-          </a:p>
-        </p:txBody>
-      </p:sp>
-      <p:sp>
-        <p:nvSpPr>
-          <p:cNvPr id="68" name="Text Box 28">
-            <a:extLst>
-              <a:ext uri="{FF2B5EF4-FFF2-40B4-BE49-F238E27FC236}">
-                <a16:creationId xmlns:a16="http://schemas.microsoft.com/office/drawing/2014/main" id="{E6EF2D24-FDA7-6508-DE12-E3733B9F826B}"/>
-              </a:ext>
-            </a:extLst>
-          </p:cNvPr>
-          <p:cNvSpPr txBox="1">
-            <a:spLocks noChangeArrowheads="1"/>
-          </p:cNvSpPr>
-          <p:nvPr/>
-        </p:nvSpPr>
-        <p:spPr bwMode="auto">
-          <a:xfrm>
-            <a:off x="955884" y="4038087"/>
-            <a:ext cx="514349" cy="369332"/>
-          </a:xfrm>
-          <a:prstGeom prst="rect">
-            <a:avLst/>
-          </a:prstGeom>
-          <a:noFill/>
-          <a:ln>
-            <a:noFill/>
-          </a:ln>
-          <a:effectLst/>
-          <a:extLst>
-            <a:ext uri="{909E8E84-426E-40DD-AFC4-6F175D3DCCD1}">
-              <a14:hiddenFill xmlns:a14="http://schemas.microsoft.com/office/drawing/2010/main">
-                <a:solidFill>
-                  <a:schemeClr val="accent1"/>
-                </a:solidFill>
-              </a14:hiddenFill>
-            </a:ext>
-            <a:ext uri="{91240B29-F687-4F45-9708-019B960494DF}">
-              <a14:hiddenLine xmlns:a14="http://schemas.microsoft.com/office/drawing/2010/main" w="9525">
-                <a:solidFill>
-                  <a:schemeClr val="tx1"/>
-                </a:solidFill>
-                <a:miter lim="800000"/>
-                <a:headEnd/>
-                <a:tailEnd/>
-              </a14:hiddenLine>
-            </a:ext>
-            <a:ext uri="{AF507438-7753-43E0-B8FC-AC1667EBCBE1}">
-              <a14:hiddenEffects xmlns:a14="http://schemas.microsoft.com/office/drawing/2010/main">
-                <a:effectLst>
-                  <a:outerShdw dist="35921" dir="2700000" algn="ctr" rotWithShape="0">
-                    <a:schemeClr val="bg2"/>
-                  </a:outerShdw>
-                </a:effectLst>
-              </a14:hiddenEffects>
-            </a:ext>
-          </a:extLst>
-        </p:spPr>
-        <p:txBody>
-          <a:bodyPr wrap="square">
-            <a:spAutoFit/>
-          </a:bodyPr>
-          <a:lstStyle/>
-          <a:p>
-            <a:pPr fontAlgn="base">
-              <a:spcBef>
-                <a:spcPct val="50000"/>
-              </a:spcBef>
-              <a:spcAft>
-                <a:spcPct val="0"/>
-              </a:spcAft>
-            </a:pPr>
-            <a:r>
-              <a:rPr lang="en-US" altLang="en-SE" sz="1800" dirty="0">
-                <a:latin typeface="Arial" panose="020B0604020202020204" pitchFamily="34" charset="0"/>
-              </a:rPr>
-              <a:t>-2</a:t>
-            </a:r>
-          </a:p>
-        </p:txBody>
-      </p:sp>
-      <p:sp>
-        <p:nvSpPr>
-          <p:cNvPr id="69" name="Oval 8">
-            <a:extLst>
-              <a:ext uri="{FF2B5EF4-FFF2-40B4-BE49-F238E27FC236}">
-                <a16:creationId xmlns:a16="http://schemas.microsoft.com/office/drawing/2014/main" id="{F2D0D135-CC56-CCF4-B137-AE4FF12BACEC}"/>
-              </a:ext>
-            </a:extLst>
-          </p:cNvPr>
-          <p:cNvSpPr>
-            <a:spLocks noChangeArrowheads="1"/>
-          </p:cNvSpPr>
-          <p:nvPr/>
-        </p:nvSpPr>
-        <p:spPr bwMode="auto">
-          <a:xfrm>
-            <a:off x="1618215" y="5270083"/>
-            <a:ext cx="533400" cy="533400"/>
-          </a:xfrm>
-          <a:prstGeom prst="ellipse">
-            <a:avLst/>
-          </a:prstGeom>
-          <a:solidFill>
-            <a:schemeClr val="bg1"/>
-          </a:solidFill>
-          <a:ln w="9525">
-            <a:solidFill>
-              <a:schemeClr val="tx1"/>
-            </a:solidFill>
-            <a:round/>
-            <a:headEnd/>
-            <a:tailEnd/>
-          </a:ln>
-          <a:effectLst/>
-          <a:extLst>
-            <a:ext uri="{AF507438-7753-43E0-B8FC-AC1667EBCBE1}">
-              <a14:hiddenEffects xmlns:a14="http://schemas.microsoft.com/office/drawing/2010/main">
-                <a:effectLst>
-                  <a:outerShdw dist="35921" dir="2700000" algn="ctr" rotWithShape="0">
-                    <a:schemeClr val="bg2"/>
-                  </a:outerShdw>
-                </a:effectLst>
-              </a14:hiddenEffects>
-            </a:ext>
-          </a:extLst>
-        </p:spPr>
-        <p:txBody>
-          <a:bodyPr wrap="none" anchor="ctr"/>
-          <a:lstStyle/>
-          <a:p>
-            <a:pPr fontAlgn="base">
-              <a:spcBef>
-                <a:spcPct val="0"/>
-              </a:spcBef>
-              <a:spcAft>
-                <a:spcPct val="0"/>
-              </a:spcAft>
-              <a:buClrTx/>
-              <a:defRPr/>
-            </a:pPr>
-            <a:r>
-              <a:rPr lang="en-GB" sz="2400" dirty="0">
-                <a:latin typeface="Arial" panose="020B0604020202020204" pitchFamily="34" charset="0"/>
-              </a:rPr>
-              <a:t>4</a:t>
-            </a:r>
-            <a:endParaRPr lang="en-SE" sz="2400" dirty="0">
-              <a:latin typeface="Arial" panose="020B0604020202020204" pitchFamily="34" charset="0"/>
-            </a:endParaRPr>
-          </a:p>
-        </p:txBody>
-      </p:sp>
-      <p:sp>
-        <p:nvSpPr>
-          <p:cNvPr id="70" name="Line 19">
-            <a:extLst>
-              <a:ext uri="{FF2B5EF4-FFF2-40B4-BE49-F238E27FC236}">
-                <a16:creationId xmlns:a16="http://schemas.microsoft.com/office/drawing/2014/main" id="{96737AF5-D8D3-2762-A29C-D067034260CE}"/>
-              </a:ext>
-            </a:extLst>
-          </p:cNvPr>
-          <p:cNvSpPr>
-            <a:spLocks noChangeShapeType="1"/>
-          </p:cNvSpPr>
-          <p:nvPr/>
-        </p:nvSpPr>
-        <p:spPr bwMode="auto">
-          <a:xfrm flipV="1">
-            <a:off x="663148" y="4488736"/>
-            <a:ext cx="1009411" cy="868913"/>
-          </a:xfrm>
-          <a:prstGeom prst="line">
-            <a:avLst/>
-          </a:prstGeom>
-          <a:ln w="19050" cap="flat" cmpd="sng" algn="ctr">
-            <a:solidFill>
-              <a:schemeClr val="dk1"/>
-            </a:solidFill>
-            <a:prstDash val="solid"/>
-            <a:round/>
-            <a:headEnd type="none" w="med" len="med"/>
-            <a:tailEnd type="arrow" w="med" len="med"/>
-          </a:ln>
-        </p:spPr>
-        <p:style>
-          <a:lnRef idx="0">
-            <a:scrgbClr r="0" g="0" b="0"/>
-          </a:lnRef>
-          <a:fillRef idx="0">
-            <a:scrgbClr r="0" g="0" b="0"/>
-          </a:fillRef>
-          <a:effectRef idx="0">
-            <a:scrgbClr r="0" g="0" b="0"/>
-          </a:effectRef>
-          <a:fontRef idx="minor">
-            <a:schemeClr val="tx1"/>
-          </a:fontRef>
-        </p:style>
-        <p:txBody>
-          <a:bodyPr/>
-          <a:lstStyle/>
-          <a:p>
-            <a:pPr fontAlgn="base">
-              <a:spcBef>
-                <a:spcPct val="0"/>
-              </a:spcBef>
-              <a:spcAft>
-                <a:spcPct val="0"/>
-              </a:spcAft>
-              <a:buClrTx/>
-              <a:defRPr/>
-            </a:pPr>
-            <a:endParaRPr lang="en-SE" sz="1800" dirty="0">
-              <a:solidFill>
-                <a:srgbClr val="000000"/>
-              </a:solidFill>
-              <a:latin typeface="Arial" panose="020B0604020202020204" pitchFamily="34" charset="0"/>
-            </a:endParaRPr>
-          </a:p>
-        </p:txBody>
-      </p:sp>
-      <p:sp>
-        <p:nvSpPr>
-          <p:cNvPr id="71" name="Line 19">
-            <a:extLst>
-              <a:ext uri="{FF2B5EF4-FFF2-40B4-BE49-F238E27FC236}">
-                <a16:creationId xmlns:a16="http://schemas.microsoft.com/office/drawing/2014/main" id="{412D8527-70C1-F799-F73D-2609F5005406}"/>
-              </a:ext>
-            </a:extLst>
-          </p:cNvPr>
-          <p:cNvSpPr>
-            <a:spLocks noChangeShapeType="1"/>
-          </p:cNvSpPr>
-          <p:nvPr/>
-        </p:nvSpPr>
-        <p:spPr bwMode="auto">
-          <a:xfrm flipV="1">
-            <a:off x="718929" y="5550698"/>
-            <a:ext cx="904134" cy="1"/>
-          </a:xfrm>
-          <a:prstGeom prst="line">
-            <a:avLst/>
-          </a:prstGeom>
-          <a:ln w="19050" cap="flat" cmpd="sng" algn="ctr">
-            <a:solidFill>
-              <a:schemeClr val="dk1"/>
-            </a:solidFill>
-            <a:prstDash val="solid"/>
-            <a:round/>
-            <a:headEnd type="none" w="med" len="med"/>
-            <a:tailEnd type="arrow" w="med" len="med"/>
-          </a:ln>
-        </p:spPr>
-        <p:style>
-          <a:lnRef idx="0">
-            <a:scrgbClr r="0" g="0" b="0"/>
-          </a:lnRef>
-          <a:fillRef idx="0">
-            <a:scrgbClr r="0" g="0" b="0"/>
-          </a:fillRef>
-          <a:effectRef idx="0">
-            <a:scrgbClr r="0" g="0" b="0"/>
-          </a:effectRef>
-          <a:fontRef idx="minor">
-            <a:schemeClr val="tx1"/>
-          </a:fontRef>
-        </p:style>
-        <p:txBody>
-          <a:bodyPr/>
-          <a:lstStyle/>
-          <a:p>
-            <a:pPr fontAlgn="base">
-              <a:spcBef>
-                <a:spcPct val="0"/>
-              </a:spcBef>
-              <a:spcAft>
-                <a:spcPct val="0"/>
-              </a:spcAft>
-              <a:buClrTx/>
-              <a:defRPr/>
-            </a:pPr>
-            <a:endParaRPr lang="en-SE" sz="1800" dirty="0">
-              <a:solidFill>
-                <a:srgbClr val="000000"/>
-              </a:solidFill>
-              <a:latin typeface="Arial" panose="020B0604020202020204" pitchFamily="34" charset="0"/>
-            </a:endParaRPr>
-          </a:p>
-        </p:txBody>
-      </p:sp>
-      <p:sp>
-        <p:nvSpPr>
-          <p:cNvPr id="72" name="Text Box 28">
-            <a:extLst>
-              <a:ext uri="{FF2B5EF4-FFF2-40B4-BE49-F238E27FC236}">
-                <a16:creationId xmlns:a16="http://schemas.microsoft.com/office/drawing/2014/main" id="{DD11CE7F-D240-C611-1049-614FCDC75716}"/>
-              </a:ext>
-            </a:extLst>
-          </p:cNvPr>
-          <p:cNvSpPr txBox="1">
-            <a:spLocks noChangeArrowheads="1"/>
-          </p:cNvSpPr>
-          <p:nvPr/>
-        </p:nvSpPr>
-        <p:spPr bwMode="auto">
-          <a:xfrm>
-            <a:off x="971095" y="5529419"/>
-            <a:ext cx="399803" cy="369332"/>
-          </a:xfrm>
-          <a:prstGeom prst="rect">
-            <a:avLst/>
-          </a:prstGeom>
-          <a:noFill/>
-          <a:ln>
-            <a:noFill/>
-          </a:ln>
-          <a:effectLst/>
-          <a:extLst>
-            <a:ext uri="{909E8E84-426E-40DD-AFC4-6F175D3DCCD1}">
-              <a14:hiddenFill xmlns:a14="http://schemas.microsoft.com/office/drawing/2010/main">
-                <a:solidFill>
-                  <a:schemeClr val="accent1"/>
-                </a:solidFill>
-              </a14:hiddenFill>
-            </a:ext>
-            <a:ext uri="{91240B29-F687-4F45-9708-019B960494DF}">
-              <a14:hiddenLine xmlns:a14="http://schemas.microsoft.com/office/drawing/2010/main" w="9525">
-                <a:solidFill>
-                  <a:schemeClr val="tx1"/>
-                </a:solidFill>
-                <a:miter lim="800000"/>
-                <a:headEnd/>
-                <a:tailEnd/>
-              </a14:hiddenLine>
-            </a:ext>
-            <a:ext uri="{AF507438-7753-43E0-B8FC-AC1667EBCBE1}">
-              <a14:hiddenEffects xmlns:a14="http://schemas.microsoft.com/office/drawing/2010/main">
-                <a:effectLst>
-                  <a:outerShdw dist="35921" dir="2700000" algn="ctr" rotWithShape="0">
-                    <a:schemeClr val="bg2"/>
-                  </a:outerShdw>
-                </a:effectLst>
-              </a14:hiddenEffects>
-            </a:ext>
-          </a:extLst>
-        </p:spPr>
-        <p:txBody>
-          <a:bodyPr wrap="square">
-            <a:spAutoFit/>
-          </a:bodyPr>
-          <a:lstStyle/>
-          <a:p>
-            <a:pPr fontAlgn="base">
-              <a:spcBef>
-                <a:spcPct val="50000"/>
-              </a:spcBef>
-              <a:spcAft>
-                <a:spcPct val="0"/>
-              </a:spcAft>
-            </a:pPr>
-            <a:r>
-              <a:rPr lang="en-US" altLang="en-SE" sz="1800" dirty="0">
-                <a:latin typeface="Arial" panose="020B0604020202020204" pitchFamily="34" charset="0"/>
-              </a:rPr>
-              <a:t>-1</a:t>
-            </a:r>
-          </a:p>
-        </p:txBody>
-      </p:sp>
-      <p:sp>
-        <p:nvSpPr>
-          <p:cNvPr id="73" name="Text Box 28">
-            <a:extLst>
-              <a:ext uri="{FF2B5EF4-FFF2-40B4-BE49-F238E27FC236}">
-                <a16:creationId xmlns:a16="http://schemas.microsoft.com/office/drawing/2014/main" id="{CFBBB7BD-65BE-4DEB-0D41-55B1E6D7A9C4}"/>
-              </a:ext>
-            </a:extLst>
-          </p:cNvPr>
-          <p:cNvSpPr txBox="1">
-            <a:spLocks noChangeArrowheads="1"/>
-          </p:cNvSpPr>
-          <p:nvPr/>
-        </p:nvSpPr>
-        <p:spPr bwMode="auto">
-          <a:xfrm>
-            <a:off x="884606" y="4708815"/>
-            <a:ext cx="399803" cy="369332"/>
-          </a:xfrm>
-          <a:prstGeom prst="rect">
-            <a:avLst/>
-          </a:prstGeom>
-          <a:noFill/>
-          <a:ln>
-            <a:noFill/>
-          </a:ln>
-          <a:effectLst/>
-          <a:extLst>
-            <a:ext uri="{909E8E84-426E-40DD-AFC4-6F175D3DCCD1}">
-              <a14:hiddenFill xmlns:a14="http://schemas.microsoft.com/office/drawing/2010/main">
-                <a:solidFill>
-                  <a:schemeClr val="accent1"/>
-                </a:solidFill>
-              </a14:hiddenFill>
-            </a:ext>
-            <a:ext uri="{91240B29-F687-4F45-9708-019B960494DF}">
-              <a14:hiddenLine xmlns:a14="http://schemas.microsoft.com/office/drawing/2010/main" w="9525">
-                <a:solidFill>
-                  <a:schemeClr val="tx1"/>
-                </a:solidFill>
-                <a:miter lim="800000"/>
-                <a:headEnd/>
-                <a:tailEnd/>
-              </a14:hiddenLine>
-            </a:ext>
-            <a:ext uri="{AF507438-7753-43E0-B8FC-AC1667EBCBE1}">
-              <a14:hiddenEffects xmlns:a14="http://schemas.microsoft.com/office/drawing/2010/main">
-                <a:effectLst>
-                  <a:outerShdw dist="35921" dir="2700000" algn="ctr" rotWithShape="0">
-                    <a:schemeClr val="bg2"/>
-                  </a:outerShdw>
-                </a:effectLst>
-              </a14:hiddenEffects>
-            </a:ext>
-          </a:extLst>
-        </p:spPr>
-        <p:txBody>
-          <a:bodyPr wrap="square">
-            <a:spAutoFit/>
-          </a:bodyPr>
-          <a:lstStyle/>
-          <a:p>
-            <a:pPr fontAlgn="base">
-              <a:spcBef>
-                <a:spcPct val="50000"/>
-              </a:spcBef>
-              <a:spcAft>
-                <a:spcPct val="0"/>
-              </a:spcAft>
-            </a:pPr>
-            <a:r>
-              <a:rPr lang="en-US" altLang="en-SE" sz="1800" dirty="0">
-                <a:latin typeface="Arial" panose="020B0604020202020204" pitchFamily="34" charset="0"/>
-              </a:rPr>
-              <a:t>1</a:t>
-            </a:r>
-          </a:p>
-        </p:txBody>
-      </p:sp>
-      <p:sp>
-        <p:nvSpPr>
-          <p:cNvPr id="74" name="Text Box 28">
-            <a:extLst>
-              <a:ext uri="{FF2B5EF4-FFF2-40B4-BE49-F238E27FC236}">
-                <a16:creationId xmlns:a16="http://schemas.microsoft.com/office/drawing/2014/main" id="{819899ED-FE25-05DB-C8CE-983E83450DD7}"/>
-              </a:ext>
-            </a:extLst>
-          </p:cNvPr>
-          <p:cNvSpPr txBox="1">
-            <a:spLocks noChangeArrowheads="1"/>
-          </p:cNvSpPr>
-          <p:nvPr/>
-        </p:nvSpPr>
-        <p:spPr bwMode="auto">
-          <a:xfrm>
-            <a:off x="172112" y="4708815"/>
-            <a:ext cx="399803" cy="369332"/>
-          </a:xfrm>
-          <a:prstGeom prst="rect">
-            <a:avLst/>
-          </a:prstGeom>
-          <a:noFill/>
-          <a:ln>
-            <a:noFill/>
-          </a:ln>
-          <a:effectLst/>
-          <a:extLst>
-            <a:ext uri="{909E8E84-426E-40DD-AFC4-6F175D3DCCD1}">
-              <a14:hiddenFill xmlns:a14="http://schemas.microsoft.com/office/drawing/2010/main">
-                <a:solidFill>
-                  <a:schemeClr val="accent1"/>
-                </a:solidFill>
-              </a14:hiddenFill>
-            </a:ext>
-            <a:ext uri="{91240B29-F687-4F45-9708-019B960494DF}">
-              <a14:hiddenLine xmlns:a14="http://schemas.microsoft.com/office/drawing/2010/main" w="9525">
-                <a:solidFill>
-                  <a:schemeClr val="tx1"/>
-                </a:solidFill>
-                <a:miter lim="800000"/>
-                <a:headEnd/>
-                <a:tailEnd/>
-              </a14:hiddenLine>
-            </a:ext>
-            <a:ext uri="{AF507438-7753-43E0-B8FC-AC1667EBCBE1}">
-              <a14:hiddenEffects xmlns:a14="http://schemas.microsoft.com/office/drawing/2010/main">
-                <a:effectLst>
-                  <a:outerShdw dist="35921" dir="2700000" algn="ctr" rotWithShape="0">
-                    <a:schemeClr val="bg2"/>
-                  </a:outerShdw>
-                </a:effectLst>
-              </a14:hiddenEffects>
-            </a:ext>
-          </a:extLst>
-        </p:spPr>
-        <p:txBody>
-          <a:bodyPr wrap="square">
-            <a:spAutoFit/>
-          </a:bodyPr>
-          <a:lstStyle/>
-          <a:p>
-            <a:pPr fontAlgn="base">
-              <a:spcBef>
-                <a:spcPct val="50000"/>
-              </a:spcBef>
-              <a:spcAft>
-                <a:spcPct val="0"/>
-              </a:spcAft>
-            </a:pPr>
-            <a:r>
-              <a:rPr lang="en-US" altLang="en-SE" sz="1800" dirty="0">
-                <a:latin typeface="Arial" panose="020B0604020202020204" pitchFamily="34" charset="0"/>
-              </a:rPr>
-              <a:t>1</a:t>
-            </a:r>
-          </a:p>
-        </p:txBody>
-      </p:sp>
-      <p:sp>
-        <p:nvSpPr>
-          <p:cNvPr id="75" name="TextBox 74">
-            <a:extLst>
-              <a:ext uri="{FF2B5EF4-FFF2-40B4-BE49-F238E27FC236}">
-                <a16:creationId xmlns:a16="http://schemas.microsoft.com/office/drawing/2014/main" id="{ECDB4851-0CA3-BCED-8A25-7B06BB4E34C6}"/>
-              </a:ext>
-            </a:extLst>
-          </p:cNvPr>
-          <p:cNvSpPr txBox="1"/>
-          <p:nvPr/>
-        </p:nvSpPr>
-        <p:spPr>
-          <a:xfrm>
-            <a:off x="355216" y="5937717"/>
-            <a:ext cx="1704266" cy="369326"/>
-          </a:xfrm>
-          <a:prstGeom prst="rect">
-            <a:avLst/>
-          </a:prstGeom>
-          <a:noFill/>
-        </p:spPr>
-        <p:txBody>
-          <a:bodyPr wrap="square">
-            <a:spAutoFit/>
-          </a:bodyPr>
-          <a:lstStyle/>
-          <a:p>
-            <a:r>
-              <a:rPr lang="en-GB" sz="1800" dirty="0">
-                <a:latin typeface="Quattrocento Sans" panose="020B0502050000020003" pitchFamily="34" charset="0"/>
-              </a:rPr>
-              <a:t>Original graph</a:t>
-            </a:r>
-            <a:endParaRPr lang="en-SE" sz="1800" dirty="0"/>
-          </a:p>
-        </p:txBody>
-      </p:sp>
-      <p:graphicFrame>
-        <p:nvGraphicFramePr>
-          <p:cNvPr id="4" name="Table 3">
-            <a:extLst>
-              <a:ext uri="{FF2B5EF4-FFF2-40B4-BE49-F238E27FC236}">
-                <a16:creationId xmlns:a16="http://schemas.microsoft.com/office/drawing/2014/main" id="{041FBDB7-5904-F755-3F62-A6DD15AD0827}"/>
-              </a:ext>
-            </a:extLst>
-          </p:cNvPr>
-          <p:cNvGraphicFramePr>
-            <a:graphicFrameLocks noGrp="1"/>
-          </p:cNvGraphicFramePr>
-          <p:nvPr>
-            <p:extLst>
-              <p:ext uri="{D42A27DB-BD31-4B8C-83A1-F6EECF244321}">
-                <p14:modId xmlns:p14="http://schemas.microsoft.com/office/powerpoint/2010/main" val="247291733"/>
-              </p:ext>
-            </p:extLst>
-          </p:nvPr>
-        </p:nvGraphicFramePr>
-        <p:xfrm>
-          <a:off x="4627837" y="3925167"/>
-          <a:ext cx="1387630" cy="1854200"/>
-        </p:xfrm>
-        <a:graphic>
-          <a:graphicData uri="http://schemas.openxmlformats.org/drawingml/2006/table">
-            <a:tbl>
-              <a:tblPr firstRow="1" bandRow="1">
-                <a:tableStyleId>{5940675A-B579-460E-94D1-54222C63F5DA}</a:tableStyleId>
-              </a:tblPr>
-              <a:tblGrid>
-                <a:gridCol w="693815">
-                  <a:extLst>
-                    <a:ext uri="{9D8B030D-6E8A-4147-A177-3AD203B41FA5}">
-                      <a16:colId xmlns:a16="http://schemas.microsoft.com/office/drawing/2014/main" val="3113293538"/>
-                    </a:ext>
-                  </a:extLst>
-                </a:gridCol>
-                <a:gridCol w="693815">
-                  <a:extLst>
-                    <a:ext uri="{9D8B030D-6E8A-4147-A177-3AD203B41FA5}">
-                      <a16:colId xmlns:a16="http://schemas.microsoft.com/office/drawing/2014/main" val="4210074216"/>
-                    </a:ext>
-                  </a:extLst>
-                </a:gridCol>
-              </a:tblGrid>
-              <a:tr h="370840">
-                <a:tc>
-                  <a:txBody>
-                    <a:bodyPr/>
-                    <a:lstStyle/>
-                    <a:p>
-                      <a:pPr algn="ctr"/>
-                      <a:r>
-                        <a:rPr lang="en-GB" sz="1600" dirty="0"/>
-                        <a:t>Node </a:t>
-                      </a:r>
-                      <a:endParaRPr lang="en-SE" sz="1600" dirty="0"/>
-                    </a:p>
-                  </a:txBody>
-                  <a:tcPr/>
-                </a:tc>
-                <a:tc>
-                  <a:txBody>
-                    <a:bodyPr/>
-                    <a:lstStyle/>
-                    <a:p>
-                      <a:pPr algn="ctr"/>
-                      <a:r>
-                        <a:rPr lang="en-GB" sz="1600" dirty="0"/>
-                        <a:t>h()</a:t>
-                      </a:r>
-                      <a:endParaRPr lang="en-SE" sz="1600" dirty="0"/>
-                    </a:p>
-                  </a:txBody>
-                  <a:tcPr/>
-                </a:tc>
-                <a:extLst>
-                  <a:ext uri="{0D108BD9-81ED-4DB2-BD59-A6C34878D82A}">
-                    <a16:rowId xmlns:a16="http://schemas.microsoft.com/office/drawing/2014/main" val="2582891870"/>
-                  </a:ext>
-                </a:extLst>
-              </a:tr>
-              <a:tr h="370840">
-                <a:tc>
-                  <a:txBody>
-                    <a:bodyPr/>
-                    <a:lstStyle/>
-                    <a:p>
-                      <a:pPr algn="ctr"/>
-                      <a:r>
-                        <a:rPr lang="en-GB" sz="1600" dirty="0"/>
-                        <a:t>1</a:t>
-                      </a:r>
-                      <a:endParaRPr lang="en-SE" sz="1600" dirty="0"/>
-                    </a:p>
-                  </a:txBody>
-                  <a:tcPr/>
-                </a:tc>
-                <a:tc>
-                  <a:txBody>
-                    <a:bodyPr/>
-                    <a:lstStyle/>
-                    <a:p>
-                      <a:pPr algn="ctr"/>
-                      <a:endParaRPr lang="en-SE" sz="1600" dirty="0"/>
-                    </a:p>
-                  </a:txBody>
-                  <a:tcPr/>
-                </a:tc>
-                <a:extLst>
-                  <a:ext uri="{0D108BD9-81ED-4DB2-BD59-A6C34878D82A}">
-                    <a16:rowId xmlns:a16="http://schemas.microsoft.com/office/drawing/2014/main" val="1047507187"/>
-                  </a:ext>
-                </a:extLst>
-              </a:tr>
-              <a:tr h="370840">
-                <a:tc>
-                  <a:txBody>
-                    <a:bodyPr/>
-                    <a:lstStyle/>
-                    <a:p>
-                      <a:pPr algn="ctr"/>
-                      <a:r>
-                        <a:rPr lang="en-GB" sz="1600" dirty="0"/>
-                        <a:t>2</a:t>
-                      </a:r>
-                      <a:endParaRPr lang="en-SE" sz="1600" dirty="0"/>
-                    </a:p>
-                  </a:txBody>
-                  <a:tcPr/>
-                </a:tc>
-                <a:tc>
-                  <a:txBody>
-                    <a:bodyPr/>
-                    <a:lstStyle/>
-                    <a:p>
-                      <a:pPr algn="ctr"/>
-                      <a:endParaRPr lang="en-SE" sz="1600" dirty="0"/>
-                    </a:p>
-                  </a:txBody>
-                  <a:tcPr/>
-                </a:tc>
-                <a:extLst>
-                  <a:ext uri="{0D108BD9-81ED-4DB2-BD59-A6C34878D82A}">
-                    <a16:rowId xmlns:a16="http://schemas.microsoft.com/office/drawing/2014/main" val="3620951922"/>
-                  </a:ext>
-                </a:extLst>
-              </a:tr>
-              <a:tr h="370840">
-                <a:tc>
-                  <a:txBody>
-                    <a:bodyPr/>
-                    <a:lstStyle/>
-                    <a:p>
-                      <a:pPr algn="ctr"/>
-                      <a:r>
-                        <a:rPr lang="en-GB" sz="1600" dirty="0"/>
-                        <a:t>3</a:t>
-                      </a:r>
-                      <a:endParaRPr lang="en-SE" sz="1600" dirty="0"/>
-                    </a:p>
-                  </a:txBody>
-                  <a:tcPr/>
-                </a:tc>
-                <a:tc>
-                  <a:txBody>
-                    <a:bodyPr/>
-                    <a:lstStyle/>
-                    <a:p>
-                      <a:pPr algn="ctr"/>
-                      <a:endParaRPr lang="en-SE" sz="1600" dirty="0"/>
-                    </a:p>
-                  </a:txBody>
-                  <a:tcPr/>
-                </a:tc>
-                <a:extLst>
-                  <a:ext uri="{0D108BD9-81ED-4DB2-BD59-A6C34878D82A}">
-                    <a16:rowId xmlns:a16="http://schemas.microsoft.com/office/drawing/2014/main" val="4276274880"/>
-                  </a:ext>
-                </a:extLst>
-              </a:tr>
-              <a:tr h="370840">
-                <a:tc>
-                  <a:txBody>
-                    <a:bodyPr/>
-                    <a:lstStyle/>
-                    <a:p>
-                      <a:pPr algn="ctr"/>
-                      <a:r>
-                        <a:rPr lang="en-GB" sz="1600" dirty="0"/>
-                        <a:t>4</a:t>
-                      </a:r>
-                      <a:endParaRPr lang="en-SE" sz="1600" dirty="0"/>
-                    </a:p>
-                  </a:txBody>
-                  <a:tcPr/>
-                </a:tc>
-                <a:tc>
-                  <a:txBody>
-                    <a:bodyPr/>
-                    <a:lstStyle/>
-                    <a:p>
-                      <a:pPr algn="ctr"/>
-                      <a:endParaRPr lang="en-SE" sz="1600" dirty="0"/>
-                    </a:p>
-                  </a:txBody>
-                  <a:tcPr/>
-                </a:tc>
-                <a:extLst>
-                  <a:ext uri="{0D108BD9-81ED-4DB2-BD59-A6C34878D82A}">
-                    <a16:rowId xmlns:a16="http://schemas.microsoft.com/office/drawing/2014/main" val="2669259463"/>
-                  </a:ext>
-                </a:extLst>
-              </a:tr>
-            </a:tbl>
-          </a:graphicData>
-        </a:graphic>
-      </p:graphicFrame>
-      <p:sp>
-        <p:nvSpPr>
-          <p:cNvPr id="5" name="TextBox 4">
-            <a:extLst>
-              <a:ext uri="{FF2B5EF4-FFF2-40B4-BE49-F238E27FC236}">
-                <a16:creationId xmlns:a16="http://schemas.microsoft.com/office/drawing/2014/main" id="{F0213C2E-33EE-C895-81C1-741DB5D0DF5A}"/>
-              </a:ext>
-            </a:extLst>
-          </p:cNvPr>
-          <p:cNvSpPr txBox="1"/>
-          <p:nvPr/>
-        </p:nvSpPr>
-        <p:spPr>
-          <a:xfrm>
-            <a:off x="4560605" y="5773527"/>
-            <a:ext cx="1704267" cy="923330"/>
-          </a:xfrm>
-          <a:prstGeom prst="rect">
-            <a:avLst/>
-          </a:prstGeom>
-          <a:noFill/>
-        </p:spPr>
-        <p:txBody>
-          <a:bodyPr wrap="square">
-            <a:spAutoFit/>
-          </a:bodyPr>
-          <a:lstStyle/>
-          <a:p>
-            <a:r>
-              <a:rPr lang="en-GB" sz="1800" dirty="0">
-                <a:solidFill>
-                  <a:schemeClr val="tx1"/>
-                </a:solidFill>
-                <a:latin typeface="Quattrocento Sans" panose="020B0502050000020003" pitchFamily="34" charset="0"/>
-              </a:rPr>
-              <a:t>Shortest paths starting from dummy node</a:t>
+              <a:rPr lang="en-US" dirty="0"/>
+              <a:t>Refer to the handout for details.</a:t>
             </a:r>
           </a:p>
         </p:txBody>
@@ -40580,7 +35898,7 @@
     </p:spTree>
     <p:extLst>
       <p:ext uri="{BB962C8B-B14F-4D97-AF65-F5344CB8AC3E}">
-        <p14:creationId xmlns:p14="http://schemas.microsoft.com/office/powerpoint/2010/main" val="269776279"/>
+        <p14:creationId xmlns:p14="http://schemas.microsoft.com/office/powerpoint/2010/main" val="2672158686"/>
       </p:ext>
     </p:extLst>
   </p:cSld>
